--- a/finstack-py/examples/scripts/valuations/instruments/pik_coupon_pricing.pptx
+++ b/finstack-py/examples/scripts/valuations/instruments/pik_coupon_pricing.pptx
@@ -3216,7 +3216,7 @@
               </a:defRPr>
             </a:pPr>
             <a:r>
-              <a:t>Modelling breakeven spreads for Cash, PIK, and Toggle coupons</a:t>
+              <a:t>Modelling breakeven Z-spreads for Cash, PIK, and Toggle coupons</a:t>
             </a:r>
             <a:br/>
             <a:r>
@@ -3624,7 +3624,7 @@
         </p:nvGraphicFramePr>
         <p:xfrm>
           <a:off x="5029200" y="2194560"/>
-          <a:ext cx="3657600" cy="2240279"/>
+          <a:ext cx="3657600" cy="1920239"/>
         </p:xfrm>
         <a:graphic>
           <a:graphicData uri="http://schemas.openxmlformats.org/drawingml/2006/table">
@@ -3726,7 +3726,7 @@
                         </a:defRPr>
                       </a:pPr>
                       <a:r>
-                        <a:t>75</a:t>
+                        <a:t>100 (base)</a:t>
                       </a:r>
                     </a:p>
                   </a:txBody>
@@ -3800,7 +3800,7 @@
                         </a:defRPr>
                       </a:pPr>
                       <a:r>
-                        <a:t>100 (base)</a:t>
+                        <a:t>112.5</a:t>
                       </a:r>
                     </a:p>
                   </a:txBody>
@@ -3824,7 +3824,7 @@
                         </a:defRPr>
                       </a:pPr>
                       <a:r>
-                        <a:t>30.0%</a:t>
+                        <a:t>26.7%</a:t>
                       </a:r>
                     </a:p>
                   </a:txBody>
@@ -3848,7 +3848,7 @@
                         </a:defRPr>
                       </a:pPr>
                       <a:r>
-                        <a:t>—</a:t>
+                        <a:t>−11%</a:t>
                       </a:r>
                     </a:p>
                   </a:txBody>
@@ -3874,7 +3874,7 @@
                         </a:defRPr>
                       </a:pPr>
                       <a:r>
-                        <a:t>112.5</a:t>
+                        <a:t>125</a:t>
                       </a:r>
                     </a:p>
                   </a:txBody>
@@ -3898,7 +3898,7 @@
                         </a:defRPr>
                       </a:pPr>
                       <a:r>
-                        <a:t>26.7%</a:t>
+                        <a:t>24.0%</a:t>
                       </a:r>
                     </a:p>
                   </a:txBody>
@@ -3922,7 +3922,7 @@
                         </a:defRPr>
                       </a:pPr>
                       <a:r>
-                        <a:t>−11%</a:t>
+                        <a:t>−20%</a:t>
                       </a:r>
                     </a:p>
                   </a:txBody>
@@ -3948,7 +3948,7 @@
                         </a:defRPr>
                       </a:pPr>
                       <a:r>
-                        <a:t>125</a:t>
+                        <a:t>137.5</a:t>
                       </a:r>
                     </a:p>
                   </a:txBody>
@@ -3972,7 +3972,7 @@
                         </a:defRPr>
                       </a:pPr>
                       <a:r>
-                        <a:t>24.0%</a:t>
+                        <a:t>21.8%</a:t>
                       </a:r>
                     </a:p>
                   </a:txBody>
@@ -3996,7 +3996,7 @@
                         </a:defRPr>
                       </a:pPr>
                       <a:r>
-                        <a:t>−20%</a:t>
+                        <a:t>−27%</a:t>
                       </a:r>
                     </a:p>
                   </a:txBody>
@@ -4007,7 +4007,7 @@
                   </a:tcPr>
                 </a:tc>
               </a:tr>
-              <a:tr h="320039">
+              <a:tr h="320044">
                 <a:tc>
                   <a:txBody>
                     <a:bodyPr/>
@@ -4022,7 +4022,7 @@
                         </a:defRPr>
                       </a:pPr>
                       <a:r>
-                        <a:t>137.5</a:t>
+                        <a:t>151.8 (full PIK)</a:t>
                       </a:r>
                     </a:p>
                   </a:txBody>
@@ -4046,7 +4046,7 @@
                         </a:defRPr>
                       </a:pPr>
                       <a:r>
-                        <a:t>21.8%</a:t>
+                        <a:t>19.8%</a:t>
                       </a:r>
                     </a:p>
                   </a:txBody>
@@ -4070,87 +4070,13 @@
                         </a:defRPr>
                       </a:pPr>
                       <a:r>
-                        <a:t>−27%</a:t>
+                        <a:t>−34%</a:t>
                       </a:r>
                     </a:p>
                   </a:txBody>
                   <a:tcPr>
                     <a:solidFill>
                       <a:srgbClr val="FFFFFF"/>
-                    </a:solidFill>
-                  </a:tcPr>
-                </a:tc>
-              </a:tr>
-              <a:tr h="320045">
-                <a:tc>
-                  <a:txBody>
-                    <a:bodyPr/>
-                    <a:lstStyle/>
-                    <a:p>
-                      <a:pPr algn="l">
-                        <a:defRPr sz="1100">
-                          <a:solidFill>
-                            <a:srgbClr val="2D2D3D"/>
-                          </a:solidFill>
-                          <a:latin typeface="Calibri"/>
-                        </a:defRPr>
-                      </a:pPr>
-                      <a:r>
-                        <a:t>150</a:t>
-                      </a:r>
-                    </a:p>
-                  </a:txBody>
-                  <a:tcPr>
-                    <a:solidFill>
-                      <a:srgbClr val="E8EBF5"/>
-                    </a:solidFill>
-                  </a:tcPr>
-                </a:tc>
-                <a:tc>
-                  <a:txBody>
-                    <a:bodyPr/>
-                    <a:lstStyle/>
-                    <a:p>
-                      <a:pPr algn="r">
-                        <a:defRPr sz="1100">
-                          <a:solidFill>
-                            <a:srgbClr val="2D2D3D"/>
-                          </a:solidFill>
-                          <a:latin typeface="Calibri"/>
-                        </a:defRPr>
-                      </a:pPr>
-                      <a:r>
-                        <a:t>20.0%</a:t>
-                      </a:r>
-                    </a:p>
-                  </a:txBody>
-                  <a:tcPr>
-                    <a:solidFill>
-                      <a:srgbClr val="E8EBF5"/>
-                    </a:solidFill>
-                  </a:tcPr>
-                </a:tc>
-                <a:tc>
-                  <a:txBody>
-                    <a:bodyPr/>
-                    <a:lstStyle/>
-                    <a:p>
-                      <a:pPr algn="r">
-                        <a:defRPr sz="1100">
-                          <a:solidFill>
-                            <a:srgbClr val="2D2D3D"/>
-                          </a:solidFill>
-                          <a:latin typeface="Calibri"/>
-                        </a:defRPr>
-                      </a:pPr>
-                      <a:r>
-                        <a:t>−33%</a:t>
-                      </a:r>
-                    </a:p>
-                  </a:txBody>
-                  <a:tcPr>
-                    <a:solidFill>
-                      <a:srgbClr val="E8EBF5"/>
                     </a:solidFill>
                   </a:tcPr>
                 </a:tc>
@@ -4167,7 +4093,7 @@
         </p:nvSpPr>
         <p:spPr>
           <a:xfrm>
-            <a:off x="5029200" y="4389120"/>
+            <a:off x="5029200" y="4114800"/>
             <a:ext cx="3657600" cy="274320"/>
           </a:xfrm>
           <a:prstGeom prst="rect">
@@ -4190,7 +4116,7 @@
               </a:defRPr>
             </a:pPr>
             <a:r>
-              <a:t>Example: B- issuer (base recovery 30%)</a:t>
+              <a:t>Example: B− issuer (base recovery 30%)</a:t>
             </a:r>
           </a:p>
         </p:txBody>
@@ -6008,7 +5934,7 @@
               </a:defRPr>
             </a:pPr>
             <a:r>
-              <a:t>PV across all paths → price, spread, expected loss</a:t>
+              <a:t>PV across all paths → price, Z-spread, expected loss</a:t>
             </a:r>
           </a:p>
         </p:txBody>
@@ -6044,7 +5970,7 @@
               </a:defRPr>
             </a:pPr>
             <a:r>
-              <a:t>Steps 3-5 create the feedback loop: PIK → higher notional → recalculated hazard and recovery → different default/survival outcomes.</a:t>
+              <a:t>Steps 3–5 create the feedback loop: PIK → higher notional → recalculated hazard and recovery → different default/survival outcomes.</a:t>
             </a:r>
           </a:p>
         </p:txBody>
@@ -6159,7 +6085,7 @@
               </a:defRPr>
             </a:pPr>
             <a:r>
-              <a:t>Breakeven Spreads: The Answer</a:t>
+              <a:t>Breakeven Z-Spreads: The Answer</a:t>
             </a:r>
           </a:p>
         </p:txBody>
@@ -6195,7 +6121,7 @@
               </a:defRPr>
             </a:pPr>
             <a:r>
-              <a:t>Merton MC effective spreads by structure and credit quality</a:t>
+              <a:t>Cash-equivalent Z-spreads by structure and credit quality</a:t>
             </a:r>
           </a:p>
         </p:txBody>
@@ -6246,7 +6172,7 @@
         </p:nvGraphicFramePr>
         <p:xfrm>
           <a:off x="457200" y="1280160"/>
-          <a:ext cx="7955280" cy="1920239"/>
+          <a:ext cx="7498080" cy="1920239"/>
         </p:xfrm>
         <a:graphic>
           <a:graphicData uri="http://schemas.openxmlformats.org/drawingml/2006/table">
@@ -6258,9 +6184,9 @@
                 <a:gridCol w="2286000"/>
                 <a:gridCol w="1005840"/>
                 <a:gridCol w="1005840"/>
-                <a:gridCol w="1188720"/>
+                <a:gridCol w="1005840"/>
                 <a:gridCol w="1097280"/>
-                <a:gridCol w="1371600"/>
+                <a:gridCol w="1097280"/>
               </a:tblGrid>
               <a:tr h="320039">
                 <a:tc>
@@ -6301,7 +6227,7 @@
                         </a:defRPr>
                       </a:pPr>
                       <a:r>
-                        <a:t>Cash (bp)</a:t>
+                        <a:t>Cash</a:t>
                       </a:r>
                     </a:p>
                   </a:txBody>
@@ -6325,7 +6251,7 @@
                         </a:defRPr>
                       </a:pPr>
                       <a:r>
-                        <a:t>PIK (bp)</a:t>
+                        <a:t>PIK</a:t>
                       </a:r>
                     </a:p>
                   </a:txBody>
@@ -6349,7 +6275,7 @@
                         </a:defRPr>
                       </a:pPr>
                       <a:r>
-                        <a:t>Toggle (bp)</a:t>
+                        <a:t>Toggle</a:t>
                       </a:r>
                     </a:p>
                   </a:txBody>
@@ -6373,7 +6299,7 @@
                         </a:defRPr>
                       </a:pPr>
                       <a:r>
-                        <a:t>PIK − Cash</a:t>
+                        <a:t>PIK−Cash</a:t>
                       </a:r>
                     </a:p>
                   </a:txBody>
@@ -6397,7 +6323,7 @@
                         </a:defRPr>
                       </a:pPr>
                       <a:r>
-                        <a:t>Toggle − Cash</a:t>
+                        <a:t>Tog−Cash</a:t>
                       </a:r>
                     </a:p>
                   </a:txBody>
@@ -6447,7 +6373,7 @@
                         </a:defRPr>
                       </a:pPr>
                       <a:r>
-                        <a:t>—*</a:t>
+                        <a:t>20bp</a:t>
                       </a:r>
                     </a:p>
                   </a:txBody>
@@ -6471,7 +6397,7 @@
                         </a:defRPr>
                       </a:pPr>
                       <a:r>
-                        <a:t>—*</a:t>
+                        <a:t>−39bp</a:t>
                       </a:r>
                     </a:p>
                   </a:txBody>
@@ -6495,7 +6421,7 @@
                         </a:defRPr>
                       </a:pPr>
                       <a:r>
-                        <a:t>—*</a:t>
+                        <a:t>22bp</a:t>
                       </a:r>
                     </a:p>
                   </a:txBody>
@@ -6519,7 +6445,7 @@
                         </a:defRPr>
                       </a:pPr>
                       <a:r>
-                        <a:t>−5</a:t>
+                        <a:t>−59</a:t>
                       </a:r>
                     </a:p>
                   </a:txBody>
@@ -6543,7 +6469,7 @@
                         </a:defRPr>
                       </a:pPr>
                       <a:r>
-                        <a:t>−5</a:t>
+                        <a:t>+1</a:t>
                       </a:r>
                     </a:p>
                   </a:txBody>
@@ -6569,7 +6495,7 @@
                         </a:defRPr>
                       </a:pPr>
                       <a:r>
-                        <a:t>BB- (Mid HY)</a:t>
+                        <a:t>BB− (Mid HY)</a:t>
                       </a:r>
                     </a:p>
                   </a:txBody>
@@ -6593,7 +6519,7 @@
                         </a:defRPr>
                       </a:pPr>
                       <a:r>
-                        <a:t>—*</a:t>
+                        <a:t>110bp</a:t>
                       </a:r>
                     </a:p>
                   </a:txBody>
@@ -6617,7 +6543,7 @@
                         </a:defRPr>
                       </a:pPr>
                       <a:r>
-                        <a:t>—*</a:t>
+                        <a:t>88bp</a:t>
                       </a:r>
                     </a:p>
                   </a:txBody>
@@ -6641,7 +6567,7 @@
                         </a:defRPr>
                       </a:pPr>
                       <a:r>
-                        <a:t>—*</a:t>
+                        <a:t>130bp</a:t>
                       </a:r>
                     </a:p>
                   </a:txBody>
@@ -6665,7 +6591,7 @@
                         </a:defRPr>
                       </a:pPr>
                       <a:r>
-                        <a:t>+0</a:t>
+                        <a:t>−22</a:t>
                       </a:r>
                     </a:p>
                   </a:txBody>
@@ -6689,7 +6615,7 @@
                         </a:defRPr>
                       </a:pPr>
                       <a:r>
-                        <a:t>+0</a:t>
+                        <a:t>+20</a:t>
                       </a:r>
                     </a:p>
                   </a:txBody>
@@ -6739,7 +6665,7 @@
                         </a:defRPr>
                       </a:pPr>
                       <a:r>
-                        <a:t>22</a:t>
+                        <a:t>292bp</a:t>
                       </a:r>
                     </a:p>
                   </a:txBody>
@@ -6763,7 +6689,7 @@
                         </a:defRPr>
                       </a:pPr>
                       <a:r>
-                        <a:t>89</a:t>
+                        <a:t>329bp</a:t>
                       </a:r>
                     </a:p>
                   </a:txBody>
@@ -6787,7 +6713,7 @@
                         </a:defRPr>
                       </a:pPr>
                       <a:r>
-                        <a:t>106</a:t>
+                        <a:t>346bp</a:t>
                       </a:r>
                     </a:p>
                   </a:txBody>
@@ -6811,7 +6737,7 @@
                         </a:defRPr>
                       </a:pPr>
                       <a:r>
-                        <a:t>+67</a:t>
+                        <a:t>+37</a:t>
                       </a:r>
                     </a:p>
                   </a:txBody>
@@ -6835,7 +6761,7 @@
                         </a:defRPr>
                       </a:pPr>
                       <a:r>
-                        <a:t>+84</a:t>
+                        <a:t>+54</a:t>
                       </a:r>
                     </a:p>
                   </a:txBody>
@@ -6861,7 +6787,7 @@
                         </a:defRPr>
                       </a:pPr>
                       <a:r>
-                        <a:t>B- (Stressed)</a:t>
+                        <a:t>B− (Stressed)</a:t>
                       </a:r>
                     </a:p>
                   </a:txBody>
@@ -6885,7 +6811,7 @@
                         </a:defRPr>
                       </a:pPr>
                       <a:r>
-                        <a:t>453</a:t>
+                        <a:t>710bp</a:t>
                       </a:r>
                     </a:p>
                   </a:txBody>
@@ -6909,7 +6835,7 @@
                         </a:defRPr>
                       </a:pPr>
                       <a:r>
-                        <a:t>689</a:t>
+                        <a:t>851bp</a:t>
                       </a:r>
                     </a:p>
                   </a:txBody>
@@ -6933,7 +6859,7 @@
                         </a:defRPr>
                       </a:pPr>
                       <a:r>
-                        <a:t>743</a:t>
+                        <a:t>862bp</a:t>
                       </a:r>
                     </a:p>
                   </a:txBody>
@@ -6957,7 +6883,7 @@
                         </a:defRPr>
                       </a:pPr>
                       <a:r>
-                        <a:t>+236</a:t>
+                        <a:t>+141</a:t>
                       </a:r>
                     </a:p>
                   </a:txBody>
@@ -6981,7 +6907,7 @@
                         </a:defRPr>
                       </a:pPr>
                       <a:r>
-                        <a:t>+290</a:t>
+                        <a:t>+151</a:t>
                       </a:r>
                     </a:p>
                   </a:txBody>
@@ -7031,7 +6957,7 @@
                         </a:defRPr>
                       </a:pPr>
                       <a:r>
-                        <a:t>773</a:t>
+                        <a:t>1,497bp</a:t>
                       </a:r>
                     </a:p>
                   </a:txBody>
@@ -7055,7 +6981,7 @@
                         </a:defRPr>
                       </a:pPr>
                       <a:r>
-                        <a:t>1,288</a:t>
+                        <a:t>1,759bp</a:t>
                       </a:r>
                     </a:p>
                   </a:txBody>
@@ -7079,7 +7005,7 @@
                         </a:defRPr>
                       </a:pPr>
                       <a:r>
-                        <a:t>1,388</a:t>
+                        <a:t>1,763bp</a:t>
                       </a:r>
                     </a:p>
                   </a:txBody>
@@ -7103,7 +7029,7 @@
                         </a:defRPr>
                       </a:pPr>
                       <a:r>
-                        <a:t>+515</a:t>
+                        <a:t>+262</a:t>
                       </a:r>
                     </a:p>
                   </a:txBody>
@@ -7127,7 +7053,7 @@
                         </a:defRPr>
                       </a:pPr>
                       <a:r>
-                        <a:t>+615</a:t>
+                        <a:t>+266</a:t>
                       </a:r>
                     </a:p>
                   </a:txBody>
@@ -7151,7 +7077,7 @@
         <p:spPr>
           <a:xfrm>
             <a:off x="457200" y="3657600"/>
-            <a:ext cx="8229600" cy="274320"/>
+            <a:ext cx="8229600" cy="365760"/>
           </a:xfrm>
           <a:prstGeom prst="rect">
             <a:avLst/>
@@ -7173,7 +7099,7 @@
               </a:defRPr>
             </a:pPr>
             <a:r>
-              <a:t>* BB+ and BB- bonds price above par (negative spread to risk-free). PIK premium still applies to the relative difference.</a:t>
+              <a:t>Z-spreads are cash-equivalent: the Z-spread on a standard cash-pay bond that reproduces each structure’s MC price.</a:t>
             </a:r>
           </a:p>
         </p:txBody>
@@ -7212,7 +7138,7 @@
               </a:defRPr>
             </a:pPr>
             <a:r>
-              <a:t>BB+ to BB-: PIK premium is negligible (0-5bp). Defaults are too rare for the feedback loop to matter.</a:t>
+              <a:t>BB+ to BB−: PIK Z-spread is BELOW cash — compounding benefit exceeds survival penalty when defaults are rare. The simple model (slide 6) predicted PIK always trades below cash — the structural model reverses this for strong credits</a:t>
             </a:r>
           </a:p>
           <a:p>
@@ -7228,7 +7154,7 @@
               </a:defRPr>
             </a:pPr>
             <a:r>
-              <a:t>B: PIK premium of ~67bp. The feedback loop starts to bite.</a:t>
+              <a:t>Crossover near B: the feedback loop starts to overcome the compounding benefit (ΔZ = +37bp)</a:t>
             </a:r>
           </a:p>
           <a:p>
@@ -7244,23 +7170,7 @@
               </a:defRPr>
             </a:pPr>
             <a:r>
-              <a:t>B- : PIK premium of ~236bp. The spiral is significant — PIK spread is 50% higher than cash.</a:t>
-            </a:r>
-          </a:p>
-          <a:p>
-            <a:pPr>
-              <a:spcAft>
-                <a:spcPts val="800"/>
-              </a:spcAft>
-              <a:defRPr sz="1400">
-                <a:solidFill>
-                  <a:srgbClr val="2D2D3D"/>
-                </a:solidFill>
-                <a:latin typeface="Calibri"/>
-              </a:defRPr>
-            </a:pPr>
-            <a:r>
-              <a:t>CCC: PIK premium of ~515bp. The feedback loop dominates — PIK spread is 67% higher than cash.</a:t>
+              <a:t>B− to CCC: PIK premium of +141bp to +262bp. Here both models agree PIK is cheaper, but the structural model captures the self-reinforcing spiral that the simple model missed</a:t>
             </a:r>
           </a:p>
         </p:txBody>
@@ -7313,7 +7223,7 @@
               </a:defRPr>
             </a:pPr>
             <a:r>
-              <a:t>The PIK premium is NOT a flat "add 50bp." It ranges from zero to 500+ bp.</a:t>
+              <a:t>The PIK premium crosses zero near 300bp market spread. Below that, PIK actually benefits investors.</a:t>
             </a:r>
           </a:p>
         </p:txBody>
@@ -7428,7 +7338,7 @@
               </a:defRPr>
             </a:pPr>
             <a:r>
-              <a:t>PIK Premium vs Asset Coverage</a:t>
+              <a:t>PIK Premium vs Credit Quality</a:t>
             </a:r>
           </a:p>
         </p:txBody>
@@ -7544,7 +7454,7 @@
                         </a:defRPr>
                       </a:pPr>
                       <a:r>
-                        <a:t>Coverage</a:t>
+                        <a:t>Mkt Spread</a:t>
                       </a:r>
                     </a:p>
                   </a:txBody>
@@ -7568,7 +7478,7 @@
                         </a:defRPr>
                       </a:pPr>
                       <a:r>
-                        <a:t>Cash (bp)</a:t>
+                        <a:t>Cash Z</a:t>
                       </a:r>
                     </a:p>
                   </a:txBody>
@@ -7592,7 +7502,7 @@
                         </a:defRPr>
                       </a:pPr>
                       <a:r>
-                        <a:t>PIK (bp)</a:t>
+                        <a:t>PIK Z</a:t>
                       </a:r>
                     </a:p>
                   </a:txBody>
@@ -7642,7 +7552,7 @@
                         </a:defRPr>
                       </a:pPr>
                       <a:r>
-                        <a:t>1.10x</a:t>
+                        <a:t>50bp</a:t>
                       </a:r>
                     </a:p>
                   </a:txBody>
@@ -7666,7 +7576,7 @@
                         </a:defRPr>
                       </a:pPr>
                       <a:r>
-                        <a:t>716</a:t>
+                        <a:t>10bp</a:t>
                       </a:r>
                     </a:p>
                   </a:txBody>
@@ -7690,7 +7600,7 @@
                         </a:defRPr>
                       </a:pPr>
                       <a:r>
-                        <a:t>864</a:t>
+                        <a:t>−55bp</a:t>
                       </a:r>
                     </a:p>
                   </a:txBody>
@@ -7714,7 +7624,7 @@
                         </a:defRPr>
                       </a:pPr>
                       <a:r>
-                        <a:t>+149bp</a:t>
+                        <a:t>−65bp</a:t>
                       </a:r>
                     </a:p>
                   </a:txBody>
@@ -7740,7 +7650,7 @@
                         </a:defRPr>
                       </a:pPr>
                       <a:r>
-                        <a:t>1.25x</a:t>
+                        <a:t>100bp</a:t>
                       </a:r>
                     </a:p>
                   </a:txBody>
@@ -7764,7 +7674,7 @@
                         </a:defRPr>
                       </a:pPr>
                       <a:r>
-                        <a:t>296</a:t>
+                        <a:t>31bp</a:t>
                       </a:r>
                     </a:p>
                   </a:txBody>
@@ -7788,7 +7698,7 @@
                         </a:defRPr>
                       </a:pPr>
                       <a:r>
-                        <a:t>392</a:t>
+                        <a:t>−24bp</a:t>
                       </a:r>
                     </a:p>
                   </a:txBody>
@@ -7812,7 +7722,7 @@
                         </a:defRPr>
                       </a:pPr>
                       <a:r>
-                        <a:t>+96bp</a:t>
+                        <a:t>−54bp</a:t>
                       </a:r>
                     </a:p>
                   </a:txBody>
@@ -7838,7 +7748,7 @@
                         </a:defRPr>
                       </a:pPr>
                       <a:r>
-                        <a:t>1.40x</a:t>
+                        <a:t>200bp</a:t>
                       </a:r>
                     </a:p>
                   </a:txBody>
@@ -7862,7 +7772,7 @@
                         </a:defRPr>
                       </a:pPr>
                       <a:r>
-                        <a:t>22</a:t>
+                        <a:t>87bp</a:t>
                       </a:r>
                     </a:p>
                   </a:txBody>
@@ -7886,7 +7796,7 @@
                         </a:defRPr>
                       </a:pPr>
                       <a:r>
-                        <a:t>89</a:t>
+                        <a:t>56bp</a:t>
                       </a:r>
                     </a:p>
                   </a:txBody>
@@ -7910,7 +7820,7 @@
                         </a:defRPr>
                       </a:pPr>
                       <a:r>
-                        <a:t>+67bp</a:t>
+                        <a:t>−31bp</a:t>
                       </a:r>
                     </a:p>
                   </a:txBody>
@@ -7936,7 +7846,7 @@
                         </a:defRPr>
                       </a:pPr>
                       <a:r>
-                        <a:t>1.55x</a:t>
+                        <a:t>300bp</a:t>
                       </a:r>
                     </a:p>
                   </a:txBody>
@@ -7960,7 +7870,7 @@
                         </a:defRPr>
                       </a:pPr>
                       <a:r>
-                        <a:t>−160</a:t>
+                        <a:t>168bp</a:t>
                       </a:r>
                     </a:p>
                   </a:txBody>
@@ -7984,7 +7894,7 @@
                         </a:defRPr>
                       </a:pPr>
                       <a:r>
-                        <a:t>−110</a:t>
+                        <a:t>166bp</a:t>
                       </a:r>
                     </a:p>
                   </a:txBody>
@@ -8008,7 +7918,7 @@
                         </a:defRPr>
                       </a:pPr>
                       <a:r>
-                        <a:t>+50bp</a:t>
+                        <a:t>−2bp</a:t>
                       </a:r>
                     </a:p>
                   </a:txBody>
@@ -8034,7 +7944,7 @@
                         </a:defRPr>
                       </a:pPr>
                       <a:r>
-                        <a:t>1.70x</a:t>
+                        <a:t>400bp</a:t>
                       </a:r>
                     </a:p>
                   </a:txBody>
@@ -8058,7 +7968,7 @@
                         </a:defRPr>
                       </a:pPr>
                       <a:r>
-                        <a:t>−296</a:t>
+                        <a:t>292bp</a:t>
                       </a:r>
                     </a:p>
                   </a:txBody>
@@ -8082,7 +7992,7 @@
                         </a:defRPr>
                       </a:pPr>
                       <a:r>
-                        <a:t>−259</a:t>
+                        <a:t>329bp</a:t>
                       </a:r>
                     </a:p>
                   </a:txBody>
@@ -8106,7 +8016,7 @@
                         </a:defRPr>
                       </a:pPr>
                       <a:r>
-                        <a:t>+38bp</a:t>
+                        <a:t>+37bp</a:t>
                       </a:r>
                     </a:p>
                   </a:txBody>
@@ -8132,7 +8042,7 @@
                         </a:defRPr>
                       </a:pPr>
                       <a:r>
-                        <a:t>1.85x</a:t>
+                        <a:t>600bp</a:t>
                       </a:r>
                     </a:p>
                   </a:txBody>
@@ -8156,7 +8066,7 @@
                         </a:defRPr>
                       </a:pPr>
                       <a:r>
-                        <a:t>−395</a:t>
+                        <a:t>552bp</a:t>
                       </a:r>
                     </a:p>
                   </a:txBody>
@@ -8180,7 +8090,7 @@
                         </a:defRPr>
                       </a:pPr>
                       <a:r>
-                        <a:t>−366</a:t>
+                        <a:t>659bp</a:t>
                       </a:r>
                     </a:p>
                   </a:txBody>
@@ -8204,7 +8114,7 @@
                         </a:defRPr>
                       </a:pPr>
                       <a:r>
-                        <a:t>+29bp</a:t>
+                        <a:t>+107bp</a:t>
                       </a:r>
                     </a:p>
                   </a:txBody>
@@ -8230,7 +8140,7 @@
                         </a:defRPr>
                       </a:pPr>
                       <a:r>
-                        <a:t>2.00x</a:t>
+                        <a:t>850bp</a:t>
                       </a:r>
                     </a:p>
                   </a:txBody>
@@ -8254,7 +8164,7 @@
                         </a:defRPr>
                       </a:pPr>
                       <a:r>
-                        <a:t>−465</a:t>
+                        <a:t>1,119bp</a:t>
                       </a:r>
                     </a:p>
                   </a:txBody>
@@ -8278,7 +8188,7 @@
                         </a:defRPr>
                       </a:pPr>
                       <a:r>
-                        <a:t>−442</a:t>
+                        <a:t>1,335bp</a:t>
                       </a:r>
                     </a:p>
                   </a:txBody>
@@ -8302,7 +8212,7 @@
                         </a:defRPr>
                       </a:pPr>
                       <a:r>
-                        <a:t>+24bp</a:t>
+                        <a:t>+216bp</a:t>
                       </a:r>
                     </a:p>
                   </a:txBody>
@@ -8328,7 +8238,7 @@
                         </a:defRPr>
                       </a:pPr>
                       <a:r>
-                        <a:t>2.15x</a:t>
+                        <a:t>1,200bp</a:t>
                       </a:r>
                     </a:p>
                   </a:txBody>
@@ -8352,7 +8262,7 @@
                         </a:defRPr>
                       </a:pPr>
                       <a:r>
-                        <a:t>−520</a:t>
+                        <a:t>1,702bp</a:t>
                       </a:r>
                     </a:p>
                   </a:txBody>
@@ -8376,7 +8286,7 @@
                         </a:defRPr>
                       </a:pPr>
                       <a:r>
-                        <a:t>−501</a:t>
+                        <a:t>1,990bp</a:t>
                       </a:r>
                     </a:p>
                   </a:txBody>
@@ -8400,7 +8310,7 @@
                         </a:defRPr>
                       </a:pPr>
                       <a:r>
-                        <a:t>+19bp</a:t>
+                        <a:t>+287bp</a:t>
                       </a:r>
                     </a:p>
                   </a:txBody>
@@ -8446,7 +8356,7 @@
               </a:defRPr>
             </a:pPr>
             <a:r>
-              <a:t>PIK Premium (bp)</a:t>
+              <a:t>PIK Z-Spread Premium</a:t>
             </a:r>
           </a:p>
         </p:txBody>
@@ -8459,8 +8369,8 @@
         </p:nvSpPr>
         <p:spPr>
           <a:xfrm>
-            <a:off x="5760720" y="1554480"/>
-            <a:ext cx="457200" cy="274320"/>
+            <a:off x="5577840" y="1554480"/>
+            <a:ext cx="548640" cy="274320"/>
           </a:xfrm>
           <a:prstGeom prst="rect">
             <a:avLst/>
@@ -8474,7 +8384,7 @@
           <a:lstStyle/>
           <a:p>
             <a:pPr algn="l">
-              <a:defRPr sz="1000" b="0">
+              <a:defRPr sz="900" b="0">
                 <a:solidFill>
                   <a:srgbClr val="555570"/>
                 </a:solidFill>
@@ -8482,7 +8392,7 @@
               </a:defRPr>
             </a:pPr>
             <a:r>
-              <a:t>1.10x</a:t>
+              <a:t>50bp</a:t>
             </a:r>
           </a:p>
         </p:txBody>
@@ -8495,14 +8405,14 @@
         </p:nvSpPr>
         <p:spPr>
           <a:xfrm>
-            <a:off x="6217920" y="1579880"/>
-            <a:ext cx="2286000" cy="177800"/>
+            <a:off x="6821679" y="1579880"/>
+            <a:ext cx="310641" cy="177800"/>
           </a:xfrm>
           <a:prstGeom prst="rect">
             <a:avLst/>
           </a:prstGeom>
           <a:solidFill>
-            <a:srgbClr val="E04F4F"/>
+            <a:srgbClr val="5CB85C"/>
           </a:solidFill>
           <a:ln>
             <a:noFill/>
@@ -8538,8 +8448,8 @@
         </p:nvSpPr>
         <p:spPr>
           <a:xfrm>
-            <a:off x="8554720" y="1541780"/>
-            <a:ext cx="731520" cy="274320"/>
+            <a:off x="6273039" y="1541780"/>
+            <a:ext cx="548640" cy="274320"/>
           </a:xfrm>
           <a:prstGeom prst="rect">
             <a:avLst/>
@@ -8552,16 +8462,16 @@
           </a:bodyPr>
           <a:lstStyle/>
           <a:p>
-            <a:pPr algn="l">
-              <a:defRPr sz="1000" b="1">
-                <a:solidFill>
-                  <a:srgbClr val="E04F4F"/>
-                </a:solidFill>
-                <a:latin typeface="Calibri"/>
-              </a:defRPr>
-            </a:pPr>
-            <a:r>
-              <a:t>+149</a:t>
+            <a:pPr algn="r">
+              <a:defRPr sz="900" b="1">
+                <a:solidFill>
+                  <a:srgbClr val="5CB85C"/>
+                </a:solidFill>
+                <a:latin typeface="Calibri"/>
+              </a:defRPr>
+            </a:pPr>
+            <a:r>
+              <a:t>-65</a:t>
             </a:r>
           </a:p>
         </p:txBody>
@@ -8574,8 +8484,8 @@
         </p:nvSpPr>
         <p:spPr>
           <a:xfrm>
-            <a:off x="5760720" y="1965960"/>
-            <a:ext cx="457200" cy="274320"/>
+            <a:off x="5577840" y="2011680"/>
+            <a:ext cx="548640" cy="274320"/>
           </a:xfrm>
           <a:prstGeom prst="rect">
             <a:avLst/>
@@ -8589,7 +8499,7 @@
           <a:lstStyle/>
           <a:p>
             <a:pPr algn="l">
-              <a:defRPr sz="1000" b="0">
+              <a:defRPr sz="900" b="0">
                 <a:solidFill>
                   <a:srgbClr val="555570"/>
                 </a:solidFill>
@@ -8597,7 +8507,7 @@
               </a:defRPr>
             </a:pPr>
             <a:r>
-              <a:t>1.25x</a:t>
+              <a:t>100bp</a:t>
             </a:r>
           </a:p>
         </p:txBody>
@@ -8610,14 +8520,14 @@
         </p:nvSpPr>
         <p:spPr>
           <a:xfrm>
-            <a:off x="6217920" y="1991360"/>
-            <a:ext cx="1472859" cy="177800"/>
+            <a:off x="6874249" y="2037080"/>
+            <a:ext cx="258071" cy="177800"/>
           </a:xfrm>
           <a:prstGeom prst="rect">
             <a:avLst/>
           </a:prstGeom>
           <a:solidFill>
-            <a:srgbClr val="E04F4F"/>
+            <a:srgbClr val="5CB85C"/>
           </a:solidFill>
           <a:ln>
             <a:noFill/>
@@ -8653,8 +8563,8 @@
         </p:nvSpPr>
         <p:spPr>
           <a:xfrm>
-            <a:off x="7741579" y="1953260"/>
-            <a:ext cx="731520" cy="274320"/>
+            <a:off x="6325609" y="1998980"/>
+            <a:ext cx="548640" cy="274320"/>
           </a:xfrm>
           <a:prstGeom prst="rect">
             <a:avLst/>
@@ -8667,16 +8577,16 @@
           </a:bodyPr>
           <a:lstStyle/>
           <a:p>
-            <a:pPr algn="l">
-              <a:defRPr sz="1000" b="1">
-                <a:solidFill>
-                  <a:srgbClr val="E04F4F"/>
-                </a:solidFill>
-                <a:latin typeface="Calibri"/>
-              </a:defRPr>
-            </a:pPr>
-            <a:r>
-              <a:t>+96</a:t>
+            <a:pPr algn="r">
+              <a:defRPr sz="900" b="1">
+                <a:solidFill>
+                  <a:srgbClr val="5CB85C"/>
+                </a:solidFill>
+                <a:latin typeface="Calibri"/>
+              </a:defRPr>
+            </a:pPr>
+            <a:r>
+              <a:t>-54</a:t>
             </a:r>
           </a:p>
         </p:txBody>
@@ -8689,8 +8599,8 @@
         </p:nvSpPr>
         <p:spPr>
           <a:xfrm>
-            <a:off x="5760720" y="2377440"/>
-            <a:ext cx="457200" cy="274320"/>
+            <a:off x="5577840" y="2468880"/>
+            <a:ext cx="548640" cy="274320"/>
           </a:xfrm>
           <a:prstGeom prst="rect">
             <a:avLst/>
@@ -8704,7 +8614,7 @@
           <a:lstStyle/>
           <a:p>
             <a:pPr algn="l">
-              <a:defRPr sz="1000" b="0">
+              <a:defRPr sz="900" b="0">
                 <a:solidFill>
                   <a:srgbClr val="555570"/>
                 </a:solidFill>
@@ -8712,7 +8622,7 @@
               </a:defRPr>
             </a:pPr>
             <a:r>
-              <a:t>1.40x</a:t>
+              <a:t>200bp</a:t>
             </a:r>
           </a:p>
         </p:txBody>
@@ -8725,14 +8635,14 @@
         </p:nvSpPr>
         <p:spPr>
           <a:xfrm>
-            <a:off x="6217920" y="2402840"/>
-            <a:ext cx="1027932" cy="177800"/>
+            <a:off x="6984169" y="2494280"/>
+            <a:ext cx="148151" cy="177800"/>
           </a:xfrm>
           <a:prstGeom prst="rect">
             <a:avLst/>
           </a:prstGeom>
           <a:solidFill>
-            <a:srgbClr val="E88D3F"/>
+            <a:srgbClr val="5CB85C"/>
           </a:solidFill>
           <a:ln>
             <a:noFill/>
@@ -8768,8 +8678,8 @@
         </p:nvSpPr>
         <p:spPr>
           <a:xfrm>
-            <a:off x="7296652" y="2364740"/>
-            <a:ext cx="731520" cy="274320"/>
+            <a:off x="6435529" y="2456180"/>
+            <a:ext cx="548640" cy="274320"/>
           </a:xfrm>
           <a:prstGeom prst="rect">
             <a:avLst/>
@@ -8782,16 +8692,16 @@
           </a:bodyPr>
           <a:lstStyle/>
           <a:p>
-            <a:pPr algn="l">
-              <a:defRPr sz="1000" b="1">
-                <a:solidFill>
-                  <a:srgbClr val="E88D3F"/>
-                </a:solidFill>
-                <a:latin typeface="Calibri"/>
-              </a:defRPr>
-            </a:pPr>
-            <a:r>
-              <a:t>+67</a:t>
+            <a:pPr algn="r">
+              <a:defRPr sz="900" b="1">
+                <a:solidFill>
+                  <a:srgbClr val="5CB85C"/>
+                </a:solidFill>
+                <a:latin typeface="Calibri"/>
+              </a:defRPr>
+            </a:pPr>
+            <a:r>
+              <a:t>-31</a:t>
             </a:r>
           </a:p>
         </p:txBody>
@@ -8804,8 +8714,8 @@
         </p:nvSpPr>
         <p:spPr>
           <a:xfrm>
-            <a:off x="5760720" y="2788920"/>
-            <a:ext cx="457200" cy="274320"/>
+            <a:off x="5577840" y="2926080"/>
+            <a:ext cx="548640" cy="274320"/>
           </a:xfrm>
           <a:prstGeom prst="rect">
             <a:avLst/>
@@ -8819,7 +8729,7 @@
           <a:lstStyle/>
           <a:p>
             <a:pPr algn="l">
-              <a:defRPr sz="1000" b="0">
+              <a:defRPr sz="900" b="0">
                 <a:solidFill>
                   <a:srgbClr val="555570"/>
                 </a:solidFill>
@@ -8827,7 +8737,7 @@
               </a:defRPr>
             </a:pPr>
             <a:r>
-              <a:t>1.55x</a:t>
+              <a:t>300bp</a:t>
             </a:r>
           </a:p>
         </p:txBody>
@@ -8840,14 +8750,14 @@
         </p:nvSpPr>
         <p:spPr>
           <a:xfrm>
-            <a:off x="6217920" y="2814320"/>
-            <a:ext cx="767114" cy="177800"/>
+            <a:off x="7122762" y="2951480"/>
+            <a:ext cx="9558" cy="177800"/>
           </a:xfrm>
           <a:prstGeom prst="rect">
             <a:avLst/>
           </a:prstGeom>
           <a:solidFill>
-            <a:srgbClr val="E88D3F"/>
+            <a:srgbClr val="5CB85C"/>
           </a:solidFill>
           <a:ln>
             <a:noFill/>
@@ -8883,8 +8793,8 @@
         </p:nvSpPr>
         <p:spPr>
           <a:xfrm>
-            <a:off x="7035834" y="2776220"/>
-            <a:ext cx="731520" cy="274320"/>
+            <a:off x="6574122" y="2913380"/>
+            <a:ext cx="548640" cy="274320"/>
           </a:xfrm>
           <a:prstGeom prst="rect">
             <a:avLst/>
@@ -8897,16 +8807,16 @@
           </a:bodyPr>
           <a:lstStyle/>
           <a:p>
-            <a:pPr algn="l">
-              <a:defRPr sz="1000" b="1">
-                <a:solidFill>
-                  <a:srgbClr val="E88D3F"/>
-                </a:solidFill>
-                <a:latin typeface="Calibri"/>
-              </a:defRPr>
-            </a:pPr>
-            <a:r>
-              <a:t>+50</a:t>
+            <a:pPr algn="r">
+              <a:defRPr sz="900" b="1">
+                <a:solidFill>
+                  <a:srgbClr val="5CB85C"/>
+                </a:solidFill>
+                <a:latin typeface="Calibri"/>
+              </a:defRPr>
+            </a:pPr>
+            <a:r>
+              <a:t>-2</a:t>
             </a:r>
           </a:p>
         </p:txBody>
@@ -8919,8 +8829,8 @@
         </p:nvSpPr>
         <p:spPr>
           <a:xfrm>
-            <a:off x="5760720" y="3200400"/>
-            <a:ext cx="457200" cy="274320"/>
+            <a:off x="5577840" y="3383280"/>
+            <a:ext cx="548640" cy="274320"/>
           </a:xfrm>
           <a:prstGeom prst="rect">
             <a:avLst/>
@@ -8934,7 +8844,7 @@
           <a:lstStyle/>
           <a:p>
             <a:pPr algn="l">
-              <a:defRPr sz="1000" b="0">
+              <a:defRPr sz="900" b="0">
                 <a:solidFill>
                   <a:srgbClr val="555570"/>
                 </a:solidFill>
@@ -8942,7 +8852,7 @@
               </a:defRPr>
             </a:pPr>
             <a:r>
-              <a:t>1.70x</a:t>
+              <a:t>400bp</a:t>
             </a:r>
           </a:p>
         </p:txBody>
@@ -8955,14 +8865,14 @@
         </p:nvSpPr>
         <p:spPr>
           <a:xfrm>
-            <a:off x="6217920" y="3225800"/>
-            <a:ext cx="583006" cy="177800"/>
+            <a:off x="7132320" y="3408680"/>
+            <a:ext cx="176826" cy="177800"/>
           </a:xfrm>
           <a:prstGeom prst="rect">
             <a:avLst/>
           </a:prstGeom>
           <a:solidFill>
-            <a:srgbClr val="5CB85C"/>
+            <a:srgbClr val="E88D3F"/>
           </a:solidFill>
           <a:ln>
             <a:noFill/>
@@ -8998,7 +8908,7 @@
         </p:nvSpPr>
         <p:spPr>
           <a:xfrm>
-            <a:off x="6851726" y="3187700"/>
+            <a:off x="7359946" y="3370580"/>
             <a:ext cx="731520" cy="274320"/>
           </a:xfrm>
           <a:prstGeom prst="rect">
@@ -9013,15 +8923,15 @@
           <a:lstStyle/>
           <a:p>
             <a:pPr algn="l">
-              <a:defRPr sz="1000" b="1">
-                <a:solidFill>
-                  <a:srgbClr val="5CB85C"/>
-                </a:solidFill>
-                <a:latin typeface="Calibri"/>
-              </a:defRPr>
-            </a:pPr>
-            <a:r>
-              <a:t>+38</a:t>
+              <a:defRPr sz="900" b="1">
+                <a:solidFill>
+                  <a:srgbClr val="E88D3F"/>
+                </a:solidFill>
+                <a:latin typeface="Calibri"/>
+              </a:defRPr>
+            </a:pPr>
+            <a:r>
+              <a:t>+37</a:t>
             </a:r>
           </a:p>
         </p:txBody>
@@ -9034,8 +8944,8 @@
         </p:nvSpPr>
         <p:spPr>
           <a:xfrm>
-            <a:off x="5760720" y="3611880"/>
-            <a:ext cx="457200" cy="274320"/>
+            <a:off x="5577840" y="3840480"/>
+            <a:ext cx="548640" cy="274320"/>
           </a:xfrm>
           <a:prstGeom prst="rect">
             <a:avLst/>
@@ -9049,7 +8959,7 @@
           <a:lstStyle/>
           <a:p>
             <a:pPr algn="l">
-              <a:defRPr sz="1000" b="0">
+              <a:defRPr sz="900" b="0">
                 <a:solidFill>
                   <a:srgbClr val="555570"/>
                 </a:solidFill>
@@ -9057,7 +8967,7 @@
               </a:defRPr>
             </a:pPr>
             <a:r>
-              <a:t>1.85x</a:t>
+              <a:t>600bp</a:t>
             </a:r>
           </a:p>
         </p:txBody>
@@ -9070,14 +8980,14 @@
         </p:nvSpPr>
         <p:spPr>
           <a:xfrm>
-            <a:off x="6217920" y="3637280"/>
-            <a:ext cx="444926" cy="177800"/>
+            <a:off x="7132320" y="3865880"/>
+            <a:ext cx="511363" cy="177800"/>
           </a:xfrm>
           <a:prstGeom prst="rect">
             <a:avLst/>
           </a:prstGeom>
           <a:solidFill>
-            <a:srgbClr val="5CB85C"/>
+            <a:srgbClr val="E04F4F"/>
           </a:solidFill>
           <a:ln>
             <a:noFill/>
@@ -9113,7 +9023,7 @@
         </p:nvSpPr>
         <p:spPr>
           <a:xfrm>
-            <a:off x="6713646" y="3599180"/>
+            <a:off x="7694483" y="3827780"/>
             <a:ext cx="731520" cy="274320"/>
           </a:xfrm>
           <a:prstGeom prst="rect">
@@ -9128,15 +9038,15 @@
           <a:lstStyle/>
           <a:p>
             <a:pPr algn="l">
-              <a:defRPr sz="1000" b="1">
-                <a:solidFill>
-                  <a:srgbClr val="5CB85C"/>
-                </a:solidFill>
-                <a:latin typeface="Calibri"/>
-              </a:defRPr>
-            </a:pPr>
-            <a:r>
-              <a:t>+29</a:t>
+              <a:defRPr sz="900" b="1">
+                <a:solidFill>
+                  <a:srgbClr val="E04F4F"/>
+                </a:solidFill>
+                <a:latin typeface="Calibri"/>
+              </a:defRPr>
+            </a:pPr>
+            <a:r>
+              <a:t>+107</a:t>
             </a:r>
           </a:p>
         </p:txBody>
@@ -9149,8 +9059,8 @@
         </p:nvSpPr>
         <p:spPr>
           <a:xfrm>
-            <a:off x="5760720" y="4023360"/>
-            <a:ext cx="457200" cy="274320"/>
+            <a:off x="5577840" y="4297680"/>
+            <a:ext cx="548640" cy="274320"/>
           </a:xfrm>
           <a:prstGeom prst="rect">
             <a:avLst/>
@@ -9164,7 +9074,7 @@
           <a:lstStyle/>
           <a:p>
             <a:pPr algn="l">
-              <a:defRPr sz="1000" b="0">
+              <a:defRPr sz="900" b="0">
                 <a:solidFill>
                   <a:srgbClr val="555570"/>
                 </a:solidFill>
@@ -9172,7 +9082,7 @@
               </a:defRPr>
             </a:pPr>
             <a:r>
-              <a:t>2.00x</a:t>
+              <a:t>850bp</a:t>
             </a:r>
           </a:p>
         </p:txBody>
@@ -9185,14 +9095,14 @@
         </p:nvSpPr>
         <p:spPr>
           <a:xfrm>
-            <a:off x="6217920" y="4048760"/>
-            <a:ext cx="368214" cy="177800"/>
+            <a:off x="7132320" y="4323080"/>
+            <a:ext cx="1032284" cy="177800"/>
           </a:xfrm>
           <a:prstGeom prst="rect">
             <a:avLst/>
           </a:prstGeom>
           <a:solidFill>
-            <a:srgbClr val="5CB85C"/>
+            <a:srgbClr val="E04F4F"/>
           </a:solidFill>
           <a:ln>
             <a:noFill/>
@@ -9228,7 +9138,7 @@
         </p:nvSpPr>
         <p:spPr>
           <a:xfrm>
-            <a:off x="6636934" y="4010660"/>
+            <a:off x="8215404" y="4284980"/>
             <a:ext cx="731520" cy="274320"/>
           </a:xfrm>
           <a:prstGeom prst="rect">
@@ -9243,15 +9153,15 @@
           <a:lstStyle/>
           <a:p>
             <a:pPr algn="l">
-              <a:defRPr sz="1000" b="1">
-                <a:solidFill>
-                  <a:srgbClr val="5CB85C"/>
-                </a:solidFill>
-                <a:latin typeface="Calibri"/>
-              </a:defRPr>
-            </a:pPr>
-            <a:r>
-              <a:t>+24</a:t>
+              <a:defRPr sz="900" b="1">
+                <a:solidFill>
+                  <a:srgbClr val="E04F4F"/>
+                </a:solidFill>
+                <a:latin typeface="Calibri"/>
+              </a:defRPr>
+            </a:pPr>
+            <a:r>
+              <a:t>+216</a:t>
             </a:r>
           </a:p>
         </p:txBody>
@@ -9264,8 +9174,8 @@
         </p:nvSpPr>
         <p:spPr>
           <a:xfrm>
-            <a:off x="5760720" y="4434840"/>
-            <a:ext cx="457200" cy="274320"/>
+            <a:off x="5577840" y="4754880"/>
+            <a:ext cx="548640" cy="274320"/>
           </a:xfrm>
           <a:prstGeom prst="rect">
             <a:avLst/>
@@ -9279,7 +9189,7 @@
           <a:lstStyle/>
           <a:p>
             <a:pPr algn="l">
-              <a:defRPr sz="1000" b="0">
+              <a:defRPr sz="900" b="0">
                 <a:solidFill>
                   <a:srgbClr val="555570"/>
                 </a:solidFill>
@@ -9287,7 +9197,7 @@
               </a:defRPr>
             </a:pPr>
             <a:r>
-              <a:t>2.15x</a:t>
+              <a:t>1200bp</a:t>
             </a:r>
           </a:p>
         </p:txBody>
@@ -9300,14 +9210,14 @@
         </p:nvSpPr>
         <p:spPr>
           <a:xfrm>
-            <a:off x="6217920" y="4460240"/>
-            <a:ext cx="291503" cy="177800"/>
+            <a:off x="7132320" y="4780280"/>
+            <a:ext cx="1371600" cy="177800"/>
           </a:xfrm>
           <a:prstGeom prst="rect">
             <a:avLst/>
           </a:prstGeom>
           <a:solidFill>
-            <a:srgbClr val="5CB85C"/>
+            <a:srgbClr val="E04F4F"/>
           </a:solidFill>
           <a:ln>
             <a:noFill/>
@@ -9343,7 +9253,7 @@
         </p:nvSpPr>
         <p:spPr>
           <a:xfrm>
-            <a:off x="6560223" y="4422140"/>
+            <a:off x="8554720" y="4742180"/>
             <a:ext cx="731520" cy="274320"/>
           </a:xfrm>
           <a:prstGeom prst="rect">
@@ -9358,35 +9268,35 @@
           <a:lstStyle/>
           <a:p>
             <a:pPr algn="l">
-              <a:defRPr sz="1000" b="1">
-                <a:solidFill>
-                  <a:srgbClr val="5CB85C"/>
-                </a:solidFill>
-                <a:latin typeface="Calibri"/>
-              </a:defRPr>
-            </a:pPr>
-            <a:r>
-              <a:t>+19</a:t>
-            </a:r>
-          </a:p>
-        </p:txBody>
-      </p:sp>
-      <p:sp>
-        <p:nvSpPr>
-          <p:cNvPr id="32" name="Rounded Rectangle 31"/>
+              <a:defRPr sz="900" b="1">
+                <a:solidFill>
+                  <a:srgbClr val="E04F4F"/>
+                </a:solidFill>
+                <a:latin typeface="Calibri"/>
+              </a:defRPr>
+            </a:pPr>
+            <a:r>
+              <a:t>+287</a:t>
+            </a:r>
+          </a:p>
+        </p:txBody>
+      </p:sp>
+      <p:sp>
+        <p:nvSpPr>
+          <p:cNvPr id="32" name="Rectangle 31"/>
           <p:cNvSpPr/>
           <p:nvPr/>
         </p:nvSpPr>
         <p:spPr>
           <a:xfrm>
-            <a:off x="457200" y="5029200"/>
-            <a:ext cx="2560320" cy="457200"/>
-          </a:xfrm>
-          <a:prstGeom prst="roundRect">
+            <a:off x="7132320" y="1554480"/>
+            <a:ext cx="25400" cy="3657600"/>
+          </a:xfrm>
+          <a:prstGeom prst="rect">
             <a:avLst/>
           </a:prstGeom>
           <a:solidFill>
-            <a:srgbClr val="E04F4F"/>
+            <a:srgbClr val="555570"/>
           </a:solidFill>
           <a:ln>
             <a:noFill/>
@@ -9407,79 +9317,29 @@
           </a:fontRef>
         </p:style>
         <p:txBody>
-          <a:bodyPr rtlCol="0" anchor="ctr" wrap="square" lIns="152400" rIns="152400" tIns="101600" bIns="101600"/>
-          <a:lstStyle/>
-          <a:p>
-            <a:pPr algn="ctr">
-              <a:defRPr sz="1200" b="1">
-                <a:solidFill>
-                  <a:srgbClr val="FFFFFF"/>
-                </a:solidFill>
-                <a:latin typeface="Calibri"/>
-              </a:defRPr>
-            </a:pPr>
-            <a:r>
-              <a:t>DANGER ZONE</a:t>
-            </a:r>
-          </a:p>
-        </p:txBody>
-      </p:sp>
-      <p:sp>
-        <p:nvSpPr>
-          <p:cNvPr id="33" name="TextBox 32"/>
-          <p:cNvSpPr txBox="1"/>
-          <p:nvPr/>
-        </p:nvSpPr>
-        <p:spPr>
-          <a:xfrm>
-            <a:off x="457200" y="5577840"/>
-            <a:ext cx="2560320" cy="365760"/>
-          </a:xfrm>
-          <a:prstGeom prst="rect">
-            <a:avLst/>
-          </a:prstGeom>
-          <a:noFill/>
-        </p:spPr>
-        <p:txBody>
-          <a:bodyPr wrap="square">
-            <a:spAutoFit/>
-          </a:bodyPr>
-          <a:lstStyle/>
-          <a:p>
-            <a:pPr algn="l">
-              <a:defRPr sz="1100" b="0">
-                <a:solidFill>
-                  <a:srgbClr val="2D2D3D"/>
-                </a:solidFill>
-                <a:latin typeface="Calibri"/>
-              </a:defRPr>
-            </a:pPr>
-            <a:r>
-              <a:t>Below 1.3x coverage:</a:t>
-            </a:r>
-            <a:br/>
-            <a:r>
-              <a:t>PIK premium 80-150+ bp</a:t>
-            </a:r>
-          </a:p>
-        </p:txBody>
-      </p:sp>
-      <p:sp>
-        <p:nvSpPr>
-          <p:cNvPr id="34" name="Rounded Rectangle 33"/>
+          <a:bodyPr rtlCol="0" anchor="ctr"/>
+          <a:lstStyle/>
+          <a:p>
+            <a:pPr algn="ctr"/>
+          </a:p>
+        </p:txBody>
+      </p:sp>
+      <p:sp>
+        <p:nvSpPr>
+          <p:cNvPr id="33" name="Rounded Rectangle 32"/>
           <p:cNvSpPr/>
           <p:nvPr/>
         </p:nvSpPr>
         <p:spPr>
           <a:xfrm>
-            <a:off x="3200400" y="5029200"/>
+            <a:off x="457200" y="5029200"/>
             <a:ext cx="2560320" cy="457200"/>
           </a:xfrm>
           <a:prstGeom prst="roundRect">
             <a:avLst/>
           </a:prstGeom>
           <a:solidFill>
-            <a:srgbClr val="E88D3F"/>
+            <a:srgbClr val="5CB85C"/>
           </a:solidFill>
           <a:ln>
             <a:noFill/>
@@ -9504,7 +9364,7 @@
           <a:lstStyle/>
           <a:p>
             <a:pPr algn="ctr">
-              <a:defRPr sz="1200" b="1">
+              <a:defRPr sz="1100" b="1">
                 <a:solidFill>
                   <a:srgbClr val="FFFFFF"/>
                 </a:solidFill>
@@ -9512,20 +9372,20 @@
               </a:defRPr>
             </a:pPr>
             <a:r>
-              <a:t>CAUTION ZONE</a:t>
-            </a:r>
-          </a:p>
-        </p:txBody>
-      </p:sp>
-      <p:sp>
-        <p:nvSpPr>
-          <p:cNvPr id="35" name="TextBox 34"/>
+              <a:t>PIK BENEFITS INVESTOR</a:t>
+            </a:r>
+          </a:p>
+        </p:txBody>
+      </p:sp>
+      <p:sp>
+        <p:nvSpPr>
+          <p:cNvPr id="34" name="TextBox 33"/>
           <p:cNvSpPr txBox="1"/>
           <p:nvPr/>
         </p:nvSpPr>
         <p:spPr>
           <a:xfrm>
-            <a:off x="3200400" y="5577840"/>
+            <a:off x="457200" y="5577840"/>
             <a:ext cx="2560320" cy="365760"/>
           </a:xfrm>
           <a:prstGeom prst="rect">
@@ -9548,31 +9408,31 @@
               </a:defRPr>
             </a:pPr>
             <a:r>
-              <a:t>1.3x - 1.6x coverage:</a:t>
+              <a:t>Market spread &lt; 300bp:</a:t>
             </a:r>
             <a:br/>
             <a:r>
-              <a:t>PIK premium 40-80bp</a:t>
-            </a:r>
-          </a:p>
-        </p:txBody>
-      </p:sp>
-      <p:sp>
-        <p:nvSpPr>
-          <p:cNvPr id="36" name="Rounded Rectangle 35"/>
+              <a:t>PIK compounding dominates</a:t>
+            </a:r>
+          </a:p>
+        </p:txBody>
+      </p:sp>
+      <p:sp>
+        <p:nvSpPr>
+          <p:cNvPr id="35" name="Rounded Rectangle 34"/>
           <p:cNvSpPr/>
           <p:nvPr/>
         </p:nvSpPr>
         <p:spPr>
           <a:xfrm>
-            <a:off x="5943600" y="5029200"/>
+            <a:off x="3200400" y="5029200"/>
             <a:ext cx="2560320" cy="457200"/>
           </a:xfrm>
           <a:prstGeom prst="roundRect">
             <a:avLst/>
           </a:prstGeom>
           <a:solidFill>
-            <a:srgbClr val="5CB85C"/>
+            <a:srgbClr val="E88D3F"/>
           </a:solidFill>
           <a:ln>
             <a:noFill/>
@@ -9597,7 +9457,7 @@
           <a:lstStyle/>
           <a:p>
             <a:pPr algn="ctr">
-              <a:defRPr sz="1200" b="1">
+              <a:defRPr sz="1100" b="1">
                 <a:solidFill>
                   <a:srgbClr val="FFFFFF"/>
                 </a:solidFill>
@@ -9605,20 +9465,20 @@
               </a:defRPr>
             </a:pPr>
             <a:r>
-              <a:t>SAFE ZONE</a:t>
-            </a:r>
-          </a:p>
-        </p:txBody>
-      </p:sp>
-      <p:sp>
-        <p:nvSpPr>
-          <p:cNvPr id="37" name="TextBox 36"/>
+              <a:t>CROSSOVER ZONE</a:t>
+            </a:r>
+          </a:p>
+        </p:txBody>
+      </p:sp>
+      <p:sp>
+        <p:nvSpPr>
+          <p:cNvPr id="36" name="TextBox 35"/>
           <p:cNvSpPr txBox="1"/>
           <p:nvPr/>
         </p:nvSpPr>
         <p:spPr>
           <a:xfrm>
-            <a:off x="5943600" y="5577840"/>
+            <a:off x="3200400" y="5577840"/>
             <a:ext cx="2560320" cy="365760"/>
           </a:xfrm>
           <a:prstGeom prst="rect">
@@ -9641,11 +9501,104 @@
               </a:defRPr>
             </a:pPr>
             <a:r>
-              <a:t>Above 1.6x coverage:</a:t>
+              <a:t>300–500bp market spread:</a:t>
             </a:r>
             <a:br/>
             <a:r>
-              <a:t>PIK premium &lt; 40bp</a:t>
+              <a:t>PIK premium 0–75bp</a:t>
+            </a:r>
+          </a:p>
+        </p:txBody>
+      </p:sp>
+      <p:sp>
+        <p:nvSpPr>
+          <p:cNvPr id="37" name="Rounded Rectangle 36"/>
+          <p:cNvSpPr/>
+          <p:nvPr/>
+        </p:nvSpPr>
+        <p:spPr>
+          <a:xfrm>
+            <a:off x="5943600" y="5029200"/>
+            <a:ext cx="2560320" cy="457200"/>
+          </a:xfrm>
+          <a:prstGeom prst="roundRect">
+            <a:avLst/>
+          </a:prstGeom>
+          <a:solidFill>
+            <a:srgbClr val="E04F4F"/>
+          </a:solidFill>
+          <a:ln>
+            <a:noFill/>
+          </a:ln>
+        </p:spPr>
+        <p:style>
+          <a:lnRef idx="1">
+            <a:schemeClr val="accent1"/>
+          </a:lnRef>
+          <a:fillRef idx="3">
+            <a:schemeClr val="accent1"/>
+          </a:fillRef>
+          <a:effectRef idx="2">
+            <a:schemeClr val="accent1"/>
+          </a:effectRef>
+          <a:fontRef idx="minor">
+            <a:schemeClr val="lt1"/>
+          </a:fontRef>
+        </p:style>
+        <p:txBody>
+          <a:bodyPr rtlCol="0" anchor="ctr" wrap="square" lIns="152400" rIns="152400" tIns="101600" bIns="101600"/>
+          <a:lstStyle/>
+          <a:p>
+            <a:pPr algn="ctr">
+              <a:defRPr sz="1100" b="1">
+                <a:solidFill>
+                  <a:srgbClr val="FFFFFF"/>
+                </a:solidFill>
+                <a:latin typeface="Calibri"/>
+              </a:defRPr>
+            </a:pPr>
+            <a:r>
+              <a:t>STRUCTURAL RISK</a:t>
+            </a:r>
+          </a:p>
+        </p:txBody>
+      </p:sp>
+      <p:sp>
+        <p:nvSpPr>
+          <p:cNvPr id="38" name="TextBox 37"/>
+          <p:cNvSpPr txBox="1"/>
+          <p:nvPr/>
+        </p:nvSpPr>
+        <p:spPr>
+          <a:xfrm>
+            <a:off x="5943600" y="5577840"/>
+            <a:ext cx="2560320" cy="365760"/>
+          </a:xfrm>
+          <a:prstGeom prst="rect">
+            <a:avLst/>
+          </a:prstGeom>
+          <a:noFill/>
+        </p:spPr>
+        <p:txBody>
+          <a:bodyPr wrap="square">
+            <a:spAutoFit/>
+          </a:bodyPr>
+          <a:lstStyle/>
+          <a:p>
+            <a:pPr algn="l">
+              <a:defRPr sz="1100" b="0">
+                <a:solidFill>
+                  <a:srgbClr val="2D2D3D"/>
+                </a:solidFill>
+                <a:latin typeface="Calibri"/>
+              </a:defRPr>
+            </a:pPr>
+            <a:r>
+              <a:t>Market spread &gt; 500bp:</a:t>
+            </a:r>
+            <a:br/>
+            <a:r>
+              <a:t>PIK premium 75–290+ bp</a:t>
             </a:r>
           </a:p>
         </p:txBody>
@@ -9796,7 +9749,7 @@
               </a:defRPr>
             </a:pPr>
             <a:r>
-              <a:t>B- issuer: comparing toggle strategies</a:t>
+              <a:t>B− issuer: comparing toggle strategies</a:t>
             </a:r>
           </a:p>
         </p:txBody>
@@ -9847,7 +9800,7 @@
         </p:nvGraphicFramePr>
         <p:xfrm>
           <a:off x="457200" y="1280160"/>
-          <a:ext cx="7132320" cy="1920239"/>
+          <a:ext cx="7315200" cy="1920239"/>
         </p:xfrm>
         <a:graphic>
           <a:graphicData uri="http://schemas.openxmlformats.org/drawingml/2006/table">
@@ -9858,7 +9811,7 @@
               <a:tblGrid>
                 <a:gridCol w="2011680"/>
                 <a:gridCol w="914400"/>
-                <a:gridCol w="914400"/>
+                <a:gridCol w="1097280"/>
                 <a:gridCol w="1097280"/>
                 <a:gridCol w="822960"/>
                 <a:gridCol w="1371600"/>
@@ -9926,7 +9879,7 @@
                         </a:defRPr>
                       </a:pPr>
                       <a:r>
-                        <a:t>Spread</a:t>
+                        <a:t>Z-Spread</a:t>
                       </a:r>
                     </a:p>
                   </a:txBody>
@@ -9998,7 +9951,7 @@
                         </a:defRPr>
                       </a:pPr>
                       <a:r>
-                        <a:t>Term. Notional</a:t>
+                        <a:t>Term. Ntl</a:t>
                       </a:r>
                     </a:p>
                   </a:txBody>
@@ -10048,7 +10001,7 @@
                         </a:defRPr>
                       </a:pPr>
                       <a:r>
-                        <a:t>63.67</a:t>
+                        <a:t>87.28</a:t>
                       </a:r>
                     </a:p>
                   </a:txBody>
@@ -10072,7 +10025,7 @@
                         </a:defRPr>
                       </a:pPr>
                       <a:r>
-                        <a:t>453bp</a:t>
+                        <a:t>710bp</a:t>
                       </a:r>
                     </a:p>
                   </a:txBody>
@@ -10096,7 +10049,7 @@
                         </a:defRPr>
                       </a:pPr>
                       <a:r>
-                        <a:t>45.8%</a:t>
+                        <a:t>25.7%</a:t>
                       </a:r>
                     </a:p>
                   </a:txBody>
@@ -10194,7 +10147,7 @@
                         </a:defRPr>
                       </a:pPr>
                       <a:r>
-                        <a:t>56.59</a:t>
+                        <a:t>82.39</a:t>
                       </a:r>
                     </a:p>
                   </a:txBody>
@@ -10218,7 +10171,7 @@
                         </a:defRPr>
                       </a:pPr>
                       <a:r>
-                        <a:t>689bp</a:t>
+                        <a:t>851bp</a:t>
                       </a:r>
                     </a:p>
                   </a:txBody>
@@ -10242,7 +10195,7 @@
                         </a:defRPr>
                       </a:pPr>
                       <a:r>
-                        <a:t>51.8%</a:t>
+                        <a:t>29.9%</a:t>
                       </a:r>
                     </a:p>
                   </a:txBody>
@@ -10290,7 +10243,7 @@
                         </a:defRPr>
                       </a:pPr>
                       <a:r>
-                        <a:t>151.8</a:t>
+                        <a:t>151.6</a:t>
                       </a:r>
                     </a:p>
                   </a:txBody>
@@ -10340,7 +10293,7 @@
                         </a:defRPr>
                       </a:pPr>
                       <a:r>
-                        <a:t>55.08</a:t>
+                        <a:t>82.04</a:t>
                       </a:r>
                     </a:p>
                   </a:txBody>
@@ -10364,7 +10317,7 @@
                         </a:defRPr>
                       </a:pPr>
                       <a:r>
-                        <a:t>743bp</a:t>
+                        <a:t>862bp</a:t>
                       </a:r>
                     </a:p>
                   </a:txBody>
@@ -10388,7 +10341,7 @@
                         </a:defRPr>
                       </a:pPr>
                       <a:r>
-                        <a:t>53.1%</a:t>
+                        <a:t>30.2%</a:t>
                       </a:r>
                     </a:p>
                   </a:txBody>
@@ -10412,7 +10365,7 @@
                         </a:defRPr>
                       </a:pPr>
                       <a:r>
-                        <a:t>13%</a:t>
+                        <a:t>80%</a:t>
                       </a:r>
                     </a:p>
                   </a:txBody>
@@ -10436,7 +10389,7 @@
                         </a:defRPr>
                       </a:pPr>
                       <a:r>
-                        <a:t>102.1</a:t>
+                        <a:t>137.3</a:t>
                       </a:r>
                     </a:p>
                   </a:txBody>
@@ -10486,7 +10439,7 @@
                         </a:defRPr>
                       </a:pPr>
                       <a:r>
-                        <a:t>55.08</a:t>
+                        <a:t>82.23</a:t>
                       </a:r>
                     </a:p>
                   </a:txBody>
@@ -10510,7 +10463,7 @@
                         </a:defRPr>
                       </a:pPr>
                       <a:r>
-                        <a:t>743bp</a:t>
+                        <a:t>856bp</a:t>
                       </a:r>
                     </a:p>
                   </a:txBody>
@@ -10534,7 +10487,7 @@
                         </a:defRPr>
                       </a:pPr>
                       <a:r>
-                        <a:t>53.1%</a:t>
+                        <a:t>30.0%</a:t>
                       </a:r>
                     </a:p>
                   </a:txBody>
@@ -10558,7 +10511,7 @@
                         </a:defRPr>
                       </a:pPr>
                       <a:r>
-                        <a:t>21%</a:t>
+                        <a:t>73%</a:t>
                       </a:r>
                     </a:p>
                   </a:txBody>
@@ -10582,7 +10535,7 @@
                         </a:defRPr>
                       </a:pPr>
                       <a:r>
-                        <a:t>106.8</a:t>
+                        <a:t>132.9</a:t>
                       </a:r>
                     </a:p>
                   </a:txBody>
@@ -10632,7 +10585,7 @@
                         </a:defRPr>
                       </a:pPr>
                       <a:r>
-                        <a:t>55.48</a:t>
+                        <a:t>83.40</a:t>
                       </a:r>
                     </a:p>
                   </a:txBody>
@@ -10656,7 +10609,7 @@
                         </a:defRPr>
                       </a:pPr>
                       <a:r>
-                        <a:t>728bp</a:t>
+                        <a:t>821bp</a:t>
                       </a:r>
                     </a:p>
                   </a:txBody>
@@ -10680,7 +10633,7 @@
                         </a:defRPr>
                       </a:pPr>
                       <a:r>
-                        <a:t>52.8%</a:t>
+                        <a:t>29.0%</a:t>
                       </a:r>
                     </a:p>
                   </a:txBody>
@@ -10704,7 +10657,7 @@
                         </a:defRPr>
                       </a:pPr>
                       <a:r>
-                        <a:t>17%</a:t>
+                        <a:t>40%</a:t>
                       </a:r>
                     </a:p>
                   </a:txBody>
@@ -10728,7 +10681,7 @@
                         </a:defRPr>
                       </a:pPr>
                       <a:r>
-                        <a:t>106.2</a:t>
+                        <a:t>114.8</a:t>
                       </a:r>
                     </a:p>
                   </a:txBody>
@@ -10777,7 +10730,7 @@
               </a:defRPr>
             </a:pPr>
             <a:r>
-              <a:t>Counterintuitive: toggle spreads can exceed full PIK (743 vs 689bp)</a:t>
+              <a:t>Threshold toggle Z-spread (862bp) exceeds full PIK (851bp) — adverse selection against the investor</a:t>
             </a:r>
           </a:p>
           <a:p>
@@ -10793,7 +10746,7 @@
               </a:defRPr>
             </a:pPr>
             <a:r>
-              <a:t>The borrower PIKs precisely when credit is deteriorating — adverse selection against the investor</a:t>
+              <a:t>The borrower PIKs on 80% of coupons, concentrated on the worst paths — seeding the leverage spiral where it does the most damage</a:t>
             </a:r>
           </a:p>
           <a:p>
@@ -10809,7 +10762,7 @@
               </a:defRPr>
             </a:pPr>
             <a:r>
-              <a:t>Even with only 13% of coupons PIK'd, the spread impact is significant (+290bp over cash)</a:t>
+              <a:t>Even the optimal exercise model (821bp) carries a +111bp premium over cash</a:t>
             </a:r>
           </a:p>
           <a:p>
@@ -10825,7 +10778,7 @@
               </a:defRPr>
             </a:pPr>
             <a:r>
-              <a:t>The optimal exercise model (nested MC) finds the best strategy for the borrower — worst for investors</a:t>
+              <a:t>The toggle premium (+151bp over cash) is comparable to the full PIK premium (+141bp)</a:t>
             </a:r>
           </a:p>
         </p:txBody>
@@ -10993,7 +10946,7 @@
               </a:defRPr>
             </a:pPr>
             <a:r>
-              <a:t>Implied Hazard Premium</a:t>
+              <a:t>Simple vs Structural: Why the Model Matters</a:t>
             </a:r>
           </a:p>
         </p:txBody>
@@ -11029,7 +10982,7 @@
               </a:defRPr>
             </a:pPr>
             <a:r>
-              <a:t>How much extra default risk does the market charge for PIK?</a:t>
+              <a:t>Hazard-rate model vs Merton MC across the credit spectrum</a:t>
             </a:r>
           </a:p>
         </p:txBody>
@@ -11070,57 +11023,17 @@
           </a:p>
         </p:txBody>
       </p:sp>
-      <p:sp>
-        <p:nvSpPr>
-          <p:cNvPr id="6" name="TextBox 5"/>
-          <p:cNvSpPr txBox="1"/>
-          <p:nvPr/>
-        </p:nvSpPr>
-        <p:spPr>
-          <a:xfrm>
-            <a:off x="457200" y="1097280"/>
-            <a:ext cx="8229600" cy="548640"/>
-          </a:xfrm>
-          <a:prstGeom prst="rect">
-            <a:avLst/>
-          </a:prstGeom>
-          <a:noFill/>
-        </p:spPr>
-        <p:txBody>
-          <a:bodyPr wrap="square">
-            <a:spAutoFit/>
-          </a:bodyPr>
-          <a:lstStyle/>
-          <a:p>
-            <a:pPr algn="l">
-              <a:defRPr sz="1400" b="0">
-                <a:solidFill>
-                  <a:srgbClr val="2D2D3D"/>
-                </a:solidFill>
-                <a:latin typeface="Calibri"/>
-              </a:defRPr>
-            </a:pPr>
-            <a:r>
-              <a:t>Question: Given the MC model price, what flat hazard rate λ would reproduce it?</a:t>
-            </a:r>
-            <a:br/>
-            <a:r>
-              <a:t>The difference between PIK-implied λ and Cash-implied λ is the structural hazard premium.</a:t>
-            </a:r>
-          </a:p>
-        </p:txBody>
-      </p:sp>
       <p:graphicFrame>
         <p:nvGraphicFramePr>
-          <p:cNvPr id="7" name="Table 6"/>
+          <p:cNvPr id="6" name="Table 5"/>
           <p:cNvGraphicFramePr>
             <a:graphicFrameLocks noGrp="1"/>
           </p:cNvGraphicFramePr>
           <p:nvPr/>
         </p:nvGraphicFramePr>
         <p:xfrm>
-          <a:off x="457200" y="2011680"/>
-          <a:ext cx="6858000" cy="1920239"/>
+          <a:off x="457200" y="1188720"/>
+          <a:ext cx="6675120" cy="1920239"/>
         </p:xfrm>
         <a:graphic>
           <a:graphicData uri="http://schemas.openxmlformats.org/drawingml/2006/table">
@@ -11129,11 +11042,13 @@
                 <a:tableStyleId>{5C22544A-7EE6-4342-B048-85BDC9FD1C3A}</a:tableStyleId>
               </a:tblPr>
               <a:tblGrid>
-                <a:gridCol w="2286000"/>
+                <a:gridCol w="1188720"/>
                 <a:gridCol w="914400"/>
                 <a:gridCol w="914400"/>
                 <a:gridCol w="914400"/>
-                <a:gridCol w="1828800"/>
+                <a:gridCol w="914400"/>
+                <a:gridCol w="914400"/>
+                <a:gridCol w="914400"/>
               </a:tblGrid>
               <a:tr h="320039">
                 <a:tc>
@@ -11142,7 +11057,7 @@
                     <a:lstStyle/>
                     <a:p>
                       <a:pPr algn="ctr">
-                        <a:defRPr sz="1200" b="1">
+                        <a:defRPr sz="1100" b="1">
                           <a:solidFill>
                             <a:srgbClr val="FFFFFF"/>
                           </a:solidFill>
@@ -11166,7 +11081,7 @@
                     <a:lstStyle/>
                     <a:p>
                       <a:pPr algn="ctr">
-                        <a:defRPr sz="1200" b="1">
+                        <a:defRPr sz="1100" b="1">
                           <a:solidFill>
                             <a:srgbClr val="FFFFFF"/>
                           </a:solidFill>
@@ -11174,7 +11089,7 @@
                         </a:defRPr>
                       </a:pPr>
                       <a:r>
-                        <a:t>Base λ</a:t>
+                        <a:t>HR Cash</a:t>
                       </a:r>
                     </a:p>
                   </a:txBody>
@@ -11190,7 +11105,7 @@
                     <a:lstStyle/>
                     <a:p>
                       <a:pPr algn="ctr">
-                        <a:defRPr sz="1200" b="1">
+                        <a:defRPr sz="1100" b="1">
                           <a:solidFill>
                             <a:srgbClr val="FFFFFF"/>
                           </a:solidFill>
@@ -11198,7 +11113,7 @@
                         </a:defRPr>
                       </a:pPr>
                       <a:r>
-                        <a:t>λ Cash</a:t>
+                        <a:t>HR PIK</a:t>
                       </a:r>
                     </a:p>
                   </a:txBody>
@@ -11214,7 +11129,7 @@
                     <a:lstStyle/>
                     <a:p>
                       <a:pPr algn="ctr">
-                        <a:defRPr sz="1200" b="1">
+                        <a:defRPr sz="1100" b="1">
                           <a:solidFill>
                             <a:srgbClr val="FFFFFF"/>
                           </a:solidFill>
@@ -11222,7 +11137,7 @@
                         </a:defRPr>
                       </a:pPr>
                       <a:r>
-                        <a:t>λ PIK</a:t>
+                        <a:t>MC Cash</a:t>
                       </a:r>
                     </a:p>
                   </a:txBody>
@@ -11238,7 +11153,7 @@
                     <a:lstStyle/>
                     <a:p>
                       <a:pPr algn="ctr">
-                        <a:defRPr sz="1200" b="1">
+                        <a:defRPr sz="1100" b="1">
                           <a:solidFill>
                             <a:srgbClr val="FFFFFF"/>
                           </a:solidFill>
@@ -11246,7 +11161,55 @@
                         </a:defRPr>
                       </a:pPr>
                       <a:r>
-                        <a:t>Δλ (PIK premium)</a:t>
+                        <a:t>MC PIK</a:t>
+                      </a:r>
+                    </a:p>
+                  </a:txBody>
+                  <a:tcPr>
+                    <a:solidFill>
+                      <a:srgbClr val="2C3E6B"/>
+                    </a:solidFill>
+                  </a:tcPr>
+                </a:tc>
+                <a:tc>
+                  <a:txBody>
+                    <a:bodyPr/>
+                    <a:lstStyle/>
+                    <a:p>
+                      <a:pPr algn="ctr">
+                        <a:defRPr sz="1100" b="1">
+                          <a:solidFill>
+                            <a:srgbClr val="FFFFFF"/>
+                          </a:solidFill>
+                          <a:latin typeface="Calibri"/>
+                        </a:defRPr>
+                      </a:pPr>
+                      <a:r>
+                        <a:t>HR ΔZ</a:t>
+                      </a:r>
+                    </a:p>
+                  </a:txBody>
+                  <a:tcPr>
+                    <a:solidFill>
+                      <a:srgbClr val="2C3E6B"/>
+                    </a:solidFill>
+                  </a:tcPr>
+                </a:tc>
+                <a:tc>
+                  <a:txBody>
+                    <a:bodyPr/>
+                    <a:lstStyle/>
+                    <a:p>
+                      <a:pPr algn="ctr">
+                        <a:defRPr sz="1100" b="1">
+                          <a:solidFill>
+                            <a:srgbClr val="FFFFFF"/>
+                          </a:solidFill>
+                          <a:latin typeface="Calibri"/>
+                        </a:defRPr>
+                      </a:pPr>
+                      <a:r>
+                        <a:t>MC ΔZ</a:t>
                       </a:r>
                     </a:p>
                   </a:txBody>
@@ -11264,15 +11227,15 @@
                     <a:lstStyle/>
                     <a:p>
                       <a:pPr algn="l">
-                        <a:defRPr sz="1200">
-                          <a:solidFill>
-                            <a:srgbClr val="2D2D3D"/>
-                          </a:solidFill>
-                          <a:latin typeface="Calibri"/>
-                        </a:defRPr>
-                      </a:pPr>
-                      <a:r>
-                        <a:t>BB+ (Solid HY)</a:t>
+                        <a:defRPr sz="1100">
+                          <a:solidFill>
+                            <a:srgbClr val="2D2D3D"/>
+                          </a:solidFill>
+                          <a:latin typeface="Calibri"/>
+                        </a:defRPr>
+                      </a:pPr>
+                      <a:r>
+                        <a:t>BB+</a:t>
                       </a:r>
                     </a:p>
                   </a:txBody>
@@ -11288,15 +11251,15 @@
                     <a:lstStyle/>
                     <a:p>
                       <a:pPr algn="r">
-                        <a:defRPr sz="1200">
-                          <a:solidFill>
-                            <a:srgbClr val="2D2D3D"/>
-                          </a:solidFill>
-                          <a:latin typeface="Calibri"/>
-                        </a:defRPr>
-                      </a:pPr>
-                      <a:r>
-                        <a:t>150</a:t>
+                        <a:defRPr sz="1100">
+                          <a:solidFill>
+                            <a:srgbClr val="2D2D3D"/>
+                          </a:solidFill>
+                          <a:latin typeface="Calibri"/>
+                        </a:defRPr>
+                      </a:pPr>
+                      <a:r>
+                        <a:t>113.35</a:t>
                       </a:r>
                     </a:p>
                   </a:txBody>
@@ -11312,15 +11275,15 @@
                     <a:lstStyle/>
                     <a:p>
                       <a:pPr algn="r">
-                        <a:defRPr sz="1200">
-                          <a:solidFill>
-                            <a:srgbClr val="2D2D3D"/>
-                          </a:solidFill>
-                          <a:latin typeface="Calibri"/>
-                        </a:defRPr>
-                      </a:pPr>
-                      <a:r>
-                        <a:t>136</a:t>
+                        <a:defRPr sz="1100">
+                          <a:solidFill>
+                            <a:srgbClr val="2D2D3D"/>
+                          </a:solidFill>
+                          <a:latin typeface="Calibri"/>
+                        </a:defRPr>
+                      </a:pPr>
+                      <a:r>
+                        <a:t>110.89</a:t>
                       </a:r>
                     </a:p>
                   </a:txBody>
@@ -11336,15 +11299,15 @@
                     <a:lstStyle/>
                     <a:p>
                       <a:pPr algn="r">
-                        <a:defRPr sz="1200">
-                          <a:solidFill>
-                            <a:srgbClr val="2D2D3D"/>
-                          </a:solidFill>
-                          <a:latin typeface="Calibri"/>
-                        </a:defRPr>
-                      </a:pPr>
-                      <a:r>
-                        <a:t>215</a:t>
+                        <a:defRPr sz="1100">
+                          <a:solidFill>
+                            <a:srgbClr val="2D2D3D"/>
+                          </a:solidFill>
+                          <a:latin typeface="Calibri"/>
+                        </a:defRPr>
+                      </a:pPr>
+                      <a:r>
+                        <a:t>116.48</a:t>
                       </a:r>
                     </a:p>
                   </a:txBody>
@@ -11360,15 +11323,63 @@
                     <a:lstStyle/>
                     <a:p>
                       <a:pPr algn="r">
-                        <a:defRPr sz="1200">
-                          <a:solidFill>
-                            <a:srgbClr val="2D2D3D"/>
-                          </a:solidFill>
-                          <a:latin typeface="Calibri"/>
-                        </a:defRPr>
-                      </a:pPr>
-                      <a:r>
-                        <a:t>+79bp</a:t>
+                        <a:defRPr sz="1100">
+                          <a:solidFill>
+                            <a:srgbClr val="2D2D3D"/>
+                          </a:solidFill>
+                          <a:latin typeface="Calibri"/>
+                        </a:defRPr>
+                      </a:pPr>
+                      <a:r>
+                        <a:t>119.46</a:t>
+                      </a:r>
+                    </a:p>
+                  </a:txBody>
+                  <a:tcPr>
+                    <a:solidFill>
+                      <a:srgbClr val="FFFFFF"/>
+                    </a:solidFill>
+                  </a:tcPr>
+                </a:tc>
+                <a:tc>
+                  <a:txBody>
+                    <a:bodyPr/>
+                    <a:lstStyle/>
+                    <a:p>
+                      <a:pPr algn="r">
+                        <a:defRPr sz="1100">
+                          <a:solidFill>
+                            <a:srgbClr val="2D2D3D"/>
+                          </a:solidFill>
+                          <a:latin typeface="Calibri"/>
+                        </a:defRPr>
+                      </a:pPr>
+                      <a:r>
+                        <a:t>−2.5</a:t>
+                      </a:r>
+                    </a:p>
+                  </a:txBody>
+                  <a:tcPr>
+                    <a:solidFill>
+                      <a:srgbClr val="FFFFFF"/>
+                    </a:solidFill>
+                  </a:tcPr>
+                </a:tc>
+                <a:tc>
+                  <a:txBody>
+                    <a:bodyPr/>
+                    <a:lstStyle/>
+                    <a:p>
+                      <a:pPr algn="r">
+                        <a:defRPr sz="1100">
+                          <a:solidFill>
+                            <a:srgbClr val="2D2D3D"/>
+                          </a:solidFill>
+                          <a:latin typeface="Calibri"/>
+                        </a:defRPr>
+                      </a:pPr>
+                      <a:r>
+                        <a:t>+3.0</a:t>
                       </a:r>
                     </a:p>
                   </a:txBody>
@@ -11386,15 +11397,15 @@
                     <a:lstStyle/>
                     <a:p>
                       <a:pPr algn="l">
-                        <a:defRPr sz="1200">
-                          <a:solidFill>
-                            <a:srgbClr val="2D2D3D"/>
-                          </a:solidFill>
-                          <a:latin typeface="Calibri"/>
-                        </a:defRPr>
-                      </a:pPr>
-                      <a:r>
-                        <a:t>BB- (Mid HY)</a:t>
+                        <a:defRPr sz="1100">
+                          <a:solidFill>
+                            <a:srgbClr val="2D2D3D"/>
+                          </a:solidFill>
+                          <a:latin typeface="Calibri"/>
+                        </a:defRPr>
+                      </a:pPr>
+                      <a:r>
+                        <a:t>BB−</a:t>
                       </a:r>
                     </a:p>
                   </a:txBody>
@@ -11410,15 +11421,15 @@
                     <a:lstStyle/>
                     <a:p>
                       <a:pPr algn="r">
-                        <a:defRPr sz="1200">
-                          <a:solidFill>
-                            <a:srgbClr val="2D2D3D"/>
-                          </a:solidFill>
-                          <a:latin typeface="Calibri"/>
-                        </a:defRPr>
-                      </a:pPr>
-                      <a:r>
-                        <a:t>350</a:t>
+                        <a:defRPr sz="1100">
+                          <a:solidFill>
+                            <a:srgbClr val="2D2D3D"/>
+                          </a:solidFill>
+                          <a:latin typeface="Calibri"/>
+                        </a:defRPr>
+                      </a:pPr>
+                      <a:r>
+                        <a:t>107.56</a:t>
                       </a:r>
                     </a:p>
                   </a:txBody>
@@ -11434,15 +11445,15 @@
                     <a:lstStyle/>
                     <a:p>
                       <a:pPr algn="r">
-                        <a:defRPr sz="1200">
-                          <a:solidFill>
-                            <a:srgbClr val="2D2D3D"/>
-                          </a:solidFill>
-                          <a:latin typeface="Calibri"/>
-                        </a:defRPr>
-                      </a:pPr>
-                      <a:r>
-                        <a:t>665</a:t>
+                        <a:defRPr sz="1100">
+                          <a:solidFill>
+                            <a:srgbClr val="2D2D3D"/>
+                          </a:solidFill>
+                          <a:latin typeface="Calibri"/>
+                        </a:defRPr>
+                      </a:pPr>
+                      <a:r>
+                        <a:t>103.76</a:t>
                       </a:r>
                     </a:p>
                   </a:txBody>
@@ -11458,15 +11469,15 @@
                     <a:lstStyle/>
                     <a:p>
                       <a:pPr algn="r">
-                        <a:defRPr sz="1200">
-                          <a:solidFill>
-                            <a:srgbClr val="2D2D3D"/>
-                          </a:solidFill>
-                          <a:latin typeface="Calibri"/>
-                        </a:defRPr>
-                      </a:pPr>
-                      <a:r>
-                        <a:t>677</a:t>
+                        <a:defRPr sz="1100">
+                          <a:solidFill>
+                            <a:srgbClr val="2D2D3D"/>
+                          </a:solidFill>
+                          <a:latin typeface="Calibri"/>
+                        </a:defRPr>
+                      </a:pPr>
+                      <a:r>
+                        <a:t>112.12</a:t>
                       </a:r>
                     </a:p>
                   </a:txBody>
@@ -11482,15 +11493,63 @@
                     <a:lstStyle/>
                     <a:p>
                       <a:pPr algn="r">
-                        <a:defRPr sz="1200">
-                          <a:solidFill>
-                            <a:srgbClr val="2D2D3D"/>
-                          </a:solidFill>
-                          <a:latin typeface="Calibri"/>
-                        </a:defRPr>
-                      </a:pPr>
-                      <a:r>
-                        <a:t>+12bp</a:t>
+                        <a:defRPr sz="1100">
+                          <a:solidFill>
+                            <a:srgbClr val="2D2D3D"/>
+                          </a:solidFill>
+                          <a:latin typeface="Calibri"/>
+                        </a:defRPr>
+                      </a:pPr>
+                      <a:r>
+                        <a:t>113.17</a:t>
+                      </a:r>
+                    </a:p>
+                  </a:txBody>
+                  <a:tcPr>
+                    <a:solidFill>
+                      <a:srgbClr val="E8EBF5"/>
+                    </a:solidFill>
+                  </a:tcPr>
+                </a:tc>
+                <a:tc>
+                  <a:txBody>
+                    <a:bodyPr/>
+                    <a:lstStyle/>
+                    <a:p>
+                      <a:pPr algn="r">
+                        <a:defRPr sz="1100">
+                          <a:solidFill>
+                            <a:srgbClr val="2D2D3D"/>
+                          </a:solidFill>
+                          <a:latin typeface="Calibri"/>
+                        </a:defRPr>
+                      </a:pPr>
+                      <a:r>
+                        <a:t>−3.8</a:t>
+                      </a:r>
+                    </a:p>
+                  </a:txBody>
+                  <a:tcPr>
+                    <a:solidFill>
+                      <a:srgbClr val="E8EBF5"/>
+                    </a:solidFill>
+                  </a:tcPr>
+                </a:tc>
+                <a:tc>
+                  <a:txBody>
+                    <a:bodyPr/>
+                    <a:lstStyle/>
+                    <a:p>
+                      <a:pPr algn="r">
+                        <a:defRPr sz="1100">
+                          <a:solidFill>
+                            <a:srgbClr val="2D2D3D"/>
+                          </a:solidFill>
+                          <a:latin typeface="Calibri"/>
+                        </a:defRPr>
+                      </a:pPr>
+                      <a:r>
+                        <a:t>+1.1</a:t>
                       </a:r>
                     </a:p>
                   </a:txBody>
@@ -11508,15 +11567,15 @@
                     <a:lstStyle/>
                     <a:p>
                       <a:pPr algn="l">
-                        <a:defRPr sz="1200">
-                          <a:solidFill>
-                            <a:srgbClr val="2D2D3D"/>
-                          </a:solidFill>
-                          <a:latin typeface="Calibri"/>
-                        </a:defRPr>
-                      </a:pPr>
-                      <a:r>
-                        <a:t>B (Weak HY)</a:t>
+                        <a:defRPr sz="1100">
+                          <a:solidFill>
+                            <a:srgbClr val="2D2D3D"/>
+                          </a:solidFill>
+                          <a:latin typeface="Calibri"/>
+                        </a:defRPr>
+                      </a:pPr>
+                      <a:r>
+                        <a:t>B</a:t>
                       </a:r>
                     </a:p>
                   </a:txBody>
@@ -11532,15 +11591,15 @@
                     <a:lstStyle/>
                     <a:p>
                       <a:pPr algn="r">
-                        <a:defRPr sz="1200">
-                          <a:solidFill>
-                            <a:srgbClr val="2D2D3D"/>
-                          </a:solidFill>
-                          <a:latin typeface="Calibri"/>
-                        </a:defRPr>
-                      </a:pPr>
-                      <a:r>
-                        <a:t>600</a:t>
+                        <a:defRPr sz="1100">
+                          <a:solidFill>
+                            <a:srgbClr val="2D2D3D"/>
+                          </a:solidFill>
+                          <a:latin typeface="Calibri"/>
+                        </a:defRPr>
+                      </a:pPr>
+                      <a:r>
+                        <a:t>99.76</a:t>
                       </a:r>
                     </a:p>
                   </a:txBody>
@@ -11556,15 +11615,15 @@
                     <a:lstStyle/>
                     <a:p>
                       <a:pPr algn="r">
-                        <a:defRPr sz="1200">
-                          <a:solidFill>
-                            <a:srgbClr val="2D2D3D"/>
-                          </a:solidFill>
-                          <a:latin typeface="Calibri"/>
-                        </a:defRPr>
-                      </a:pPr>
-                      <a:r>
-                        <a:t>1,569</a:t>
+                        <a:defRPr sz="1100">
+                          <a:solidFill>
+                            <a:srgbClr val="2D2D3D"/>
+                          </a:solidFill>
+                          <a:latin typeface="Calibri"/>
+                        </a:defRPr>
+                      </a:pPr>
+                      <a:r>
+                        <a:t>94.44</a:t>
                       </a:r>
                     </a:p>
                   </a:txBody>
@@ -11580,15 +11639,15 @@
                     <a:lstStyle/>
                     <a:p>
                       <a:pPr algn="r">
-                        <a:defRPr sz="1200">
-                          <a:solidFill>
-                            <a:srgbClr val="2D2D3D"/>
-                          </a:solidFill>
-                          <a:latin typeface="Calibri"/>
-                        </a:defRPr>
-                      </a:pPr>
-                      <a:r>
-                        <a:t>1,558</a:t>
+                        <a:defRPr sz="1100">
+                          <a:solidFill>
+                            <a:srgbClr val="2D2D3D"/>
+                          </a:solidFill>
+                          <a:latin typeface="Calibri"/>
+                        </a:defRPr>
+                      </a:pPr>
+                      <a:r>
+                        <a:t>103.87</a:t>
                       </a:r>
                     </a:p>
                   </a:txBody>
@@ -11604,15 +11663,63 @@
                     <a:lstStyle/>
                     <a:p>
                       <a:pPr algn="r">
-                        <a:defRPr sz="1200">
-                          <a:solidFill>
-                            <a:srgbClr val="2D2D3D"/>
-                          </a:solidFill>
-                          <a:latin typeface="Calibri"/>
-                        </a:defRPr>
-                      </a:pPr>
-                      <a:r>
-                        <a:t>−11bp</a:t>
+                        <a:defRPr sz="1100">
+                          <a:solidFill>
+                            <a:srgbClr val="2D2D3D"/>
+                          </a:solidFill>
+                          <a:latin typeface="Calibri"/>
+                        </a:defRPr>
+                      </a:pPr>
+                      <a:r>
+                        <a:t>102.26</a:t>
+                      </a:r>
+                    </a:p>
+                  </a:txBody>
+                  <a:tcPr>
+                    <a:solidFill>
+                      <a:srgbClr val="FFFFFF"/>
+                    </a:solidFill>
+                  </a:tcPr>
+                </a:tc>
+                <a:tc>
+                  <a:txBody>
+                    <a:bodyPr/>
+                    <a:lstStyle/>
+                    <a:p>
+                      <a:pPr algn="r">
+                        <a:defRPr sz="1100">
+                          <a:solidFill>
+                            <a:srgbClr val="2D2D3D"/>
+                          </a:solidFill>
+                          <a:latin typeface="Calibri"/>
+                        </a:defRPr>
+                      </a:pPr>
+                      <a:r>
+                        <a:t>−5.3</a:t>
+                      </a:r>
+                    </a:p>
+                  </a:txBody>
+                  <a:tcPr>
+                    <a:solidFill>
+                      <a:srgbClr val="FFFFFF"/>
+                    </a:solidFill>
+                  </a:tcPr>
+                </a:tc>
+                <a:tc>
+                  <a:txBody>
+                    <a:bodyPr/>
+                    <a:lstStyle/>
+                    <a:p>
+                      <a:pPr algn="r">
+                        <a:defRPr sz="1100">
+                          <a:solidFill>
+                            <a:srgbClr val="2D2D3D"/>
+                          </a:solidFill>
+                          <a:latin typeface="Calibri"/>
+                        </a:defRPr>
+                      </a:pPr>
+                      <a:r>
+                        <a:t>−1.6</a:t>
                       </a:r>
                     </a:p>
                   </a:txBody>
@@ -11630,15 +11737,15 @@
                     <a:lstStyle/>
                     <a:p>
                       <a:pPr algn="l">
-                        <a:defRPr sz="1200">
-                          <a:solidFill>
-                            <a:srgbClr val="2D2D3D"/>
-                          </a:solidFill>
-                          <a:latin typeface="Calibri"/>
-                        </a:defRPr>
-                      </a:pPr>
-                      <a:r>
-                        <a:t>B- (Stressed)</a:t>
+                        <a:defRPr sz="1100">
+                          <a:solidFill>
+                            <a:srgbClr val="2D2D3D"/>
+                          </a:solidFill>
+                          <a:latin typeface="Calibri"/>
+                        </a:defRPr>
+                      </a:pPr>
+                      <a:r>
+                        <a:t>B−</a:t>
                       </a:r>
                     </a:p>
                   </a:txBody>
@@ -11654,15 +11761,15 @@
                     <a:lstStyle/>
                     <a:p>
                       <a:pPr algn="r">
-                        <a:defRPr sz="1200">
-                          <a:solidFill>
-                            <a:srgbClr val="2D2D3D"/>
-                          </a:solidFill>
-                          <a:latin typeface="Calibri"/>
-                        </a:defRPr>
-                      </a:pPr>
-                      <a:r>
-                        <a:t>900</a:t>
+                        <a:defRPr sz="1100">
+                          <a:solidFill>
+                            <a:srgbClr val="2D2D3D"/>
+                          </a:solidFill>
+                          <a:latin typeface="Calibri"/>
+                        </a:defRPr>
+                      </a:pPr>
+                      <a:r>
+                        <a:t>90.33</a:t>
                       </a:r>
                     </a:p>
                   </a:txBody>
@@ -11678,15 +11785,15 @@
                     <a:lstStyle/>
                     <a:p>
                       <a:pPr algn="r">
-                        <a:defRPr sz="1200">
-                          <a:solidFill>
-                            <a:srgbClr val="2D2D3D"/>
-                          </a:solidFill>
-                          <a:latin typeface="Calibri"/>
-                        </a:defRPr>
-                      </a:pPr>
-                      <a:r>
-                        <a:t>2,435</a:t>
+                        <a:defRPr sz="1100">
+                          <a:solidFill>
+                            <a:srgbClr val="2D2D3D"/>
+                          </a:solidFill>
+                          <a:latin typeface="Calibri"/>
+                        </a:defRPr>
+                      </a:pPr>
+                      <a:r>
+                        <a:t>83.45</a:t>
                       </a:r>
                     </a:p>
                   </a:txBody>
@@ -11702,15 +11809,15 @@
                     <a:lstStyle/>
                     <a:p>
                       <a:pPr algn="r">
-                        <a:defRPr sz="1200">
-                          <a:solidFill>
-                            <a:srgbClr val="2D2D3D"/>
-                          </a:solidFill>
-                          <a:latin typeface="Calibri"/>
-                        </a:defRPr>
-                      </a:pPr>
-                      <a:r>
-                        <a:t>2,617</a:t>
+                        <a:defRPr sz="1100">
+                          <a:solidFill>
+                            <a:srgbClr val="2D2D3D"/>
+                          </a:solidFill>
+                          <a:latin typeface="Calibri"/>
+                        </a:defRPr>
+                      </a:pPr>
+                      <a:r>
+                        <a:t>87.28</a:t>
                       </a:r>
                     </a:p>
                   </a:txBody>
@@ -11726,15 +11833,63 @@
                     <a:lstStyle/>
                     <a:p>
                       <a:pPr algn="r">
-                        <a:defRPr sz="1200">
-                          <a:solidFill>
-                            <a:srgbClr val="2D2D3D"/>
-                          </a:solidFill>
-                          <a:latin typeface="Calibri"/>
-                        </a:defRPr>
-                      </a:pPr>
-                      <a:r>
-                        <a:t>+182bp</a:t>
+                        <a:defRPr sz="1100">
+                          <a:solidFill>
+                            <a:srgbClr val="2D2D3D"/>
+                          </a:solidFill>
+                          <a:latin typeface="Calibri"/>
+                        </a:defRPr>
+                      </a:pPr>
+                      <a:r>
+                        <a:t>82.39</a:t>
+                      </a:r>
+                    </a:p>
+                  </a:txBody>
+                  <a:tcPr>
+                    <a:solidFill>
+                      <a:srgbClr val="E8EBF5"/>
+                    </a:solidFill>
+                  </a:tcPr>
+                </a:tc>
+                <a:tc>
+                  <a:txBody>
+                    <a:bodyPr/>
+                    <a:lstStyle/>
+                    <a:p>
+                      <a:pPr algn="r">
+                        <a:defRPr sz="1100">
+                          <a:solidFill>
+                            <a:srgbClr val="2D2D3D"/>
+                          </a:solidFill>
+                          <a:latin typeface="Calibri"/>
+                        </a:defRPr>
+                      </a:pPr>
+                      <a:r>
+                        <a:t>−6.9</a:t>
+                      </a:r>
+                    </a:p>
+                  </a:txBody>
+                  <a:tcPr>
+                    <a:solidFill>
+                      <a:srgbClr val="E8EBF5"/>
+                    </a:solidFill>
+                  </a:tcPr>
+                </a:tc>
+                <a:tc>
+                  <a:txBody>
+                    <a:bodyPr/>
+                    <a:lstStyle/>
+                    <a:p>
+                      <a:pPr algn="r">
+                        <a:defRPr sz="1100">
+                          <a:solidFill>
+                            <a:srgbClr val="2D2D3D"/>
+                          </a:solidFill>
+                          <a:latin typeface="Calibri"/>
+                        </a:defRPr>
+                      </a:pPr>
+                      <a:r>
+                        <a:t>−4.9</a:t>
                       </a:r>
                     </a:p>
                   </a:txBody>
@@ -11752,15 +11907,15 @@
                     <a:lstStyle/>
                     <a:p>
                       <a:pPr algn="l">
-                        <a:defRPr sz="1200">
-                          <a:solidFill>
-                            <a:srgbClr val="2D2D3D"/>
-                          </a:solidFill>
-                          <a:latin typeface="Calibri"/>
-                        </a:defRPr>
-                      </a:pPr>
-                      <a:r>
-                        <a:t>CCC (Deeply Stressed)</a:t>
+                        <a:defRPr sz="1100">
+                          <a:solidFill>
+                            <a:srgbClr val="2D2D3D"/>
+                          </a:solidFill>
+                          <a:latin typeface="Calibri"/>
+                        </a:defRPr>
+                      </a:pPr>
+                      <a:r>
+                        <a:t>CCC</a:t>
                       </a:r>
                     </a:p>
                   </a:txBody>
@@ -11776,15 +11931,15 @@
                     <a:lstStyle/>
                     <a:p>
                       <a:pPr algn="r">
-                        <a:defRPr sz="1200">
-                          <a:solidFill>
-                            <a:srgbClr val="2D2D3D"/>
-                          </a:solidFill>
-                          <a:latin typeface="Calibri"/>
-                        </a:defRPr>
-                      </a:pPr>
-                      <a:r>
-                        <a:t>1,400</a:t>
+                        <a:defRPr sz="1100">
+                          <a:solidFill>
+                            <a:srgbClr val="2D2D3D"/>
+                          </a:solidFill>
+                          <a:latin typeface="Calibri"/>
+                        </a:defRPr>
+                      </a:pPr>
+                      <a:r>
+                        <a:t>76.13</a:t>
                       </a:r>
                     </a:p>
                   </a:txBody>
@@ -11800,15 +11955,15 @@
                     <a:lstStyle/>
                     <a:p>
                       <a:pPr algn="r">
-                        <a:defRPr sz="1200">
-                          <a:solidFill>
-                            <a:srgbClr val="2D2D3D"/>
-                          </a:solidFill>
-                          <a:latin typeface="Calibri"/>
-                        </a:defRPr>
-                      </a:pPr>
-                      <a:r>
-                        <a:t>2,976</a:t>
+                        <a:defRPr sz="1100">
+                          <a:solidFill>
+                            <a:srgbClr val="2D2D3D"/>
+                          </a:solidFill>
+                          <a:latin typeface="Calibri"/>
+                        </a:defRPr>
+                      </a:pPr>
+                      <a:r>
+                        <a:t>67.34</a:t>
                       </a:r>
                     </a:p>
                   </a:txBody>
@@ -11824,15 +11979,15 @@
                     <a:lstStyle/>
                     <a:p>
                       <a:pPr algn="r">
-                        <a:defRPr sz="1200">
-                          <a:solidFill>
-                            <a:srgbClr val="2D2D3D"/>
-                          </a:solidFill>
-                          <a:latin typeface="Calibri"/>
-                        </a:defRPr>
-                      </a:pPr>
-                      <a:r>
-                        <a:t>3,685</a:t>
+                        <a:defRPr sz="1100">
+                          <a:solidFill>
+                            <a:srgbClr val="2D2D3D"/>
+                          </a:solidFill>
+                          <a:latin typeface="Calibri"/>
+                        </a:defRPr>
+                      </a:pPr>
+                      <a:r>
+                        <a:t>63.60</a:t>
                       </a:r>
                     </a:p>
                   </a:txBody>
@@ -11848,15 +12003,63 @@
                     <a:lstStyle/>
                     <a:p>
                       <a:pPr algn="r">
-                        <a:defRPr sz="1200">
-                          <a:solidFill>
-                            <a:srgbClr val="2D2D3D"/>
-                          </a:solidFill>
-                          <a:latin typeface="Calibri"/>
-                        </a:defRPr>
-                      </a:pPr>
-                      <a:r>
-                        <a:t>+708bp</a:t>
+                        <a:defRPr sz="1100">
+                          <a:solidFill>
+                            <a:srgbClr val="2D2D3D"/>
+                          </a:solidFill>
+                          <a:latin typeface="Calibri"/>
+                        </a:defRPr>
+                      </a:pPr>
+                      <a:r>
+                        <a:t>57.43</a:t>
+                      </a:r>
+                    </a:p>
+                  </a:txBody>
+                  <a:tcPr>
+                    <a:solidFill>
+                      <a:srgbClr val="FFFFFF"/>
+                    </a:solidFill>
+                  </a:tcPr>
+                </a:tc>
+                <a:tc>
+                  <a:txBody>
+                    <a:bodyPr/>
+                    <a:lstStyle/>
+                    <a:p>
+                      <a:pPr algn="r">
+                        <a:defRPr sz="1100">
+                          <a:solidFill>
+                            <a:srgbClr val="2D2D3D"/>
+                          </a:solidFill>
+                          <a:latin typeface="Calibri"/>
+                        </a:defRPr>
+                      </a:pPr>
+                      <a:r>
+                        <a:t>−8.8</a:t>
+                      </a:r>
+                    </a:p>
+                  </a:txBody>
+                  <a:tcPr>
+                    <a:solidFill>
+                      <a:srgbClr val="FFFFFF"/>
+                    </a:solidFill>
+                  </a:tcPr>
+                </a:tc>
+                <a:tc>
+                  <a:txBody>
+                    <a:bodyPr/>
+                    <a:lstStyle/>
+                    <a:p>
+                      <a:pPr algn="r">
+                        <a:defRPr sz="1100">
+                          <a:solidFill>
+                            <a:srgbClr val="2D2D3D"/>
+                          </a:solidFill>
+                          <a:latin typeface="Calibri"/>
+                        </a:defRPr>
+                      </a:pPr>
+                      <a:r>
+                        <a:t>−6.2</a:t>
                       </a:r>
                     </a:p>
                   </a:txBody>
@@ -11873,14 +12076,50 @@
       </p:graphicFrame>
       <p:sp>
         <p:nvSpPr>
+          <p:cNvPr id="7" name="TextBox 6"/>
+          <p:cNvSpPr txBox="1"/>
+          <p:nvPr/>
+        </p:nvSpPr>
+        <p:spPr>
+          <a:xfrm>
+            <a:off x="457200" y="3291840"/>
+            <a:ext cx="8229600" cy="274320"/>
+          </a:xfrm>
+          <a:prstGeom prst="rect">
+            <a:avLst/>
+          </a:prstGeom>
+          <a:noFill/>
+        </p:spPr>
+        <p:txBody>
+          <a:bodyPr wrap="square">
+            <a:spAutoFit/>
+          </a:bodyPr>
+          <a:lstStyle/>
+          <a:p>
+            <a:pPr algn="l">
+              <a:defRPr sz="1100" b="0">
+                <a:solidFill>
+                  <a:srgbClr val="555570"/>
+                </a:solidFill>
+                <a:latin typeface="Calibri"/>
+              </a:defRPr>
+            </a:pPr>
+            <a:r>
+              <a:t>Δ = PIK price minus Cash price (in points). HR = hazard-rate model. MC = Merton Monte Carlo.</a:t>
+            </a:r>
+          </a:p>
+        </p:txBody>
+      </p:sp>
+      <p:sp>
+        <p:nvSpPr>
           <p:cNvPr id="8" name="TextBox 7"/>
           <p:cNvSpPr txBox="1"/>
           <p:nvPr/>
         </p:nvSpPr>
         <p:spPr>
           <a:xfrm>
-            <a:off x="457200" y="4114800"/>
-            <a:ext cx="8229600" cy="1371600"/>
+            <a:off x="457200" y="3657600"/>
+            <a:ext cx="8229600" cy="1828800"/>
           </a:xfrm>
           <a:prstGeom prst="rect">
             <a:avLst/>
@@ -11905,7 +12144,7 @@
               </a:defRPr>
             </a:pPr>
             <a:r>
-              <a:t>For CCC credits, the PIK-implied hazard is ~708bp above the cash-implied hazard</a:t>
+              <a:t>The HR model always prices PIK below cash (negative Δ). It sees only the concentrated maturity exposure.</a:t>
             </a:r>
           </a:p>
           <a:p>
@@ -11921,7 +12160,7 @@
               </a:defRPr>
             </a:pPr>
             <a:r>
-              <a:t>This is the structural premium — the extra default risk created by the feedback loop</a:t>
+              <a:t>The MC model prices PIK ABOVE cash for BB+/BB− (positive Δ). Rare defaults mean PIK compounding is a net benefit.</a:t>
             </a:r>
           </a:p>
           <a:p>
@@ -11937,7 +12176,23 @@
               </a:defRPr>
             </a:pPr>
             <a:r>
-              <a:t>Simple models (flat λ) cannot capture this because they treat λ as fixed</a:t>
+              <a:t>For stressed credits (B−, CCC), both models agree PIK is cheaper, but the gap narrows because MC includes the leverage spiral that the HR model misses.</a:t>
+            </a:r>
+          </a:p>
+          <a:p>
+            <a:pPr>
+              <a:spcAft>
+                <a:spcPts val="800"/>
+              </a:spcAft>
+              <a:defRPr sz="1400">
+                <a:solidFill>
+                  <a:srgbClr val="2D2D3D"/>
+                </a:solidFill>
+                <a:latin typeface="Calibri"/>
+              </a:defRPr>
+            </a:pPr>
+            <a:r>
+              <a:t>The sign reversal for strong credits is the key insight: a flat hazard model cannot capture this dynamic.</a:t>
             </a:r>
           </a:p>
         </p:txBody>
@@ -11951,7 +12206,7 @@
         <p:spPr>
           <a:xfrm>
             <a:off x="1371600" y="5669280"/>
-            <a:ext cx="6400800" cy="457200"/>
+            <a:ext cx="6400800" cy="548640"/>
           </a:xfrm>
           <a:prstGeom prst="roundRect">
             <a:avLst/>
@@ -11990,7 +12245,7 @@
               </a:defRPr>
             </a:pPr>
             <a:r>
-              <a:t>The implied hazard approach converts the structural model's insight into the hazard-rate language that flat-curve models understand.</a:t>
+              <a:t>The structural model captures two things the hazard model cannot: (1) the compounding benefit when defaults are rare, and (2) the feedback spiral when defaults are likely.</a:t>
             </a:r>
           </a:p>
         </p:txBody>
@@ -12222,7 +12477,7 @@
           <a:lstStyle/>
           <a:p>
             <a:pPr algn="ctr">
-              <a:defRPr sz="1400" b="1">
+              <a:defRPr sz="1300" b="1">
                 <a:solidFill>
                   <a:srgbClr val="FFFFFF"/>
                 </a:solidFill>
@@ -12230,7 +12485,7 @@
               </a:defRPr>
             </a:pPr>
             <a:r>
-              <a:t>LOW RISK</a:t>
+              <a:t>PIK BENEFITS INVESTOR</a:t>
             </a:r>
           </a:p>
         </p:txBody>
@@ -12266,7 +12521,7 @@
               </a:defRPr>
             </a:pPr>
             <a:r>
-              <a:t>BB+ to BB  |  Coverage &gt; 1.6x</a:t>
+              <a:t>BB+ to BB  |  Mkt spread &lt; 300bp</a:t>
             </a:r>
           </a:p>
         </p:txBody>
@@ -12305,7 +12560,7 @@
               </a:defRPr>
             </a:pPr>
             <a:r>
-              <a:t>PIK premium &lt; 50bp</a:t>
+              <a:t>PIK Z-spread is BELOW cash</a:t>
             </a:r>
           </a:p>
           <a:p>
@@ -12321,7 +12576,7 @@
               </a:defRPr>
             </a:pPr>
             <a:r>
-              <a:t>Feedback loop is negligible</a:t>
+              <a:t>Compounding benefit dominates</a:t>
             </a:r>
           </a:p>
           <a:p>
@@ -12337,7 +12592,7 @@
               </a:defRPr>
             </a:pPr>
             <a:r>
-              <a:t>Simple spread adjustment is fine</a:t>
+              <a:t>Feedback loop is negligible</a:t>
             </a:r>
           </a:p>
           <a:p>
@@ -12353,7 +12608,7 @@
               </a:defRPr>
             </a:pPr>
             <a:r>
-              <a:t>Focus on relative value, not model</a:t>
+              <a:t>Price PIK at or inside cash</a:t>
             </a:r>
           </a:p>
         </p:txBody>
@@ -12398,7 +12653,7 @@
           <a:lstStyle/>
           <a:p>
             <a:pPr algn="ctr">
-              <a:defRPr sz="1400" b="1">
+              <a:defRPr sz="1300" b="1">
                 <a:solidFill>
                   <a:srgbClr val="FFFFFF"/>
                 </a:solidFill>
@@ -12406,7 +12661,7 @@
               </a:defRPr>
             </a:pPr>
             <a:r>
-              <a:t>MODERATE RISK</a:t>
+              <a:t>CROSSOVER ZONE</a:t>
             </a:r>
           </a:p>
         </p:txBody>
@@ -12442,7 +12697,7 @@
               </a:defRPr>
             </a:pPr>
             <a:r>
-              <a:t>B  |  Coverage 1.3x - 1.6x</a:t>
+              <a:t>B  |  Mkt spread 300–500bp</a:t>
             </a:r>
           </a:p>
         </p:txBody>
@@ -12481,7 +12736,7 @@
               </a:defRPr>
             </a:pPr>
             <a:r>
-              <a:t>PIK premium 50 - 200bp</a:t>
+              <a:t>PIK premium 0–75bp</a:t>
             </a:r>
           </a:p>
           <a:p>
@@ -12513,7 +12768,7 @@
               </a:defRPr>
             </a:pPr>
             <a:r>
-              <a:t>Structural model adds material value</a:t>
+              <a:t>Structural model adds value</a:t>
             </a:r>
           </a:p>
           <a:p>
@@ -12574,7 +12829,7 @@
           <a:lstStyle/>
           <a:p>
             <a:pPr algn="ctr">
-              <a:defRPr sz="1400" b="1">
+              <a:defRPr sz="1300" b="1">
                 <a:solidFill>
                   <a:srgbClr val="FFFFFF"/>
                 </a:solidFill>
@@ -12582,7 +12837,7 @@
               </a:defRPr>
             </a:pPr>
             <a:r>
-              <a:t>HIGH RISK</a:t>
+              <a:t>STRUCTURAL RISK</a:t>
             </a:r>
           </a:p>
         </p:txBody>
@@ -12618,7 +12873,7 @@
               </a:defRPr>
             </a:pPr>
             <a:r>
-              <a:t>B- to CCC  |  Coverage &lt; 1.3x</a:t>
+              <a:t>B− to CCC  |  Mkt spread &gt; 500bp</a:t>
             </a:r>
           </a:p>
         </p:txBody>
@@ -12657,7 +12912,7 @@
               </a:defRPr>
             </a:pPr>
             <a:r>
-              <a:t>PIK premium 200 - 500+ bp</a:t>
+              <a:t>PIK premium 100–290+ bp</a:t>
             </a:r>
           </a:p>
           <a:p>
@@ -12705,7 +12960,7 @@
               </a:defRPr>
             </a:pPr>
             <a:r>
-              <a:t>Simple spread bump is dangerous</a:t>
+              <a:t>Flat spread bump is dangerous</a:t>
             </a:r>
           </a:p>
         </p:txBody>
@@ -12765,10 +13020,10 @@
                 <a:tableStyleId>{5C22544A-7EE6-4342-B048-85BDC9FD1C3A}</a:tableStyleId>
               </a:tblPr>
               <a:tblGrid>
-                <a:gridCol w="2286000"/>
                 <a:gridCol w="2011680"/>
-                <a:gridCol w="2011680"/>
-                <a:gridCol w="2011680"/>
+                <a:gridCol w="2103120"/>
+                <a:gridCol w="2103120"/>
+                <a:gridCol w="2103120"/>
               </a:tblGrid>
               <a:tr h="320040">
                 <a:tc>
@@ -12809,7 +13064,7 @@
                         </a:defRPr>
                       </a:pPr>
                       <a:r>
-                        <a:t>Low Risk</a:t>
+                        <a:t>PIK Benefits</a:t>
                       </a:r>
                     </a:p>
                   </a:txBody>
@@ -12833,7 +13088,7 @@
                         </a:defRPr>
                       </a:pPr>
                       <a:r>
-                        <a:t>Moderate Risk</a:t>
+                        <a:t>Crossover</a:t>
                       </a:r>
                     </a:p>
                   </a:txBody>
@@ -12857,7 +13112,7 @@
                         </a:defRPr>
                       </a:pPr>
                       <a:r>
-                        <a:t>High Risk</a:t>
+                        <a:t>Structural Risk</a:t>
                       </a:r>
                     </a:p>
                   </a:txBody>
@@ -12883,7 +13138,7 @@
                         </a:defRPr>
                       </a:pPr>
                       <a:r>
-                        <a:t>PIK premium estimate</a:t>
+                        <a:t>PIK Z-spread premium</a:t>
                       </a:r>
                     </a:p>
                   </a:txBody>
@@ -12907,7 +13162,7 @@
                         </a:defRPr>
                       </a:pPr>
                       <a:r>
-                        <a:t>~25-50bp</a:t>
+                        <a:t>−60 to −20bp</a:t>
                       </a:r>
                     </a:p>
                   </a:txBody>
@@ -12931,7 +13186,7 @@
                         </a:defRPr>
                       </a:pPr>
                       <a:r>
-                        <a:t>~50-200bp</a:t>
+                        <a:t>0 to +75bp</a:t>
                       </a:r>
                     </a:p>
                   </a:txBody>
@@ -12955,7 +13210,7 @@
                         </a:defRPr>
                       </a:pPr>
                       <a:r>
-                        <a:t>200-500+bp</a:t>
+                        <a:t>+100 to +290bp</a:t>
                       </a:r>
                     </a:p>
                   </a:txBody>
@@ -13005,7 +13260,7 @@
                         </a:defRPr>
                       </a:pPr>
                       <a:r>
-                        <a:t>Spread bump OK</a:t>
+                        <a:t>No — PIK trades inside</a:t>
                       </a:r>
                     </a:p>
                   </a:txBody>
@@ -13151,7 +13406,7 @@
                         </a:defRPr>
                       </a:pPr>
                       <a:r>
-                        <a:t>Toggle can exceed PIK</a:t>
+                        <a:t>Toggle ≈ PIK or worse</a:t>
                       </a:r>
                     </a:p>
                   </a:txBody>
@@ -13177,7 +13432,7 @@
                         </a:defRPr>
                       </a:pPr>
                       <a:r>
-                        <a:t>Key sensitivity</a:t>
+                        <a:t>Key risk factor</a:t>
                       </a:r>
                     </a:p>
                   </a:txBody>
@@ -13201,7 +13456,7 @@
                         </a:defRPr>
                       </a:pPr>
                       <a:r>
-                        <a:t>Duration, coupon</a:t>
+                        <a:t>Maturity extension risk</a:t>
                       </a:r>
                     </a:p>
                   </a:txBody>
@@ -13488,7 +13743,7 @@
               </a:defRPr>
             </a:pPr>
             <a:r>
-              <a:t>PIK premium is non-linear in credit quality</a:t>
+              <a:t>PIK premium depends entirely on credit quality</a:t>
             </a:r>
           </a:p>
         </p:txBody>
@@ -13524,7 +13779,7 @@
               </a:defRPr>
             </a:pPr>
             <a:r>
-              <a:t>Negligible for strong credits (BB), massive for weak ones (CCC: 500+bp). A flat spread bump across the portfolio is wrong.</a:t>
+              <a:t>For strong credits (BB+/BB−), PIK can actually trade tighter than cash — compounding benefits outweigh rare defaults. For stressed credits (CCC), the premium exceeds +260bp.</a:t>
             </a:r>
           </a:p>
         </p:txBody>
@@ -13612,7 +13867,7 @@
               </a:defRPr>
             </a:pPr>
             <a:r>
-              <a:t>Simple hazard models capture timing but miss the feedback loop</a:t>
+              <a:t>Simple hazard models get the sign wrong for strong credits</a:t>
             </a:r>
           </a:p>
         </p:txBody>
@@ -13648,7 +13903,7 @@
               </a:defRPr>
             </a:pPr>
             <a:r>
-              <a:t>The flat-λ model underestimates the PIK discount by up to 9 points for stressed credits. The gap is the endogenous leverage-hazard spiral.</a:t>
+              <a:t>The flat-λ model always penalises PIK. The structural model shows PIK trades ABOVE cash for BB+. The crossover is near 300bp market spread.</a:t>
             </a:r>
           </a:p>
         </p:txBody>
@@ -13772,7 +14027,7 @@
               </a:defRPr>
             </a:pPr>
             <a:r>
-              <a:t>Borrowers PIK when credit deteriorates — adverse selection. Toggle spreads can exceed full PIK. Price toggles as 'PIK plus optionality cost.'</a:t>
+              <a:t>Borrowers PIK when credit deteriorates — adverse selection. Toggle Z-spreads can exceed full PIK because the feedback loop is concentrated on the worst paths.</a:t>
             </a:r>
           </a:p>
         </p:txBody>
@@ -13860,7 +14115,7 @@
               </a:defRPr>
             </a:pPr>
             <a:r>
-              <a:t>Below ~1.3x coverage, structural modelling is essential</a:t>
+              <a:t>Above ~500bp market spread, structural modelling is essential</a:t>
             </a:r>
           </a:p>
         </p:txBody>
@@ -13896,7 +14151,7 @@
               </a:defRPr>
             </a:pPr>
             <a:r>
-              <a:t>In the danger zone, the feedback loop dominates pricing. A spread bump approach will materially misprice PIK risk.</a:t>
+              <a:t>In the structural risk zone, the feedback loop dominates pricing. A spread bump approach will materially misprice PIK risk.</a:t>
             </a:r>
           </a:p>
         </p:txBody>
@@ -14195,7 +14450,7 @@
               </a:defRPr>
             </a:pPr>
             <a:r>
-              <a:t>"The coupon rate is the same"</a:t>
+              <a:t>"The coupon rate is the same either way"</a:t>
             </a:r>
           </a:p>
           <a:p>
@@ -14211,7 +14466,7 @@
               </a:defRPr>
             </a:pPr>
             <a:r>
-              <a:t>"Compounding offsets the delay"</a:t>
+              <a:t>"Compounding offsets the deferral"</a:t>
             </a:r>
           </a:p>
         </p:txBody>
@@ -14303,7 +14558,7 @@
               </a:defRPr>
             </a:pPr>
             <a:r>
-              <a:t>For strong credits: PIK premium ≈ 0bp</a:t>
+              <a:t>For strong credits (BB+): PIK can trade tighter</a:t>
             </a:r>
           </a:p>
           <a:p>
@@ -14319,7 +14574,7 @@
               </a:defRPr>
             </a:pPr>
             <a:r>
-              <a:t>For stressed credits: PIK premium &gt; 500bp</a:t>
+              <a:t>For stressed credits (CCC): PIK premium &gt; +260bp</a:t>
             </a:r>
           </a:p>
           <a:p>
@@ -14335,7 +14590,7 @@
               </a:defRPr>
             </a:pPr>
             <a:r>
-              <a:t>The relationship is highly non-linear</a:t>
+              <a:t>Below ~300bp market spread: PIK actually benefits the investor</a:t>
             </a:r>
           </a:p>
         </p:txBody>
@@ -14388,7 +14643,7 @@
               </a:defRPr>
             </a:pPr>
             <a:r>
-              <a:t>The answer depends on credit quality in a way that is impossible to guess without a model.</a:t>
+              <a:t>The answer depends on credit quality in a way that is impossible to guess without a model. The premium can even be negative.</a:t>
             </a:r>
           </a:p>
         </p:txBody>
@@ -14588,7 +14843,7 @@
         </p:nvSpPr>
         <p:spPr>
           <a:xfrm>
-            <a:off x="457200" y="1371600"/>
+            <a:off x="457200" y="1188720"/>
             <a:ext cx="1828800" cy="274320"/>
           </a:xfrm>
           <a:prstGeom prst="rect">
@@ -14624,7 +14879,7 @@
         </p:nvSpPr>
         <p:spPr>
           <a:xfrm>
-            <a:off x="2286000" y="1473200"/>
+            <a:off x="2286000" y="1290320"/>
             <a:ext cx="5943600" cy="50800"/>
           </a:xfrm>
           <a:prstGeom prst="rect">
@@ -14667,8 +14922,8 @@
         </p:nvSpPr>
         <p:spPr>
           <a:xfrm>
-            <a:off x="2286000" y="1645920"/>
-            <a:ext cx="5943600" cy="457200"/>
+            <a:off x="2286000" y="1463040"/>
+            <a:ext cx="5943600" cy="365760"/>
           </a:xfrm>
           <a:prstGeom prst="rect">
             <a:avLst/>
@@ -14703,7 +14958,7 @@
         </p:nvSpPr>
         <p:spPr>
           <a:xfrm>
-            <a:off x="2286000" y="1920240"/>
+            <a:off x="2286000" y="1691640"/>
             <a:ext cx="5943600" cy="274320"/>
           </a:xfrm>
           <a:prstGeom prst="rect">
@@ -14739,7 +14994,7 @@
         </p:nvSpPr>
         <p:spPr>
           <a:xfrm>
-            <a:off x="457200" y="2743200"/>
+            <a:off x="457200" y="2286000"/>
             <a:ext cx="1828800" cy="274320"/>
           </a:xfrm>
           <a:prstGeom prst="rect">
@@ -14775,7 +15030,7 @@
         </p:nvSpPr>
         <p:spPr>
           <a:xfrm>
-            <a:off x="2286000" y="2844800"/>
+            <a:off x="2286000" y="2387600"/>
             <a:ext cx="5943600" cy="50800"/>
           </a:xfrm>
           <a:prstGeom prst="rect">
@@ -14818,8 +15073,8 @@
         </p:nvSpPr>
         <p:spPr>
           <a:xfrm>
-            <a:off x="2286000" y="3017520"/>
-            <a:ext cx="5943600" cy="457200"/>
+            <a:off x="2286000" y="2560320"/>
+            <a:ext cx="5943600" cy="365760"/>
           </a:xfrm>
           <a:prstGeom prst="rect">
             <a:avLst/>
@@ -14854,7 +15109,7 @@
         </p:nvSpPr>
         <p:spPr>
           <a:xfrm>
-            <a:off x="2286000" y="3291840"/>
+            <a:off x="2286000" y="2788920"/>
             <a:ext cx="5943600" cy="274320"/>
           </a:xfrm>
           <a:prstGeom prst="rect">
@@ -14877,7 +15132,7 @@
               </a:defRPr>
             </a:pPr>
             <a:r>
-              <a:t>No coupons. Entire value at maturity: N × (1 + c/2)^10 = 151.76. Concentrated exposure.</a:t>
+              <a:t>No coupons. Entire value at maturity: N × (1 + c/2)¹⁰ = 151.76. Concentrated exposure.</a:t>
             </a:r>
           </a:p>
         </p:txBody>
@@ -14890,7 +15145,7 @@
         </p:nvSpPr>
         <p:spPr>
           <a:xfrm>
-            <a:off x="457200" y="4114800"/>
+            <a:off x="457200" y="3383280"/>
             <a:ext cx="1828800" cy="274320"/>
           </a:xfrm>
           <a:prstGeom prst="rect">
@@ -14926,7 +15181,7 @@
         </p:nvSpPr>
         <p:spPr>
           <a:xfrm>
-            <a:off x="2286000" y="4216400"/>
+            <a:off x="2286000" y="3484880"/>
             <a:ext cx="5943600" cy="50800"/>
           </a:xfrm>
           <a:prstGeom prst="rect">
@@ -14961,16 +15216,1115 @@
           </a:p>
         </p:txBody>
       </p:sp>
-      <p:sp>
-        <p:nvSpPr>
-          <p:cNvPr id="16" name="TextBox 15"/>
+      <p:graphicFrame>
+        <p:nvGraphicFramePr>
+          <p:cNvPr id="16" name="Table 15"/>
+          <p:cNvGraphicFramePr>
+            <a:graphicFrameLocks noGrp="1"/>
+          </p:cNvGraphicFramePr>
+          <p:nvPr/>
+        </p:nvGraphicFramePr>
+        <p:xfrm>
+          <a:off x="457200" y="3703320"/>
+          <a:ext cx="8229600" cy="1097280"/>
+        </p:xfrm>
+        <a:graphic>
+          <a:graphicData uri="http://schemas.openxmlformats.org/drawingml/2006/table">
+            <a:tbl>
+              <a:tblPr firstRow="1" bandRow="1">
+                <a:tableStyleId>{5C22544A-7EE6-4342-B048-85BDC9FD1C3A}</a:tableStyleId>
+              </a:tblPr>
+              <a:tblGrid>
+                <a:gridCol w="731520"/>
+                <a:gridCol w="749808"/>
+                <a:gridCol w="749808"/>
+                <a:gridCol w="749808"/>
+                <a:gridCol w="749808"/>
+                <a:gridCol w="749808"/>
+                <a:gridCol w="749808"/>
+                <a:gridCol w="749808"/>
+                <a:gridCol w="749808"/>
+                <a:gridCol w="749808"/>
+                <a:gridCol w="749808"/>
+              </a:tblGrid>
+              <a:tr h="274320">
+                <a:tc>
+                  <a:txBody>
+                    <a:bodyPr/>
+                    <a:lstStyle/>
+                    <a:p>
+                      <a:pPr algn="l">
+                        <a:defRPr sz="900" b="1">
+                          <a:solidFill>
+                            <a:srgbClr val="FFFFFF"/>
+                          </a:solidFill>
+                          <a:latin typeface="Calibri"/>
+                        </a:defRPr>
+                      </a:pPr>
+                      <a:r>
+                        <a:t>Period</a:t>
+                      </a:r>
+                    </a:p>
+                  </a:txBody>
+                  <a:tcPr>
+                    <a:solidFill>
+                      <a:srgbClr val="2C3E6B"/>
+                    </a:solidFill>
+                  </a:tcPr>
+                </a:tc>
+                <a:tc>
+                  <a:txBody>
+                    <a:bodyPr/>
+                    <a:lstStyle/>
+                    <a:p>
+                      <a:pPr algn="ctr">
+                        <a:defRPr sz="900" b="1">
+                          <a:solidFill>
+                            <a:srgbClr val="FFFFFF"/>
+                          </a:solidFill>
+                          <a:latin typeface="Calibri"/>
+                        </a:defRPr>
+                      </a:pPr>
+                      <a:r>
+                        <a:t>1</a:t>
+                      </a:r>
+                    </a:p>
+                  </a:txBody>
+                  <a:tcPr>
+                    <a:solidFill>
+                      <a:srgbClr val="2C3E6B"/>
+                    </a:solidFill>
+                  </a:tcPr>
+                </a:tc>
+                <a:tc>
+                  <a:txBody>
+                    <a:bodyPr/>
+                    <a:lstStyle/>
+                    <a:p>
+                      <a:pPr algn="ctr">
+                        <a:defRPr sz="900" b="1">
+                          <a:solidFill>
+                            <a:srgbClr val="FFFFFF"/>
+                          </a:solidFill>
+                          <a:latin typeface="Calibri"/>
+                        </a:defRPr>
+                      </a:pPr>
+                      <a:r>
+                        <a:t>2</a:t>
+                      </a:r>
+                    </a:p>
+                  </a:txBody>
+                  <a:tcPr>
+                    <a:solidFill>
+                      <a:srgbClr val="2C3E6B"/>
+                    </a:solidFill>
+                  </a:tcPr>
+                </a:tc>
+                <a:tc>
+                  <a:txBody>
+                    <a:bodyPr/>
+                    <a:lstStyle/>
+                    <a:p>
+                      <a:pPr algn="ctr">
+                        <a:defRPr sz="900" b="1">
+                          <a:solidFill>
+                            <a:srgbClr val="FFFFFF"/>
+                          </a:solidFill>
+                          <a:latin typeface="Calibri"/>
+                        </a:defRPr>
+                      </a:pPr>
+                      <a:r>
+                        <a:t>3</a:t>
+                      </a:r>
+                    </a:p>
+                  </a:txBody>
+                  <a:tcPr>
+                    <a:solidFill>
+                      <a:srgbClr val="2C3E6B"/>
+                    </a:solidFill>
+                  </a:tcPr>
+                </a:tc>
+                <a:tc>
+                  <a:txBody>
+                    <a:bodyPr/>
+                    <a:lstStyle/>
+                    <a:p>
+                      <a:pPr algn="ctr">
+                        <a:defRPr sz="900" b="1">
+                          <a:solidFill>
+                            <a:srgbClr val="FFFFFF"/>
+                          </a:solidFill>
+                          <a:latin typeface="Calibri"/>
+                        </a:defRPr>
+                      </a:pPr>
+                      <a:r>
+                        <a:t>4</a:t>
+                      </a:r>
+                    </a:p>
+                  </a:txBody>
+                  <a:tcPr>
+                    <a:solidFill>
+                      <a:srgbClr val="2C3E6B"/>
+                    </a:solidFill>
+                  </a:tcPr>
+                </a:tc>
+                <a:tc>
+                  <a:txBody>
+                    <a:bodyPr/>
+                    <a:lstStyle/>
+                    <a:p>
+                      <a:pPr algn="ctr">
+                        <a:defRPr sz="900" b="1">
+                          <a:solidFill>
+                            <a:srgbClr val="FFFFFF"/>
+                          </a:solidFill>
+                          <a:latin typeface="Calibri"/>
+                        </a:defRPr>
+                      </a:pPr>
+                      <a:r>
+                        <a:t>5</a:t>
+                      </a:r>
+                    </a:p>
+                  </a:txBody>
+                  <a:tcPr>
+                    <a:solidFill>
+                      <a:srgbClr val="2C3E6B"/>
+                    </a:solidFill>
+                  </a:tcPr>
+                </a:tc>
+                <a:tc>
+                  <a:txBody>
+                    <a:bodyPr/>
+                    <a:lstStyle/>
+                    <a:p>
+                      <a:pPr algn="ctr">
+                        <a:defRPr sz="900" b="1">
+                          <a:solidFill>
+                            <a:srgbClr val="FFFFFF"/>
+                          </a:solidFill>
+                          <a:latin typeface="Calibri"/>
+                        </a:defRPr>
+                      </a:pPr>
+                      <a:r>
+                        <a:t>6</a:t>
+                      </a:r>
+                    </a:p>
+                  </a:txBody>
+                  <a:tcPr>
+                    <a:solidFill>
+                      <a:srgbClr val="2C3E6B"/>
+                    </a:solidFill>
+                  </a:tcPr>
+                </a:tc>
+                <a:tc>
+                  <a:txBody>
+                    <a:bodyPr/>
+                    <a:lstStyle/>
+                    <a:p>
+                      <a:pPr algn="ctr">
+                        <a:defRPr sz="900" b="1">
+                          <a:solidFill>
+                            <a:srgbClr val="FFFFFF"/>
+                          </a:solidFill>
+                          <a:latin typeface="Calibri"/>
+                        </a:defRPr>
+                      </a:pPr>
+                      <a:r>
+                        <a:t>7</a:t>
+                      </a:r>
+                    </a:p>
+                  </a:txBody>
+                  <a:tcPr>
+                    <a:solidFill>
+                      <a:srgbClr val="2C3E6B"/>
+                    </a:solidFill>
+                  </a:tcPr>
+                </a:tc>
+                <a:tc>
+                  <a:txBody>
+                    <a:bodyPr/>
+                    <a:lstStyle/>
+                    <a:p>
+                      <a:pPr algn="ctr">
+                        <a:defRPr sz="900" b="1">
+                          <a:solidFill>
+                            <a:srgbClr val="FFFFFF"/>
+                          </a:solidFill>
+                          <a:latin typeface="Calibri"/>
+                        </a:defRPr>
+                      </a:pPr>
+                      <a:r>
+                        <a:t>8</a:t>
+                      </a:r>
+                    </a:p>
+                  </a:txBody>
+                  <a:tcPr>
+                    <a:solidFill>
+                      <a:srgbClr val="2C3E6B"/>
+                    </a:solidFill>
+                  </a:tcPr>
+                </a:tc>
+                <a:tc>
+                  <a:txBody>
+                    <a:bodyPr/>
+                    <a:lstStyle/>
+                    <a:p>
+                      <a:pPr algn="ctr">
+                        <a:defRPr sz="900" b="1">
+                          <a:solidFill>
+                            <a:srgbClr val="FFFFFF"/>
+                          </a:solidFill>
+                          <a:latin typeface="Calibri"/>
+                        </a:defRPr>
+                      </a:pPr>
+                      <a:r>
+                        <a:t>9</a:t>
+                      </a:r>
+                    </a:p>
+                  </a:txBody>
+                  <a:tcPr>
+                    <a:solidFill>
+                      <a:srgbClr val="2C3E6B"/>
+                    </a:solidFill>
+                  </a:tcPr>
+                </a:tc>
+                <a:tc>
+                  <a:txBody>
+                    <a:bodyPr/>
+                    <a:lstStyle/>
+                    <a:p>
+                      <a:pPr algn="ctr">
+                        <a:defRPr sz="900" b="1">
+                          <a:solidFill>
+                            <a:srgbClr val="FFFFFF"/>
+                          </a:solidFill>
+                          <a:latin typeface="Calibri"/>
+                        </a:defRPr>
+                      </a:pPr>
+                      <a:r>
+                        <a:t>10</a:t>
+                      </a:r>
+                    </a:p>
+                  </a:txBody>
+                  <a:tcPr>
+                    <a:solidFill>
+                      <a:srgbClr val="2C3E6B"/>
+                    </a:solidFill>
+                  </a:tcPr>
+                </a:tc>
+              </a:tr>
+              <a:tr h="274320">
+                <a:tc>
+                  <a:txBody>
+                    <a:bodyPr/>
+                    <a:lstStyle/>
+                    <a:p>
+                      <a:pPr algn="l">
+                        <a:defRPr sz="900" b="1">
+                          <a:solidFill>
+                            <a:srgbClr val="5CB85C"/>
+                          </a:solidFill>
+                          <a:latin typeface="Calibri"/>
+                        </a:defRPr>
+                      </a:pPr>
+                      <a:r>
+                        <a:t>Mode</a:t>
+                      </a:r>
+                    </a:p>
+                  </a:txBody>
+                  <a:tcPr>
+                    <a:solidFill>
+                      <a:srgbClr val="FFFFFF"/>
+                    </a:solidFill>
+                  </a:tcPr>
+                </a:tc>
+                <a:tc>
+                  <a:txBody>
+                    <a:bodyPr/>
+                    <a:lstStyle/>
+                    <a:p>
+                      <a:pPr algn="ctr">
+                        <a:defRPr sz="900" b="1">
+                          <a:solidFill>
+                            <a:srgbClr val="5CB85C"/>
+                          </a:solidFill>
+                          <a:latin typeface="Calibri"/>
+                        </a:defRPr>
+                      </a:pPr>
+                      <a:r>
+                        <a:t>Cash</a:t>
+                      </a:r>
+                    </a:p>
+                  </a:txBody>
+                  <a:tcPr>
+                    <a:solidFill>
+                      <a:srgbClr val="FFFFFF"/>
+                    </a:solidFill>
+                  </a:tcPr>
+                </a:tc>
+                <a:tc>
+                  <a:txBody>
+                    <a:bodyPr/>
+                    <a:lstStyle/>
+                    <a:p>
+                      <a:pPr algn="ctr">
+                        <a:defRPr sz="900" b="1">
+                          <a:solidFill>
+                            <a:srgbClr val="5CB85C"/>
+                          </a:solidFill>
+                          <a:latin typeface="Calibri"/>
+                        </a:defRPr>
+                      </a:pPr>
+                      <a:r>
+                        <a:t>Cash</a:t>
+                      </a:r>
+                    </a:p>
+                  </a:txBody>
+                  <a:tcPr>
+                    <a:solidFill>
+                      <a:srgbClr val="FFFFFF"/>
+                    </a:solidFill>
+                  </a:tcPr>
+                </a:tc>
+                <a:tc>
+                  <a:txBody>
+                    <a:bodyPr/>
+                    <a:lstStyle/>
+                    <a:p>
+                      <a:pPr algn="ctr">
+                        <a:defRPr sz="900" b="1">
+                          <a:solidFill>
+                            <a:srgbClr val="5CB85C"/>
+                          </a:solidFill>
+                          <a:latin typeface="Calibri"/>
+                        </a:defRPr>
+                      </a:pPr>
+                      <a:r>
+                        <a:t>Cash</a:t>
+                      </a:r>
+                    </a:p>
+                  </a:txBody>
+                  <a:tcPr>
+                    <a:solidFill>
+                      <a:srgbClr val="FFFFFF"/>
+                    </a:solidFill>
+                  </a:tcPr>
+                </a:tc>
+                <a:tc>
+                  <a:txBody>
+                    <a:bodyPr/>
+                    <a:lstStyle/>
+                    <a:p>
+                      <a:pPr algn="ctr">
+                        <a:defRPr sz="900" b="1">
+                          <a:solidFill>
+                            <a:srgbClr val="5CB85C"/>
+                          </a:solidFill>
+                          <a:latin typeface="Calibri"/>
+                        </a:defRPr>
+                      </a:pPr>
+                      <a:r>
+                        <a:t>Cash</a:t>
+                      </a:r>
+                    </a:p>
+                  </a:txBody>
+                  <a:tcPr>
+                    <a:solidFill>
+                      <a:srgbClr val="FFFFFF"/>
+                    </a:solidFill>
+                  </a:tcPr>
+                </a:tc>
+                <a:tc>
+                  <a:txBody>
+                    <a:bodyPr/>
+                    <a:lstStyle/>
+                    <a:p>
+                      <a:pPr algn="ctr">
+                        <a:defRPr sz="900" b="1">
+                          <a:solidFill>
+                            <a:srgbClr val="E04F4F"/>
+                          </a:solidFill>
+                          <a:latin typeface="Calibri"/>
+                        </a:defRPr>
+                      </a:pPr>
+                      <a:r>
+                        <a:t>PIK</a:t>
+                      </a:r>
+                    </a:p>
+                  </a:txBody>
+                  <a:tcPr>
+                    <a:solidFill>
+                      <a:srgbClr val="FDEDED"/>
+                    </a:solidFill>
+                  </a:tcPr>
+                </a:tc>
+                <a:tc>
+                  <a:txBody>
+                    <a:bodyPr/>
+                    <a:lstStyle/>
+                    <a:p>
+                      <a:pPr algn="ctr">
+                        <a:defRPr sz="900" b="1">
+                          <a:solidFill>
+                            <a:srgbClr val="E04F4F"/>
+                          </a:solidFill>
+                          <a:latin typeface="Calibri"/>
+                        </a:defRPr>
+                      </a:pPr>
+                      <a:r>
+                        <a:t>PIK</a:t>
+                      </a:r>
+                    </a:p>
+                  </a:txBody>
+                  <a:tcPr>
+                    <a:solidFill>
+                      <a:srgbClr val="FDEDED"/>
+                    </a:solidFill>
+                  </a:tcPr>
+                </a:tc>
+                <a:tc>
+                  <a:txBody>
+                    <a:bodyPr/>
+                    <a:lstStyle/>
+                    <a:p>
+                      <a:pPr algn="ctr">
+                        <a:defRPr sz="900" b="1">
+                          <a:solidFill>
+                            <a:srgbClr val="5CB85C"/>
+                          </a:solidFill>
+                          <a:latin typeface="Calibri"/>
+                        </a:defRPr>
+                      </a:pPr>
+                      <a:r>
+                        <a:t>Cash</a:t>
+                      </a:r>
+                    </a:p>
+                  </a:txBody>
+                  <a:tcPr>
+                    <a:solidFill>
+                      <a:srgbClr val="FFFFFF"/>
+                    </a:solidFill>
+                  </a:tcPr>
+                </a:tc>
+                <a:tc>
+                  <a:txBody>
+                    <a:bodyPr/>
+                    <a:lstStyle/>
+                    <a:p>
+                      <a:pPr algn="ctr">
+                        <a:defRPr sz="900" b="1">
+                          <a:solidFill>
+                            <a:srgbClr val="5CB85C"/>
+                          </a:solidFill>
+                          <a:latin typeface="Calibri"/>
+                        </a:defRPr>
+                      </a:pPr>
+                      <a:r>
+                        <a:t>Cash</a:t>
+                      </a:r>
+                    </a:p>
+                  </a:txBody>
+                  <a:tcPr>
+                    <a:solidFill>
+                      <a:srgbClr val="FFFFFF"/>
+                    </a:solidFill>
+                  </a:tcPr>
+                </a:tc>
+                <a:tc>
+                  <a:txBody>
+                    <a:bodyPr/>
+                    <a:lstStyle/>
+                    <a:p>
+                      <a:pPr algn="ctr">
+                        <a:defRPr sz="900" b="1">
+                          <a:solidFill>
+                            <a:srgbClr val="5CB85C"/>
+                          </a:solidFill>
+                          <a:latin typeface="Calibri"/>
+                        </a:defRPr>
+                      </a:pPr>
+                      <a:r>
+                        <a:t>Cash</a:t>
+                      </a:r>
+                    </a:p>
+                  </a:txBody>
+                  <a:tcPr>
+                    <a:solidFill>
+                      <a:srgbClr val="FFFFFF"/>
+                    </a:solidFill>
+                  </a:tcPr>
+                </a:tc>
+                <a:tc>
+                  <a:txBody>
+                    <a:bodyPr/>
+                    <a:lstStyle/>
+                    <a:p>
+                      <a:pPr algn="ctr">
+                        <a:defRPr sz="900" b="1">
+                          <a:solidFill>
+                            <a:srgbClr val="5CB85C"/>
+                          </a:solidFill>
+                          <a:latin typeface="Calibri"/>
+                        </a:defRPr>
+                      </a:pPr>
+                      <a:r>
+                        <a:t>Cash</a:t>
+                      </a:r>
+                    </a:p>
+                  </a:txBody>
+                  <a:tcPr>
+                    <a:solidFill>
+                      <a:srgbClr val="FFFFFF"/>
+                    </a:solidFill>
+                  </a:tcPr>
+                </a:tc>
+              </a:tr>
+              <a:tr h="274320">
+                <a:tc>
+                  <a:txBody>
+                    <a:bodyPr/>
+                    <a:lstStyle/>
+                    <a:p>
+                      <a:pPr algn="l">
+                        <a:defRPr sz="900" b="1">
+                          <a:solidFill>
+                            <a:srgbClr val="2D2D3D"/>
+                          </a:solidFill>
+                          <a:latin typeface="Calibri"/>
+                        </a:defRPr>
+                      </a:pPr>
+                      <a:r>
+                        <a:t>Cashflow</a:t>
+                      </a:r>
+                    </a:p>
+                  </a:txBody>
+                  <a:tcPr>
+                    <a:solidFill>
+                      <a:srgbClr val="E8EBF5"/>
+                    </a:solidFill>
+                  </a:tcPr>
+                </a:tc>
+                <a:tc>
+                  <a:txBody>
+                    <a:bodyPr/>
+                    <a:lstStyle/>
+                    <a:p>
+                      <a:pPr algn="ctr">
+                        <a:defRPr sz="900">
+                          <a:solidFill>
+                            <a:srgbClr val="2D2D3D"/>
+                          </a:solidFill>
+                          <a:latin typeface="Calibri"/>
+                        </a:defRPr>
+                      </a:pPr>
+                      <a:r>
+                        <a:t>4.25</a:t>
+                      </a:r>
+                    </a:p>
+                  </a:txBody>
+                  <a:tcPr>
+                    <a:solidFill>
+                      <a:srgbClr val="E8EBF5"/>
+                    </a:solidFill>
+                  </a:tcPr>
+                </a:tc>
+                <a:tc>
+                  <a:txBody>
+                    <a:bodyPr/>
+                    <a:lstStyle/>
+                    <a:p>
+                      <a:pPr algn="ctr">
+                        <a:defRPr sz="900">
+                          <a:solidFill>
+                            <a:srgbClr val="2D2D3D"/>
+                          </a:solidFill>
+                          <a:latin typeface="Calibri"/>
+                        </a:defRPr>
+                      </a:pPr>
+                      <a:r>
+                        <a:t>4.25</a:t>
+                      </a:r>
+                    </a:p>
+                  </a:txBody>
+                  <a:tcPr>
+                    <a:solidFill>
+                      <a:srgbClr val="E8EBF5"/>
+                    </a:solidFill>
+                  </a:tcPr>
+                </a:tc>
+                <a:tc>
+                  <a:txBody>
+                    <a:bodyPr/>
+                    <a:lstStyle/>
+                    <a:p>
+                      <a:pPr algn="ctr">
+                        <a:defRPr sz="900">
+                          <a:solidFill>
+                            <a:srgbClr val="2D2D3D"/>
+                          </a:solidFill>
+                          <a:latin typeface="Calibri"/>
+                        </a:defRPr>
+                      </a:pPr>
+                      <a:r>
+                        <a:t>4.25</a:t>
+                      </a:r>
+                    </a:p>
+                  </a:txBody>
+                  <a:tcPr>
+                    <a:solidFill>
+                      <a:srgbClr val="E8EBF5"/>
+                    </a:solidFill>
+                  </a:tcPr>
+                </a:tc>
+                <a:tc>
+                  <a:txBody>
+                    <a:bodyPr/>
+                    <a:lstStyle/>
+                    <a:p>
+                      <a:pPr algn="ctr">
+                        <a:defRPr sz="900">
+                          <a:solidFill>
+                            <a:srgbClr val="2D2D3D"/>
+                          </a:solidFill>
+                          <a:latin typeface="Calibri"/>
+                        </a:defRPr>
+                      </a:pPr>
+                      <a:r>
+                        <a:t>4.25</a:t>
+                      </a:r>
+                    </a:p>
+                  </a:txBody>
+                  <a:tcPr>
+                    <a:solidFill>
+                      <a:srgbClr val="E8EBF5"/>
+                    </a:solidFill>
+                  </a:tcPr>
+                </a:tc>
+                <a:tc>
+                  <a:txBody>
+                    <a:bodyPr/>
+                    <a:lstStyle/>
+                    <a:p>
+                      <a:pPr algn="ctr">
+                        <a:defRPr sz="900">
+                          <a:solidFill>
+                            <a:srgbClr val="E04F4F"/>
+                          </a:solidFill>
+                          <a:latin typeface="Calibri"/>
+                        </a:defRPr>
+                      </a:pPr>
+                      <a:r>
+                        <a:t>0</a:t>
+                      </a:r>
+                    </a:p>
+                  </a:txBody>
+                  <a:tcPr>
+                    <a:solidFill>
+                      <a:srgbClr val="FDEDED"/>
+                    </a:solidFill>
+                  </a:tcPr>
+                </a:tc>
+                <a:tc>
+                  <a:txBody>
+                    <a:bodyPr/>
+                    <a:lstStyle/>
+                    <a:p>
+                      <a:pPr algn="ctr">
+                        <a:defRPr sz="900">
+                          <a:solidFill>
+                            <a:srgbClr val="E04F4F"/>
+                          </a:solidFill>
+                          <a:latin typeface="Calibri"/>
+                        </a:defRPr>
+                      </a:pPr>
+                      <a:r>
+                        <a:t>0</a:t>
+                      </a:r>
+                    </a:p>
+                  </a:txBody>
+                  <a:tcPr>
+                    <a:solidFill>
+                      <a:srgbClr val="FDEDED"/>
+                    </a:solidFill>
+                  </a:tcPr>
+                </a:tc>
+                <a:tc>
+                  <a:txBody>
+                    <a:bodyPr/>
+                    <a:lstStyle/>
+                    <a:p>
+                      <a:pPr algn="ctr">
+                        <a:defRPr sz="900" b="1">
+                          <a:solidFill>
+                            <a:srgbClr val="E88D3F"/>
+                          </a:solidFill>
+                          <a:latin typeface="Calibri"/>
+                        </a:defRPr>
+                      </a:pPr>
+                      <a:r>
+                        <a:t>4.62</a:t>
+                      </a:r>
+                    </a:p>
+                  </a:txBody>
+                  <a:tcPr>
+                    <a:solidFill>
+                      <a:srgbClr val="E8EBF5"/>
+                    </a:solidFill>
+                  </a:tcPr>
+                </a:tc>
+                <a:tc>
+                  <a:txBody>
+                    <a:bodyPr/>
+                    <a:lstStyle/>
+                    <a:p>
+                      <a:pPr algn="ctr">
+                        <a:defRPr sz="900" b="1">
+                          <a:solidFill>
+                            <a:srgbClr val="E88D3F"/>
+                          </a:solidFill>
+                          <a:latin typeface="Calibri"/>
+                        </a:defRPr>
+                      </a:pPr>
+                      <a:r>
+                        <a:t>4.62</a:t>
+                      </a:r>
+                    </a:p>
+                  </a:txBody>
+                  <a:tcPr>
+                    <a:solidFill>
+                      <a:srgbClr val="E8EBF5"/>
+                    </a:solidFill>
+                  </a:tcPr>
+                </a:tc>
+                <a:tc>
+                  <a:txBody>
+                    <a:bodyPr/>
+                    <a:lstStyle/>
+                    <a:p>
+                      <a:pPr algn="ctr">
+                        <a:defRPr sz="900" b="1">
+                          <a:solidFill>
+                            <a:srgbClr val="E88D3F"/>
+                          </a:solidFill>
+                          <a:latin typeface="Calibri"/>
+                        </a:defRPr>
+                      </a:pPr>
+                      <a:r>
+                        <a:t>4.62</a:t>
+                      </a:r>
+                    </a:p>
+                  </a:txBody>
+                  <a:tcPr>
+                    <a:solidFill>
+                      <a:srgbClr val="E8EBF5"/>
+                    </a:solidFill>
+                  </a:tcPr>
+                </a:tc>
+                <a:tc>
+                  <a:txBody>
+                    <a:bodyPr/>
+                    <a:lstStyle/>
+                    <a:p>
+                      <a:pPr algn="ctr">
+                        <a:defRPr sz="900" b="1">
+                          <a:solidFill>
+                            <a:srgbClr val="E88D3F"/>
+                          </a:solidFill>
+                          <a:latin typeface="Calibri"/>
+                        </a:defRPr>
+                      </a:pPr>
+                      <a:r>
+                        <a:t>113.30</a:t>
+                      </a:r>
+                    </a:p>
+                  </a:txBody>
+                  <a:tcPr>
+                    <a:solidFill>
+                      <a:srgbClr val="E8EBF5"/>
+                    </a:solidFill>
+                  </a:tcPr>
+                </a:tc>
+              </a:tr>
+              <a:tr h="274320">
+                <a:tc>
+                  <a:txBody>
+                    <a:bodyPr/>
+                    <a:lstStyle/>
+                    <a:p>
+                      <a:pPr algn="l">
+                        <a:defRPr sz="900" b="1">
+                          <a:solidFill>
+                            <a:srgbClr val="555570"/>
+                          </a:solidFill>
+                          <a:latin typeface="Calibri"/>
+                        </a:defRPr>
+                      </a:pPr>
+                      <a:r>
+                        <a:t>Notional</a:t>
+                      </a:r>
+                    </a:p>
+                  </a:txBody>
+                  <a:tcPr>
+                    <a:solidFill>
+                      <a:srgbClr val="FFFFFF"/>
+                    </a:solidFill>
+                  </a:tcPr>
+                </a:tc>
+                <a:tc>
+                  <a:txBody>
+                    <a:bodyPr/>
+                    <a:lstStyle/>
+                    <a:p>
+                      <a:pPr algn="ctr">
+                        <a:defRPr sz="900">
+                          <a:solidFill>
+                            <a:srgbClr val="555570"/>
+                          </a:solidFill>
+                          <a:latin typeface="Calibri"/>
+                        </a:defRPr>
+                      </a:pPr>
+                      <a:r>
+                        <a:t>100</a:t>
+                      </a:r>
+                    </a:p>
+                  </a:txBody>
+                  <a:tcPr>
+                    <a:solidFill>
+                      <a:srgbClr val="FFFFFF"/>
+                    </a:solidFill>
+                  </a:tcPr>
+                </a:tc>
+                <a:tc>
+                  <a:txBody>
+                    <a:bodyPr/>
+                    <a:lstStyle/>
+                    <a:p>
+                      <a:pPr algn="ctr">
+                        <a:defRPr sz="900">
+                          <a:solidFill>
+                            <a:srgbClr val="555570"/>
+                          </a:solidFill>
+                          <a:latin typeface="Calibri"/>
+                        </a:defRPr>
+                      </a:pPr>
+                      <a:r>
+                        <a:t>100</a:t>
+                      </a:r>
+                    </a:p>
+                  </a:txBody>
+                  <a:tcPr>
+                    <a:solidFill>
+                      <a:srgbClr val="FFFFFF"/>
+                    </a:solidFill>
+                  </a:tcPr>
+                </a:tc>
+                <a:tc>
+                  <a:txBody>
+                    <a:bodyPr/>
+                    <a:lstStyle/>
+                    <a:p>
+                      <a:pPr algn="ctr">
+                        <a:defRPr sz="900">
+                          <a:solidFill>
+                            <a:srgbClr val="555570"/>
+                          </a:solidFill>
+                          <a:latin typeface="Calibri"/>
+                        </a:defRPr>
+                      </a:pPr>
+                      <a:r>
+                        <a:t>100</a:t>
+                      </a:r>
+                    </a:p>
+                  </a:txBody>
+                  <a:tcPr>
+                    <a:solidFill>
+                      <a:srgbClr val="FFFFFF"/>
+                    </a:solidFill>
+                  </a:tcPr>
+                </a:tc>
+                <a:tc>
+                  <a:txBody>
+                    <a:bodyPr/>
+                    <a:lstStyle/>
+                    <a:p>
+                      <a:pPr algn="ctr">
+                        <a:defRPr sz="900">
+                          <a:solidFill>
+                            <a:srgbClr val="555570"/>
+                          </a:solidFill>
+                          <a:latin typeface="Calibri"/>
+                        </a:defRPr>
+                      </a:pPr>
+                      <a:r>
+                        <a:t>100</a:t>
+                      </a:r>
+                    </a:p>
+                  </a:txBody>
+                  <a:tcPr>
+                    <a:solidFill>
+                      <a:srgbClr val="FFFFFF"/>
+                    </a:solidFill>
+                  </a:tcPr>
+                </a:tc>
+                <a:tc>
+                  <a:txBody>
+                    <a:bodyPr/>
+                    <a:lstStyle/>
+                    <a:p>
+                      <a:pPr algn="ctr">
+                        <a:defRPr sz="900" b="1">
+                          <a:solidFill>
+                            <a:srgbClr val="E04F4F"/>
+                          </a:solidFill>
+                          <a:latin typeface="Calibri"/>
+                        </a:defRPr>
+                      </a:pPr>
+                      <a:r>
+                        <a:t>104.25</a:t>
+                      </a:r>
+                    </a:p>
+                  </a:txBody>
+                  <a:tcPr>
+                    <a:solidFill>
+                      <a:srgbClr val="FDEDED"/>
+                    </a:solidFill>
+                  </a:tcPr>
+                </a:tc>
+                <a:tc>
+                  <a:txBody>
+                    <a:bodyPr/>
+                    <a:lstStyle/>
+                    <a:p>
+                      <a:pPr algn="ctr">
+                        <a:defRPr sz="900" b="1">
+                          <a:solidFill>
+                            <a:srgbClr val="E04F4F"/>
+                          </a:solidFill>
+                          <a:latin typeface="Calibri"/>
+                        </a:defRPr>
+                      </a:pPr>
+                      <a:r>
+                        <a:t>108.68</a:t>
+                      </a:r>
+                    </a:p>
+                  </a:txBody>
+                  <a:tcPr>
+                    <a:solidFill>
+                      <a:srgbClr val="FDEDED"/>
+                    </a:solidFill>
+                  </a:tcPr>
+                </a:tc>
+                <a:tc>
+                  <a:txBody>
+                    <a:bodyPr/>
+                    <a:lstStyle/>
+                    <a:p>
+                      <a:pPr algn="ctr">
+                        <a:defRPr sz="900" b="1">
+                          <a:solidFill>
+                            <a:srgbClr val="E88D3F"/>
+                          </a:solidFill>
+                          <a:latin typeface="Calibri"/>
+                        </a:defRPr>
+                      </a:pPr>
+                      <a:r>
+                        <a:t>108.68</a:t>
+                      </a:r>
+                    </a:p>
+                  </a:txBody>
+                  <a:tcPr>
+                    <a:solidFill>
+                      <a:srgbClr val="FFFFFF"/>
+                    </a:solidFill>
+                  </a:tcPr>
+                </a:tc>
+                <a:tc>
+                  <a:txBody>
+                    <a:bodyPr/>
+                    <a:lstStyle/>
+                    <a:p>
+                      <a:pPr algn="ctr">
+                        <a:defRPr sz="900" b="1">
+                          <a:solidFill>
+                            <a:srgbClr val="E88D3F"/>
+                          </a:solidFill>
+                          <a:latin typeface="Calibri"/>
+                        </a:defRPr>
+                      </a:pPr>
+                      <a:r>
+                        <a:t>108.68</a:t>
+                      </a:r>
+                    </a:p>
+                  </a:txBody>
+                  <a:tcPr>
+                    <a:solidFill>
+                      <a:srgbClr val="FFFFFF"/>
+                    </a:solidFill>
+                  </a:tcPr>
+                </a:tc>
+                <a:tc>
+                  <a:txBody>
+                    <a:bodyPr/>
+                    <a:lstStyle/>
+                    <a:p>
+                      <a:pPr algn="ctr">
+                        <a:defRPr sz="900" b="1">
+                          <a:solidFill>
+                            <a:srgbClr val="E88D3F"/>
+                          </a:solidFill>
+                          <a:latin typeface="Calibri"/>
+                        </a:defRPr>
+                      </a:pPr>
+                      <a:r>
+                        <a:t>108.68</a:t>
+                      </a:r>
+                    </a:p>
+                  </a:txBody>
+                  <a:tcPr>
+                    <a:solidFill>
+                      <a:srgbClr val="FFFFFF"/>
+                    </a:solidFill>
+                  </a:tcPr>
+                </a:tc>
+                <a:tc>
+                  <a:txBody>
+                    <a:bodyPr/>
+                    <a:lstStyle/>
+                    <a:p>
+                      <a:pPr algn="ctr">
+                        <a:defRPr sz="900" b="1">
+                          <a:solidFill>
+                            <a:srgbClr val="E88D3F"/>
+                          </a:solidFill>
+                          <a:latin typeface="Calibri"/>
+                        </a:defRPr>
+                      </a:pPr>
+                      <a:r>
+                        <a:t>108.68</a:t>
+                      </a:r>
+                    </a:p>
+                  </a:txBody>
+                  <a:tcPr>
+                    <a:solidFill>
+                      <a:srgbClr val="FFFFFF"/>
+                    </a:solidFill>
+                  </a:tcPr>
+                </a:tc>
+              </a:tr>
+            </a:tbl>
+          </a:graphicData>
+        </a:graphic>
+      </p:graphicFrame>
+      <p:sp>
+        <p:nvSpPr>
+          <p:cNvPr id="17" name="TextBox 16"/>
           <p:cNvSpPr txBox="1"/>
           <p:nvPr/>
         </p:nvSpPr>
         <p:spPr>
           <a:xfrm>
-            <a:off x="2286000" y="4389120"/>
-            <a:ext cx="5943600" cy="457200"/>
+            <a:off x="457200" y="4846320"/>
+            <a:ext cx="8229600" cy="548640"/>
           </a:xfrm>
           <a:prstGeom prst="rect">
             <a:avLst/>
@@ -14983,42 +16337,6 @@
           </a:bodyPr>
           <a:lstStyle/>
           <a:p>
-            <a:pPr algn="ctr">
-              <a:defRPr sz="1000" b="0">
-                <a:solidFill>
-                  <a:srgbClr val="555570"/>
-                </a:solidFill>
-                <a:latin typeface="Calibri"/>
-              </a:defRPr>
-            </a:pPr>
-            <a:r>
-              <a:t>4.25    4.25    4.25      0       0      4.25    4.25    4.25    4.25   108.33</a:t>
-            </a:r>
-          </a:p>
-        </p:txBody>
-      </p:sp>
-      <p:sp>
-        <p:nvSpPr>
-          <p:cNvPr id="17" name="TextBox 16"/>
-          <p:cNvSpPr txBox="1"/>
-          <p:nvPr/>
-        </p:nvSpPr>
-        <p:spPr>
-          <a:xfrm>
-            <a:off x="2286000" y="4663440"/>
-            <a:ext cx="5943600" cy="274320"/>
-          </a:xfrm>
-          <a:prstGeom prst="rect">
-            <a:avLst/>
-          </a:prstGeom>
-          <a:noFill/>
-        </p:spPr>
-        <p:txBody>
-          <a:bodyPr wrap="square">
-            <a:spAutoFit/>
-          </a:bodyPr>
-          <a:lstStyle/>
-          <a:p>
             <a:pPr algn="l">
               <a:defRPr sz="1200" b="0">
                 <a:solidFill>
@@ -15028,7 +16346,7 @@
               </a:defRPr>
             </a:pPr>
             <a:r>
-              <a:t>Borrower chooses cash or PIK each period. Typically PIKs when credit deteriorates.</a:t>
+              <a:t>PIK periods (5–6): notional compounds 100 → 104.25 → 108.68.  When cash resumes (period 7+), coupons are 4.62 not 4.25 — computed on the inflated notional.  At maturity the investor receives 108.68 + 4.62 = 113.30.</a:t>
             </a:r>
           </a:p>
         </p:txBody>
@@ -15041,8 +16359,8 @@
         </p:nvSpPr>
         <p:spPr>
           <a:xfrm>
-            <a:off x="1371600" y="5486400"/>
-            <a:ext cx="6400800" cy="548640"/>
+            <a:off x="914400" y="5486400"/>
+            <a:ext cx="7315200" cy="640080"/>
           </a:xfrm>
           <a:prstGeom prst="roundRect">
             <a:avLst/>
@@ -15081,7 +16399,7 @@
               </a:defRPr>
             </a:pPr>
             <a:r>
-              <a:t>Key: PIK concentrates all value at the longest maturity with a larger notional.</a:t>
+              <a:t>PIK periods permanently ratchet the notional upward. Later cash coupons are larger, but so is the principal at risk in default — feeding the leverage spiral.</a:t>
             </a:r>
           </a:p>
         </p:txBody>
@@ -15542,7 +16860,7 @@
                         </a:defRPr>
                       </a:pPr>
                       <a:r>
-                        <a:t>150bp (BB+)</a:t>
+                        <a:t>143bp (BB+)</a:t>
                       </a:r>
                     </a:p>
                   </a:txBody>
@@ -15566,7 +16884,7 @@
                         </a:defRPr>
                       </a:pPr>
                       <a:r>
-                        <a:t>98.5%</a:t>
+                        <a:t>98.6%</a:t>
                       </a:r>
                     </a:p>
                   </a:txBody>
@@ -15590,7 +16908,7 @@
                         </a:defRPr>
                       </a:pPr>
                       <a:r>
-                        <a:t>95.6%</a:t>
+                        <a:t>95.8%</a:t>
                       </a:r>
                     </a:p>
                   </a:txBody>
@@ -15614,7 +16932,7 @@
                         </a:defRPr>
                       </a:pPr>
                       <a:r>
-                        <a:t>92.8%</a:t>
+                        <a:t>93.1%</a:t>
                       </a:r>
                     </a:p>
                   </a:txBody>
@@ -15638,7 +16956,7 @@
                         </a:defRPr>
                       </a:pPr>
                       <a:r>
-                        <a:t>90.0%</a:t>
+                        <a:t>90.5%</a:t>
                       </a:r>
                     </a:p>
                   </a:txBody>
@@ -15664,7 +16982,7 @@
                         </a:defRPr>
                       </a:pPr>
                       <a:r>
-                        <a:t>600bp (B)</a:t>
+                        <a:t>591bp (B)</a:t>
                       </a:r>
                     </a:p>
                   </a:txBody>
@@ -15688,7 +17006,7 @@
                         </a:defRPr>
                       </a:pPr>
                       <a:r>
-                        <a:t>94.2%</a:t>
+                        <a:t>94.3%</a:t>
                       </a:r>
                     </a:p>
                   </a:txBody>
@@ -15712,7 +17030,7 @@
                         </a:defRPr>
                       </a:pPr>
                       <a:r>
-                        <a:t>83.5%</a:t>
+                        <a:t>83.8%</a:t>
                       </a:r>
                     </a:p>
                   </a:txBody>
@@ -15736,7 +17054,7 @@
                         </a:defRPr>
                       </a:pPr>
                       <a:r>
-                        <a:t>74.1%</a:t>
+                        <a:t>74.4%</a:t>
                       </a:r>
                     </a:p>
                   </a:txBody>
@@ -15760,7 +17078,7 @@
                         </a:defRPr>
                       </a:pPr>
                       <a:r>
-                        <a:t>65.7%</a:t>
+                        <a:t>66.2%</a:t>
                       </a:r>
                     </a:p>
                   </a:txBody>
@@ -15786,7 +17104,7 @@
                         </a:defRPr>
                       </a:pPr>
                       <a:r>
-                        <a:t>1400bp (CCC)</a:t>
+                        <a:t>1468bp (CCC)</a:t>
                       </a:r>
                     </a:p>
                   </a:txBody>
@@ -15810,7 +17128,7 @@
                         </a:defRPr>
                       </a:pPr>
                       <a:r>
-                        <a:t>86.9%</a:t>
+                        <a:t>86.4%</a:t>
                       </a:r>
                     </a:p>
                   </a:txBody>
@@ -15834,7 +17152,7 @@
                         </a:defRPr>
                       </a:pPr>
                       <a:r>
-                        <a:t>65.7%</a:t>
+                        <a:t>64.5%</a:t>
                       </a:r>
                     </a:p>
                   </a:txBody>
@@ -15858,7 +17176,7 @@
                         </a:defRPr>
                       </a:pPr>
                       <a:r>
-                        <a:t>49.7%</a:t>
+                        <a:t>48.2%</a:t>
                       </a:r>
                     </a:p>
                   </a:txBody>
@@ -15882,7 +17200,7 @@
                         </a:defRPr>
                       </a:pPr>
                       <a:r>
-                        <a:t>37.5%</a:t>
+                        <a:t>36.0%</a:t>
                       </a:r>
                     </a:p>
                   </a:txBody>
@@ -15945,12 +17263,12 @@
               </a:defRPr>
             </a:pPr>
             <a:r>
-              <a:t>A CCC issuer at λ=1400bp has only a 50% chance of surviving to year 5.</a:t>
+              <a:t>A CCC issuer at λ=1468bp has only a 48% chance of surviving to year 5.</a:t>
             </a:r>
             <a:br/>
             <a:br/>
             <a:r>
-              <a:t>Every cashflow scheduled beyond that point has ≤50% probability of being received.</a:t>
+              <a:t>Every cashflow scheduled beyond that point has ≤48% probability of being received.</a:t>
             </a:r>
           </a:p>
         </p:txBody>
@@ -15986,7 +17304,7 @@
               </a:defRPr>
             </a:pPr>
             <a:r>
-              <a:t>The hazard rate is a single number that captures the market's view of default risk. Higher λ → faster decay of survival → lower present value of future cashflows.</a:t>
+              <a:t>The hazard rate is calibrated from the issuer's observed market spread. Higher λ → faster survival decay → lower present value of future cashflows.</a:t>
             </a:r>
           </a:p>
         </p:txBody>
@@ -16222,8 +17540,8 @@
         </p:nvSpPr>
         <p:spPr>
           <a:xfrm>
-            <a:off x="914400" y="1645920"/>
-            <a:ext cx="7315200" cy="274320"/>
+            <a:off x="457200" y="1645920"/>
+            <a:ext cx="8229600" cy="274320"/>
           </a:xfrm>
           <a:prstGeom prst="rect">
             <a:avLst/>
@@ -16316,7 +17634,7 @@
               </a:defRPr>
             </a:pPr>
             <a:r>
-              <a:t>The recovery leg adds back value for the scenario where default occurs: R × par × default_prob(t₁, t₂) × D(t)</a:t>
+              <a:t>The recovery leg adds value for the default scenario: R × par × default_prob(t₁, t₂) × D(t)</a:t>
             </a:r>
           </a:p>
         </p:txBody>
@@ -16800,7 +18118,7 @@
               </a:defRPr>
             </a:pPr>
             <a:r>
-              <a:t>Timing and notional effects only — no feedback</a:t>
+              <a:t>What the simple model predicts — but is it right?</a:t>
             </a:r>
           </a:p>
         </p:txBody>
@@ -17027,7 +18345,7 @@
                         </a:defRPr>
                       </a:pPr>
                       <a:r>
-                        <a:t>150</a:t>
+                        <a:t>143</a:t>
                       </a:r>
                     </a:p>
                   </a:txBody>
@@ -17051,7 +18369,7 @@
                         </a:defRPr>
                       </a:pPr>
                       <a:r>
-                        <a:t>113.13</a:t>
+                        <a:t>113.35</a:t>
                       </a:r>
                     </a:p>
                   </a:txBody>
@@ -17075,7 +18393,7 @@
                         </a:defRPr>
                       </a:pPr>
                       <a:r>
-                        <a:t>115.94</a:t>
+                        <a:t>110.89</a:t>
                       </a:r>
                     </a:p>
                   </a:txBody>
@@ -17099,7 +18417,7 @@
                         </a:defRPr>
                       </a:pPr>
                       <a:r>
-                        <a:t>+2.80</a:t>
+                        <a:t>−2.46</a:t>
                       </a:r>
                     </a:p>
                   </a:txBody>
@@ -17125,7 +18443,7 @@
                         </a:defRPr>
                       </a:pPr>
                       <a:r>
-                        <a:t>BB- (Mid HY)</a:t>
+                        <a:t>BB− (Mid HY)</a:t>
                       </a:r>
                     </a:p>
                   </a:txBody>
@@ -17149,7 +18467,7 @@
                         </a:defRPr>
                       </a:pPr>
                       <a:r>
-                        <a:t>350</a:t>
+                        <a:t>334</a:t>
                       </a:r>
                     </a:p>
                   </a:txBody>
@@ -17173,7 +18491,7 @@
                         </a:defRPr>
                       </a:pPr>
                       <a:r>
-                        <a:t>107.07</a:t>
+                        <a:t>107.56</a:t>
                       </a:r>
                     </a:p>
                   </a:txBody>
@@ -17197,7 +18515,7 @@
                         </a:defRPr>
                       </a:pPr>
                       <a:r>
-                        <a:t>108.76</a:t>
+                        <a:t>103.76</a:t>
                       </a:r>
                     </a:p>
                   </a:txBody>
@@ -17221,7 +18539,7 @@
                         </a:defRPr>
                       </a:pPr>
                       <a:r>
-                        <a:t>+1.69</a:t>
+                        <a:t>−3.80</a:t>
                       </a:r>
                     </a:p>
                   </a:txBody>
@@ -17271,7 +18589,7 @@
                         </a:defRPr>
                       </a:pPr>
                       <a:r>
-                        <a:t>600</a:t>
+                        <a:t>591</a:t>
                       </a:r>
                     </a:p>
                   </a:txBody>
@@ -17295,7 +18613,7 @@
                         </a:defRPr>
                       </a:pPr>
                       <a:r>
-                        <a:t>99.44</a:t>
+                        <a:t>99.76</a:t>
                       </a:r>
                     </a:p>
                   </a:txBody>
@@ -17319,7 +18637,7 @@
                         </a:defRPr>
                       </a:pPr>
                       <a:r>
-                        <a:t>99.74</a:t>
+                        <a:t>94.44</a:t>
                       </a:r>
                     </a:p>
                   </a:txBody>
@@ -17343,7 +18661,7 @@
                         </a:defRPr>
                       </a:pPr>
                       <a:r>
-                        <a:t>+0.30</a:t>
+                        <a:t>−5.32</a:t>
                       </a:r>
                     </a:p>
                   </a:txBody>
@@ -17369,7 +18687,7 @@
                         </a:defRPr>
                       </a:pPr>
                       <a:r>
-                        <a:t>B- (Stressed)</a:t>
+                        <a:t>B− (Stressed)</a:t>
                       </a:r>
                     </a:p>
                   </a:txBody>
@@ -17393,7 +18711,7 @@
                         </a:defRPr>
                       </a:pPr>
                       <a:r>
-                        <a:t>900</a:t>
+                        <a:t>911</a:t>
                       </a:r>
                     </a:p>
                   </a:txBody>
@@ -17417,7 +18735,7 @@
                         </a:defRPr>
                       </a:pPr>
                       <a:r>
-                        <a:t>90.50</a:t>
+                        <a:t>90.33</a:t>
                       </a:r>
                     </a:p>
                   </a:txBody>
@@ -17441,7 +18759,7 @@
                         </a:defRPr>
                       </a:pPr>
                       <a:r>
-                        <a:t>89.21</a:t>
+                        <a:t>83.45</a:t>
                       </a:r>
                     </a:p>
                   </a:txBody>
@@ -17465,7 +18783,7 @@
                         </a:defRPr>
                       </a:pPr>
                       <a:r>
-                        <a:t>−1.29</a:t>
+                        <a:t>−6.88</a:t>
                       </a:r>
                     </a:p>
                   </a:txBody>
@@ -17515,7 +18833,7 @@
                         </a:defRPr>
                       </a:pPr>
                       <a:r>
-                        <a:t>1400</a:t>
+                        <a:t>1468</a:t>
                       </a:r>
                     </a:p>
                   </a:txBody>
@@ -17539,7 +18857,7 @@
                         </a:defRPr>
                       </a:pPr>
                       <a:r>
-                        <a:t>77.41</a:t>
+                        <a:t>76.13</a:t>
                       </a:r>
                     </a:p>
                   </a:txBody>
@@ -17563,7 +18881,7 @@
                         </a:defRPr>
                       </a:pPr>
                       <a:r>
-                        <a:t>73.97</a:t>
+                        <a:t>67.34</a:t>
                       </a:r>
                     </a:p>
                   </a:txBody>
@@ -17587,7 +18905,7 @@
                         </a:defRPr>
                       </a:pPr>
                       <a:r>
-                        <a:t>−3.43</a:t>
+                        <a:t>−8.79</a:t>
                       </a:r>
                     </a:p>
                   </a:txBody>
@@ -17636,7 +18954,7 @@
               </a:defRPr>
             </a:pPr>
             <a:r>
-              <a:t>At low hazard rates (BB+): PIK trades above cash — compounding offsets the survival penalty</a:t>
+              <a:t>Under fixed hazard rates, the model predicts PIK always trades below cash — concentrated maturity exposure penalises PIK at every credit level</a:t>
             </a:r>
           </a:p>
           <a:p>
@@ -17652,7 +18970,7 @@
               </a:defRPr>
             </a:pPr>
             <a:r>
-              <a:t>Crossover near B: the survival penalty starts to dominate the compounding benefit</a:t>
+              <a:t>The predicted gap widens with credit risk: from −2.5 pts (BB+) to −8.8 pts (CCC)</a:t>
             </a:r>
           </a:p>
           <a:p>
@@ -17668,57 +18986,21 @@
               </a:defRPr>
             </a:pPr>
             <a:r>
-              <a:t>At high hazard rates (CCC): PIK trades 3.4 pts below cash — concentrated maturity exposure hurts</a:t>
-            </a:r>
-          </a:p>
-        </p:txBody>
-      </p:sp>
-      <p:sp>
-        <p:nvSpPr>
-          <p:cNvPr id="8" name="TextBox 7"/>
-          <p:cNvSpPr txBox="1"/>
-          <p:nvPr/>
-        </p:nvSpPr>
-        <p:spPr>
-          <a:xfrm>
-            <a:off x="457200" y="5303520"/>
-            <a:ext cx="8229600" cy="457200"/>
-          </a:xfrm>
-          <a:prstGeom prst="rect">
-            <a:avLst/>
-          </a:prstGeom>
-          <a:noFill/>
-        </p:spPr>
-        <p:txBody>
-          <a:bodyPr wrap="square">
-            <a:spAutoFit/>
-          </a:bodyPr>
-          <a:lstStyle/>
-          <a:p>
-            <a:pPr algn="l">
-              <a:defRPr sz="1200" b="0">
-                <a:solidFill>
-                  <a:srgbClr val="555570"/>
-                </a:solidFill>
-                <a:latin typeface="Calibri"/>
-              </a:defRPr>
-            </a:pPr>
-            <a:r>
-              <a:t>Δ Price = PIK price minus Cash price. Negative means PIK is cheaper (investor demands more spread).</a:t>
-            </a:r>
-          </a:p>
-        </p:txBody>
-      </p:sp>
-      <p:sp>
-        <p:nvSpPr>
-          <p:cNvPr id="9" name="Rounded Rectangle 8"/>
+              <a:t>But this conclusion turns out to be WRONG for strong credits. A structural model (next section) shows PIK actually trades ABOVE cash for BB+ and BB− issuers</a:t>
+            </a:r>
+          </a:p>
+        </p:txBody>
+      </p:sp>
+      <p:sp>
+        <p:nvSpPr>
+          <p:cNvPr id="8" name="Rounded Rectangle 7"/>
           <p:cNvSpPr/>
           <p:nvPr/>
         </p:nvSpPr>
         <p:spPr>
           <a:xfrm>
-            <a:off x="1371600" y="5760720"/>
-            <a:ext cx="6400800" cy="457200"/>
+            <a:off x="1371600" y="5486400"/>
+            <a:ext cx="6400800" cy="640080"/>
           </a:xfrm>
           <a:prstGeom prst="roundRect">
             <a:avLst/>
@@ -17757,7 +19039,7 @@
               </a:defRPr>
             </a:pPr>
             <a:r>
-              <a:t>This model captures timing + notional effects. But it treats λ as fixed — it doesn't know PIK makes the firm riskier.</a:t>
+              <a:t>This is the simple model’s answer — not the final answer. The structural model will reverse the sign for strong credits, where rare defaults make PIK compounding a net benefit.</a:t>
             </a:r>
           </a:p>
         </p:txBody>
@@ -17908,7 +19190,7 @@
               </a:defRPr>
             </a:pPr>
             <a:r>
-              <a:t>The gap between hazard-rate and structural pricing</a:t>
+              <a:t>Hazard-rate vs structural: the price gap</a:t>
             </a:r>
           </a:p>
         </p:txBody>
@@ -18012,7 +19294,7 @@
                         </a:defRPr>
                       </a:pPr>
                       <a:r>
-                        <a:t>HR Δ Price</a:t>
+                        <a:t>HR ΔPrice</a:t>
                       </a:r>
                     </a:p>
                   </a:txBody>
@@ -18036,7 +19318,7 @@
                         </a:defRPr>
                       </a:pPr>
                       <a:r>
-                        <a:t>MC Δ Price</a:t>
+                        <a:t>MC ΔPrice</a:t>
                       </a:r>
                     </a:p>
                   </a:txBody>
@@ -18110,7 +19392,7 @@
                         </a:defRPr>
                       </a:pPr>
                       <a:r>
-                        <a:t>+2.80</a:t>
+                        <a:t>−2.46</a:t>
                       </a:r>
                     </a:p>
                   </a:txBody>
@@ -18134,7 +19416,7 @@
                         </a:defRPr>
                       </a:pPr>
                       <a:r>
-                        <a:t>+0.29</a:t>
+                        <a:t>+2.98</a:t>
                       </a:r>
                     </a:p>
                   </a:txBody>
@@ -18158,7 +19440,7 @@
                         </a:defRPr>
                       </a:pPr>
                       <a:r>
-                        <a:t>2.5 pts</a:t>
+                        <a:t>5.4 pts</a:t>
                       </a:r>
                     </a:p>
                   </a:txBody>
@@ -18184,7 +19466,7 @@
                         </a:defRPr>
                       </a:pPr>
                       <a:r>
-                        <a:t>BB- (Mid HY)</a:t>
+                        <a:t>BB− (Mid HY)</a:t>
                       </a:r>
                     </a:p>
                   </a:txBody>
@@ -18208,7 +19490,7 @@
                         </a:defRPr>
                       </a:pPr>
                       <a:r>
-                        <a:t>+1.69</a:t>
+                        <a:t>−3.80</a:t>
                       </a:r>
                     </a:p>
                   </a:txBody>
@@ -18232,7 +19514,7 @@
                         </a:defRPr>
                       </a:pPr>
                       <a:r>
-                        <a:t>+0.00</a:t>
+                        <a:t>+1.05</a:t>
                       </a:r>
                     </a:p>
                   </a:txBody>
@@ -18256,7 +19538,7 @@
                         </a:defRPr>
                       </a:pPr>
                       <a:r>
-                        <a:t>1.7 pts</a:t>
+                        <a:t>4.9 pts</a:t>
                       </a:r>
                     </a:p>
                   </a:txBody>
@@ -18306,7 +19588,7 @@
                         </a:defRPr>
                       </a:pPr>
                       <a:r>
-                        <a:t>+0.30</a:t>
+                        <a:t>−5.32</a:t>
                       </a:r>
                     </a:p>
                   </a:txBody>
@@ -18330,7 +19612,7 @@
                         </a:defRPr>
                       </a:pPr>
                       <a:r>
-                        <a:t>−2.60</a:t>
+                        <a:t>−1.61</a:t>
                       </a:r>
                     </a:p>
                   </a:txBody>
@@ -18354,7 +19636,7 @@
                         </a:defRPr>
                       </a:pPr>
                       <a:r>
-                        <a:t>2.9 pts</a:t>
+                        <a:t>3.7 pts</a:t>
                       </a:r>
                     </a:p>
                   </a:txBody>
@@ -18380,7 +19662,7 @@
                         </a:defRPr>
                       </a:pPr>
                       <a:r>
-                        <a:t>B- (Stressed)</a:t>
+                        <a:t>B− (Stressed)</a:t>
                       </a:r>
                     </a:p>
                   </a:txBody>
@@ -18404,7 +19686,7 @@
                         </a:defRPr>
                       </a:pPr>
                       <a:r>
-                        <a:t>−1.29</a:t>
+                        <a:t>−6.88</a:t>
                       </a:r>
                     </a:p>
                   </a:txBody>
@@ -18428,7 +19710,7 @@
                         </a:defRPr>
                       </a:pPr>
                       <a:r>
-                        <a:t>−7.08</a:t>
+                        <a:t>−4.89</a:t>
                       </a:r>
                     </a:p>
                   </a:txBody>
@@ -18452,7 +19734,7 @@
                         </a:defRPr>
                       </a:pPr>
                       <a:r>
-                        <a:t>5.8 pts</a:t>
+                        <a:t>2.0 pts</a:t>
                       </a:r>
                     </a:p>
                   </a:txBody>
@@ -18502,7 +19784,7 @@
                         </a:defRPr>
                       </a:pPr>
                       <a:r>
-                        <a:t>−3.43</a:t>
+                        <a:t>−8.79</a:t>
                       </a:r>
                     </a:p>
                   </a:txBody>
@@ -18526,7 +19808,7 @@
                         </a:defRPr>
                       </a:pPr>
                       <a:r>
-                        <a:t>−12.32</a:t>
+                        <a:t>−6.17</a:t>
                       </a:r>
                     </a:p>
                   </a:txBody>
@@ -18550,7 +19832,7 @@
                         </a:defRPr>
                       </a:pPr>
                       <a:r>
-                        <a:t>8.9 pts</a:t>
+                        <a:t>2.6 pts</a:t>
                       </a:r>
                     </a:p>
                   </a:txBody>
@@ -18598,6 +19880,10 @@
             <a:r>
               <a:t>HR = hazard rate model (fixed λ).  MC = Merton Monte Carlo (structural model with feedback).</a:t>
             </a:r>
+            <a:br/>
+            <a:r>
+              <a:t>ΔPrice = PIK price minus Cash price.</a:t>
+            </a:r>
           </a:p>
         </p:txBody>
       </p:sp>
@@ -18609,7 +19895,7 @@
         </p:nvSpPr>
         <p:spPr>
           <a:xfrm>
-            <a:off x="457200" y="3840480"/>
+            <a:off x="457200" y="3931920"/>
             <a:ext cx="8229600" cy="1371600"/>
           </a:xfrm>
           <a:prstGeom prst="rect">
@@ -18635,7 +19921,7 @@
               </a:defRPr>
             </a:pPr>
             <a:r>
-              <a:t>For CCC credits: the simple model says PIK is 3.4 pts cheaper. The full model says 12.3 pts cheaper.</a:t>
+              <a:t>For BB+: the HR model says PIK trades 2.5 pts cheaper. The MC model says PIK trades 3 pts ABOVE cash. Sign reversal!</a:t>
             </a:r>
           </a:p>
           <a:p>
@@ -18651,7 +19937,7 @@
               </a:defRPr>
             </a:pPr>
             <a:r>
-              <a:t>The 8.9 point gap is the feedback loop — PIK accrual makes the firm riskier, which the flat hazard rate ignores.</a:t>
+              <a:t>For strong credits, defaults are rare enough that PIK compounding is a net benefit — a fact that the simple model entirely misses</a:t>
             </a:r>
           </a:p>
           <a:p>
@@ -18667,7 +19953,7 @@
               </a:defRPr>
             </a:pPr>
             <a:r>
-              <a:t>The gap grows dramatically with credit risk. For BB+ it barely matters; for CCC it is the dominant effect.</a:t>
+              <a:t>For weak credits, both models agree PIK is cheaper, but the MC model captures the structural feedback that amplifies the penalty</a:t>
             </a:r>
           </a:p>
         </p:txBody>
@@ -18720,7 +20006,7 @@
               </a:defRPr>
             </a:pPr>
             <a:r>
-              <a:t>To price PIK accurately for stressed credits, we need a model where the hazard rate responds to the growing PIK notional.</a:t>
+              <a:t>A flat hazard-rate model gets the SIGN wrong for investment-grade PIK, and understates the dynamics for stressed credits.</a:t>
             </a:r>
           </a:p>
         </p:txBody>
@@ -18978,7 +20264,7 @@
               </a:defRPr>
             </a:pPr>
             <a:r>
-              <a:t>The distance-to-default (DD) measures how far assets are from the barrier</a:t>
+              <a:t>The barrier is calibrated from historical default probabilities</a:t>
             </a:r>
           </a:p>
           <a:p>
@@ -18994,7 +20280,7 @@
               </a:defRPr>
             </a:pPr>
             <a:r>
-              <a:t>Higher asset volatility → more chance of hitting the barrier → higher default probability</a:t>
+              <a:t>Higher asset vol → more chance of hitting the barrier → higher default probability</a:t>
             </a:r>
           </a:p>
         </p:txBody>
@@ -19289,7 +20575,7 @@
                         </a:defRPr>
                       </a:pPr>
                       <a:r>
-                        <a:t>Coverage (V/B)</a:t>
+                        <a:t>Annual PD</a:t>
                       </a:r>
                     </a:p>
                   </a:txBody>
@@ -19313,7 +20599,7 @@
                         </a:defRPr>
                       </a:pPr>
                       <a:r>
-                        <a:t>Asset cushion above default</a:t>
+                        <a:t>Calibrates barrier</a:t>
                       </a:r>
                     </a:p>
                   </a:txBody>
@@ -19374,7 +20660,7 @@
         </p:nvGraphicFramePr>
         <p:xfrm>
           <a:off x="457200" y="3931920"/>
-          <a:ext cx="7315200" cy="1920239"/>
+          <a:ext cx="7772400" cy="1920239"/>
         </p:xfrm>
         <a:graphic>
           <a:graphicData uri="http://schemas.openxmlformats.org/drawingml/2006/table">
@@ -19383,12 +20669,13 @@
                 <a:tableStyleId>{5C22544A-7EE6-4342-B048-85BDC9FD1C3A}</a:tableStyleId>
               </a:tblPr>
               <a:tblGrid>
-                <a:gridCol w="1219200"/>
-                <a:gridCol w="1219200"/>
-                <a:gridCol w="1219200"/>
-                <a:gridCol w="1219200"/>
-                <a:gridCol w="1219200"/>
-                <a:gridCol w="1219200"/>
+                <a:gridCol w="1110342"/>
+                <a:gridCol w="1110342"/>
+                <a:gridCol w="1110342"/>
+                <a:gridCol w="1110342"/>
+                <a:gridCol w="1110342"/>
+                <a:gridCol w="1110342"/>
+                <a:gridCol w="1110348"/>
               </a:tblGrid>
               <a:tr h="320039">
                 <a:tc>
@@ -19477,7 +20764,7 @@
                         </a:defRPr>
                       </a:pPr>
                       <a:r>
-                        <a:t>Coverage</a:t>
+                        <a:t>Barrier</a:t>
                       </a:r>
                     </a:p>
                   </a:txBody>
@@ -19501,7 +20788,7 @@
                         </a:defRPr>
                       </a:pPr>
                       <a:r>
-                        <a:t>DD</a:t>
+                        <a:t>Ann PD</a:t>
                       </a:r>
                     </a:p>
                   </a:txBody>
@@ -19525,6 +20812,30 @@
                         </a:defRPr>
                       </a:pPr>
                       <a:r>
+                        <a:t>DD</a:t>
+                      </a:r>
+                    </a:p>
+                  </a:txBody>
+                  <a:tcPr>
+                    <a:solidFill>
+                      <a:srgbClr val="2C3E6B"/>
+                    </a:solidFill>
+                  </a:tcPr>
+                </a:tc>
+                <a:tc>
+                  <a:txBody>
+                    <a:bodyPr/>
+                    <a:lstStyle/>
+                    <a:p>
+                      <a:pPr algn="ctr">
+                        <a:defRPr sz="1100" b="1">
+                          <a:solidFill>
+                            <a:srgbClr val="FFFFFF"/>
+                          </a:solidFill>
+                          <a:latin typeface="Calibri"/>
+                        </a:defRPr>
+                      </a:pPr>
+                      <a:r>
                         <a:t>PD(5Y)</a:t>
                       </a:r>
                     </a:p>
@@ -19623,7 +20934,7 @@
                         </a:defRPr>
                       </a:pPr>
                       <a:r>
-                        <a:t>2.00x</a:t>
+                        <a:t>80.0</a:t>
                       </a:r>
                     </a:p>
                   </a:txBody>
@@ -19647,7 +20958,7 @@
                         </a:defRPr>
                       </a:pPr>
                       <a:r>
-                        <a:t>1.83</a:t>
+                        <a:t>0.20%</a:t>
                       </a:r>
                     </a:p>
                   </a:txBody>
@@ -19671,7 +20982,31 @@
                         </a:defRPr>
                       </a:pPr>
                       <a:r>
-                        <a:t>3.4%</a:t>
+                        <a:t>2.33</a:t>
+                      </a:r>
+                    </a:p>
+                  </a:txBody>
+                  <a:tcPr>
+                    <a:solidFill>
+                      <a:srgbClr val="FFFFFF"/>
+                    </a:solidFill>
+                  </a:tcPr>
+                </a:tc>
+                <a:tc>
+                  <a:txBody>
+                    <a:bodyPr/>
+                    <a:lstStyle/>
+                    <a:p>
+                      <a:pPr algn="r">
+                        <a:defRPr sz="1100">
+                          <a:solidFill>
+                            <a:srgbClr val="2D2D3D"/>
+                          </a:solidFill>
+                          <a:latin typeface="Calibri"/>
+                        </a:defRPr>
+                      </a:pPr>
+                      <a:r>
+                        <a:t>1.0%</a:t>
                       </a:r>
                     </a:p>
                   </a:txBody>
@@ -19697,7 +21032,7 @@
                         </a:defRPr>
                       </a:pPr>
                       <a:r>
-                        <a:t>BB- (Mid HY)</a:t>
+                        <a:t>BB− (Mid HY)</a:t>
                       </a:r>
                     </a:p>
                   </a:txBody>
@@ -19769,7 +21104,7 @@
                         </a:defRPr>
                       </a:pPr>
                       <a:r>
-                        <a:t>1.65x</a:t>
+                        <a:t>70.0</a:t>
                       </a:r>
                     </a:p>
                   </a:txBody>
@@ -19793,7 +21128,7 @@
                         </a:defRPr>
                       </a:pPr>
                       <a:r>
-                        <a:t>1.02</a:t>
+                        <a:t>1.00%</a:t>
                       </a:r>
                     </a:p>
                   </a:txBody>
@@ -19817,7 +21152,31 @@
                         </a:defRPr>
                       </a:pPr>
                       <a:r>
-                        <a:t>15.4%</a:t>
+                        <a:t>1.66</a:t>
+                      </a:r>
+                    </a:p>
+                  </a:txBody>
+                  <a:tcPr>
+                    <a:solidFill>
+                      <a:srgbClr val="E8EBF5"/>
+                    </a:solidFill>
+                  </a:tcPr>
+                </a:tc>
+                <a:tc>
+                  <a:txBody>
+                    <a:bodyPr/>
+                    <a:lstStyle/>
+                    <a:p>
+                      <a:pPr algn="r">
+                        <a:defRPr sz="1100">
+                          <a:solidFill>
+                            <a:srgbClr val="2D2D3D"/>
+                          </a:solidFill>
+                          <a:latin typeface="Calibri"/>
+                        </a:defRPr>
+                      </a:pPr>
+                      <a:r>
+                        <a:t>4.9%</a:t>
                       </a:r>
                     </a:p>
                   </a:txBody>
@@ -19915,7 +21274,7 @@
                         </a:defRPr>
                       </a:pPr>
                       <a:r>
-                        <a:t>1.40x</a:t>
+                        <a:t>63.1</a:t>
                       </a:r>
                     </a:p>
                   </a:txBody>
@@ -19939,7 +21298,7 @@
                         </a:defRPr>
                       </a:pPr>
                       <a:r>
-                        <a:t>0.50</a:t>
+                        <a:t>2.50%</a:t>
                       </a:r>
                     </a:p>
                   </a:txBody>
@@ -19963,7 +21322,31 @@
                         </a:defRPr>
                       </a:pPr>
                       <a:r>
-                        <a:t>30.9%</a:t>
+                        <a:t>1.19</a:t>
+                      </a:r>
+                    </a:p>
+                  </a:txBody>
+                  <a:tcPr>
+                    <a:solidFill>
+                      <a:srgbClr val="FFFFFF"/>
+                    </a:solidFill>
+                  </a:tcPr>
+                </a:tc>
+                <a:tc>
+                  <a:txBody>
+                    <a:bodyPr/>
+                    <a:lstStyle/>
+                    <a:p>
+                      <a:pPr algn="r">
+                        <a:defRPr sz="1100">
+                          <a:solidFill>
+                            <a:srgbClr val="2D2D3D"/>
+                          </a:solidFill>
+                          <a:latin typeface="Calibri"/>
+                        </a:defRPr>
+                      </a:pPr>
+                      <a:r>
+                        <a:t>11.8%</a:t>
                       </a:r>
                     </a:p>
                   </a:txBody>
@@ -19989,7 +21372,7 @@
                         </a:defRPr>
                       </a:pPr>
                       <a:r>
-                        <a:t>B- (Stressed)</a:t>
+                        <a:t>B− (Stressed)</a:t>
                       </a:r>
                     </a:p>
                   </a:txBody>
@@ -20061,7 +21444,7 @@
                         </a:defRPr>
                       </a:pPr>
                       <a:r>
-                        <a:t>1.25x</a:t>
+                        <a:t>66.4</a:t>
                       </a:r>
                     </a:p>
                   </a:txBody>
@@ -20085,7 +21468,7 @@
                         </a:defRPr>
                       </a:pPr>
                       <a:r>
-                        <a:t>0.18</a:t>
+                        <a:t>5.50%</a:t>
                       </a:r>
                     </a:p>
                   </a:txBody>
@@ -20109,7 +21492,31 @@
                         </a:defRPr>
                       </a:pPr>
                       <a:r>
-                        <a:t>42.7%</a:t>
+                        <a:t>0.70</a:t>
+                      </a:r>
+                    </a:p>
+                  </a:txBody>
+                  <a:tcPr>
+                    <a:solidFill>
+                      <a:srgbClr val="E8EBF5"/>
+                    </a:solidFill>
+                  </a:tcPr>
+                </a:tc>
+                <a:tc>
+                  <a:txBody>
+                    <a:bodyPr/>
+                    <a:lstStyle/>
+                    <a:p>
+                      <a:pPr algn="r">
+                        <a:defRPr sz="1100">
+                          <a:solidFill>
+                            <a:srgbClr val="2D2D3D"/>
+                          </a:solidFill>
+                          <a:latin typeface="Calibri"/>
+                        </a:defRPr>
+                      </a:pPr>
+                      <a:r>
+                        <a:t>24.0%</a:t>
                       </a:r>
                     </a:p>
                   </a:txBody>
@@ -20207,7 +21614,7 @@
                         </a:defRPr>
                       </a:pPr>
                       <a:r>
-                        <a:t>1.15x</a:t>
+                        <a:t>75.8</a:t>
                       </a:r>
                     </a:p>
                   </a:txBody>
@@ -20231,7 +21638,7 @@
                         </a:defRPr>
                       </a:pPr>
                       <a:r>
-                        <a:t>−0.04</a:t>
+                        <a:t>10.00%</a:t>
                       </a:r>
                     </a:p>
                   </a:txBody>
@@ -20255,7 +21662,31 @@
                         </a:defRPr>
                       </a:pPr>
                       <a:r>
-                        <a:t>51.5%</a:t>
+                        <a:t>0.27</a:t>
+                      </a:r>
+                    </a:p>
+                  </a:txBody>
+                  <a:tcPr>
+                    <a:solidFill>
+                      <a:srgbClr val="FFFFFF"/>
+                    </a:solidFill>
+                  </a:tcPr>
+                </a:tc>
+                <a:tc>
+                  <a:txBody>
+                    <a:bodyPr/>
+                    <a:lstStyle/>
+                    <a:p>
+                      <a:pPr algn="r">
+                        <a:defRPr sz="1100">
+                          <a:solidFill>
+                            <a:srgbClr val="2D2D3D"/>
+                          </a:solidFill>
+                          <a:latin typeface="Calibri"/>
+                        </a:defRPr>
+                      </a:pPr>
+                      <a:r>
+                        <a:t>39.4%</a:t>
                       </a:r>
                     </a:p>
                   </a:txBody>
@@ -20301,7 +21732,7 @@
               </a:defRPr>
             </a:pPr>
             <a:r>
-              <a:t>Debt barrier = 100 for all issuers (matching bond notional). Coverage = asset value / barrier.</a:t>
+              <a:t>Barrier is calibrated via from_target_pd() to match each issuer’s historical annual default rate.</a:t>
             </a:r>
           </a:p>
         </p:txBody>
@@ -20764,7 +22195,7 @@
                         </a:defRPr>
                       </a:pPr>
                       <a:r>
-                        <a:t>0.60</a:t>
+                        <a:t>0.35</a:t>
                       </a:r>
                     </a:p>
                   </a:txBody>
@@ -20788,7 +22219,7 @@
                         </a:defRPr>
                       </a:pPr>
                       <a:r>
-                        <a:t>5.1%</a:t>
+                        <a:t>3.9%</a:t>
                       </a:r>
                     </a:p>
                   </a:txBody>
@@ -20812,7 +22243,7 @@
                         </a:defRPr>
                       </a:pPr>
                       <a:r>
-                        <a:t>−44%</a:t>
+                        <a:t>−57%</a:t>
                       </a:r>
                     </a:p>
                   </a:txBody>
@@ -20838,7 +22269,7 @@
                         </a:defRPr>
                       </a:pPr>
                       <a:r>
-                        <a:t>0.70</a:t>
+                        <a:t>0.40</a:t>
                       </a:r>
                     </a:p>
                   </a:txBody>
@@ -20862,7 +22293,7 @@
                         </a:defRPr>
                       </a:pPr>
                       <a:r>
-                        <a:t>6.9%</a:t>
+                        <a:t>5.2%</a:t>
                       </a:r>
                     </a:p>
                   </a:txBody>
@@ -20886,7 +22317,7 @@
                         </a:defRPr>
                       </a:pPr>
                       <a:r>
-                        <a:t>−23%</a:t>
+                        <a:t>−43%</a:t>
                       </a:r>
                     </a:p>
                   </a:txBody>
@@ -20912,7 +22343,7 @@
                         </a:defRPr>
                       </a:pPr>
                       <a:r>
-                        <a:t>0.80 (base)</a:t>
+                        <a:t>0.53 (base)</a:t>
                       </a:r>
                     </a:p>
                   </a:txBody>
@@ -20936,7 +22367,7 @@
                         </a:defRPr>
                       </a:pPr>
                       <a:r>
-                        <a:t>9.0%</a:t>
+                        <a:t>9.1%</a:t>
                       </a:r>
                     </a:p>
                   </a:txBody>
@@ -20986,7 +22417,7 @@
                         </a:defRPr>
                       </a:pPr>
                       <a:r>
-                        <a:t>0.90</a:t>
+                        <a:t>0.60</a:t>
                       </a:r>
                     </a:p>
                   </a:txBody>
@@ -21010,7 +22441,7 @@
                         </a:defRPr>
                       </a:pPr>
                       <a:r>
-                        <a:t>11.4%</a:t>
+                        <a:t>11.6%</a:t>
                       </a:r>
                     </a:p>
                   </a:txBody>
@@ -21034,7 +22465,7 @@
                         </a:defRPr>
                       </a:pPr>
                       <a:r>
-                        <a:t>+27%</a:t>
+                        <a:t>+28%</a:t>
                       </a:r>
                     </a:p>
                   </a:txBody>
@@ -21060,7 +22491,7 @@
                         </a:defRPr>
                       </a:pPr>
                       <a:r>
-                        <a:t>1.00</a:t>
+                        <a:t>0.70</a:t>
                       </a:r>
                     </a:p>
                   </a:txBody>
@@ -21084,7 +22515,7 @@
                         </a:defRPr>
                       </a:pPr>
                       <a:r>
-                        <a:t>14.1%</a:t>
+                        <a:t>15.8%</a:t>
                       </a:r>
                     </a:p>
                   </a:txBody>
@@ -21108,7 +22539,7 @@
                         </a:defRPr>
                       </a:pPr>
                       <a:r>
-                        <a:t>+56%</a:t>
+                        <a:t>+74%</a:t>
                       </a:r>
                     </a:p>
                   </a:txBody>
@@ -21134,7 +22565,7 @@
                         </a:defRPr>
                       </a:pPr>
                       <a:r>
-                        <a:t>1.10</a:t>
+                        <a:t>0.80</a:t>
                       </a:r>
                     </a:p>
                   </a:txBody>
@@ -21158,7 +22589,7 @@
                         </a:defRPr>
                       </a:pPr>
                       <a:r>
-                        <a:t>17.0%</a:t>
+                        <a:t>20.7%</a:t>
                       </a:r>
                     </a:p>
                   </a:txBody>
@@ -21182,7 +22613,7 @@
                         </a:defRPr>
                       </a:pPr>
                       <a:r>
-                        <a:t>+89%</a:t>
+                        <a:t>+127%</a:t>
                       </a:r>
                     </a:p>
                   </a:txBody>
@@ -21208,7 +22639,7 @@
                         </a:defRPr>
                       </a:pPr>
                       <a:r>
-                        <a:t>1.20</a:t>
+                        <a:t>0.90</a:t>
                       </a:r>
                     </a:p>
                   </a:txBody>
@@ -21232,7 +22663,7 @@
                         </a:defRPr>
                       </a:pPr>
                       <a:r>
-                        <a:t>20.3%</a:t>
+                        <a:t>26.2%</a:t>
                       </a:r>
                     </a:p>
                   </a:txBody>
@@ -21256,7 +22687,7 @@
                         </a:defRPr>
                       </a:pPr>
                       <a:r>
-                        <a:t>+125%</a:t>
+                        <a:t>+187%</a:t>
                       </a:r>
                     </a:p>
                   </a:txBody>
@@ -21302,7 +22733,7 @@
               </a:defRPr>
             </a:pPr>
             <a:r>
-              <a:t>Example: B- issuer (base leverage 0.80)</a:t>
+              <a:t>Example: B− issuer (barrier 66.4, assets 125)</a:t>
             </a:r>
           </a:p>
         </p:txBody>
@@ -21355,7 +22786,7 @@
               </a:defRPr>
             </a:pPr>
             <a:r>
-              <a:t>When PIK accrual pushes leverage from 0.80 to 1.20, the hazard rate more than doubles. This is the core mechanism that makes PIK dangerous for stressed credits.</a:t>
+              <a:t>When PIK accrual pushes leverage from 0.53 to 0.90, the hazard rate nearly triples. This is the core mechanism that makes PIK dangerous for stressed credits.</a:t>
             </a:r>
           </a:p>
         </p:txBody>

--- a/finstack-py/examples/scripts/valuations/instruments/pik_coupon_pricing.pptx
+++ b/finstack-py/examples/scripts/valuations/instruments/pik_coupon_pricing.pptx
@@ -6085,7 +6085,7 @@
               </a:defRPr>
             </a:pPr>
             <a:r>
-              <a:t>Breakeven Z-Spreads: The Answer</a:t>
+              <a:t>Structural Model: Breakeven Z-Spreads</a:t>
             </a:r>
           </a:p>
         </p:txBody>
@@ -6121,7 +6121,7 @@
               </a:defRPr>
             </a:pPr>
             <a:r>
-              <a:t>Cash-equivalent Z-spreads by structure and credit quality</a:t>
+              <a:t>MC results using historical PDs for barrier calibration</a:t>
             </a:r>
           </a:p>
         </p:txBody>
@@ -7099,7 +7099,7 @@
               </a:defRPr>
             </a:pPr>
             <a:r>
-              <a:t>Z-spreads are cash-equivalent: the Z-spread on a standard cash-pay bond that reproduces each structure’s MC price.</a:t>
+              <a:t>Z-spreads are cash-equivalent.  MC barriers calibrated from historical PDs (BB+ = 0.2%/yr → ~2% 5Y default rate).</a:t>
             </a:r>
           </a:p>
         </p:txBody>
@@ -7138,7 +7138,7 @@
               </a:defRPr>
             </a:pPr>
             <a:r>
-              <a:t>BB+ to BB−: PIK Z-spread is BELOW cash — compounding benefit exceeds survival penalty when defaults are rare. The simple model (slide 6) predicted PIK always trades below cash — the structural model reverses this for strong credits</a:t>
+              <a:t>BB+ to BB−: the MC model shows PIK Z-spread below cash. Under historical default rates (1–5% over 5Y), PIK compounding survives on ~98% of paths — but recall this uses lower PDs than market spreads imply (slide 7)</a:t>
             </a:r>
           </a:p>
           <a:p>
@@ -7154,7 +7154,7 @@
               </a:defRPr>
             </a:pPr>
             <a:r>
-              <a:t>Crossover near B: the feedback loop starts to overcome the compounding benefit (ΔZ = +37bp)</a:t>
+              <a:t>Crossover near B: the feedback loop starts to dominate (ΔZ = +37bp). Both models agree PIK costs from here</a:t>
             </a:r>
           </a:p>
           <a:p>
@@ -7170,7 +7170,7 @@
               </a:defRPr>
             </a:pPr>
             <a:r>
-              <a:t>B− to CCC: PIK premium of +141bp to +262bp. Here both models agree PIK is cheaper, but the structural model captures the self-reinforcing spiral that the simple model missed</a:t>
+              <a:t>B− to CCC: PIK premium of +141bp to +262bp. The leverage spiral is unambiguous — this result is robust across calibration assumptions</a:t>
             </a:r>
           </a:p>
         </p:txBody>
@@ -7183,8 +7183,8 @@
         </p:nvSpPr>
         <p:spPr>
           <a:xfrm>
-            <a:off x="1371600" y="5943600"/>
-            <a:ext cx="6400800" cy="457200"/>
+            <a:off x="914400" y="5943600"/>
+            <a:ext cx="7315200" cy="457200"/>
           </a:xfrm>
           <a:prstGeom prst="roundRect">
             <a:avLst/>
@@ -7223,7 +7223,7 @@
               </a:defRPr>
             </a:pPr>
             <a:r>
-              <a:t>The PIK premium crosses zero near 300bp market spread. Below that, PIK actually benefits investors.</a:t>
+              <a:t>For weak credits (B and below): PIK premium is large and robust. For strong credits: the sign depends on whether you calibrate to market or historical defaults.</a:t>
             </a:r>
           </a:p>
         </p:txBody>
@@ -9372,7 +9372,7 @@
               </a:defRPr>
             </a:pPr>
             <a:r>
-              <a:t>PIK BENEFITS INVESTOR</a:t>
+              <a:t>LOW IMPACT ZONE</a:t>
             </a:r>
           </a:p>
         </p:txBody>
@@ -9412,7 +9412,7 @@
             </a:r>
             <a:br/>
             <a:r>
-              <a:t>PIK compounding dominates</a:t>
+              <a:t>Premium small, sign model-dep.</a:t>
             </a:r>
           </a:p>
         </p:txBody>
@@ -10946,7 +10946,7 @@
               </a:defRPr>
             </a:pPr>
             <a:r>
-              <a:t>Simple vs Structural: Why the Model Matters</a:t>
+              <a:t>Why the Models Disagree</a:t>
             </a:r>
           </a:p>
         </p:txBody>
@@ -10982,7 +10982,7 @@
               </a:defRPr>
             </a:pPr>
             <a:r>
-              <a:t>Hazard-rate model vs Merton MC across the credit spectrum</a:t>
+              <a:t>Calibration assumptions drive the answer for strong credits</a:t>
             </a:r>
           </a:p>
         </p:txBody>
@@ -11033,7 +11033,7 @@
         </p:nvGraphicFramePr>
         <p:xfrm>
           <a:off x="457200" y="1188720"/>
-          <a:ext cx="6675120" cy="1920239"/>
+          <a:ext cx="6949440" cy="1920239"/>
         </p:xfrm>
         <a:graphic>
           <a:graphicData uri="http://schemas.openxmlformats.org/drawingml/2006/table">
@@ -11042,12 +11042,11 @@
                 <a:tableStyleId>{5C22544A-7EE6-4342-B048-85BDC9FD1C3A}</a:tableStyleId>
               </a:tblPr>
               <a:tblGrid>
-                <a:gridCol w="1188720"/>
-                <a:gridCol w="914400"/>
-                <a:gridCol w="914400"/>
-                <a:gridCol w="914400"/>
-                <a:gridCol w="914400"/>
-                <a:gridCol w="914400"/>
+                <a:gridCol w="1828800"/>
+                <a:gridCol w="1005840"/>
+                <a:gridCol w="1005840"/>
+                <a:gridCol w="1097280"/>
+                <a:gridCol w="1097280"/>
                 <a:gridCol w="914400"/>
               </a:tblGrid>
               <a:tr h="320039">
@@ -11089,7 +11088,7 @@
                         </a:defRPr>
                       </a:pPr>
                       <a:r>
-                        <a:t>HR Cash</a:t>
+                        <a:t>HR ΔPrice</a:t>
                       </a:r>
                     </a:p>
                   </a:txBody>
@@ -11113,7 +11112,7 @@
                         </a:defRPr>
                       </a:pPr>
                       <a:r>
-                        <a:t>HR PIK</a:t>
+                        <a:t>MC ΔPrice</a:t>
                       </a:r>
                     </a:p>
                   </a:txBody>
@@ -11137,7 +11136,7 @@
                         </a:defRPr>
                       </a:pPr>
                       <a:r>
-                        <a:t>MC Cash</a:t>
+                        <a:t>HR 5Y PD</a:t>
                       </a:r>
                     </a:p>
                   </a:txBody>
@@ -11161,7 +11160,7 @@
                         </a:defRPr>
                       </a:pPr>
                       <a:r>
-                        <a:t>MC PIK</a:t>
+                        <a:t>MC DefRate</a:t>
                       </a:r>
                     </a:p>
                   </a:txBody>
@@ -11185,31 +11184,7 @@
                         </a:defRPr>
                       </a:pPr>
                       <a:r>
-                        <a:t>HR ΔZ</a:t>
-                      </a:r>
-                    </a:p>
-                  </a:txBody>
-                  <a:tcPr>
-                    <a:solidFill>
-                      <a:srgbClr val="2C3E6B"/>
-                    </a:solidFill>
-                  </a:tcPr>
-                </a:tc>
-                <a:tc>
-                  <a:txBody>
-                    <a:bodyPr/>
-                    <a:lstStyle/>
-                    <a:p>
-                      <a:pPr algn="ctr">
-                        <a:defRPr sz="1100" b="1">
-                          <a:solidFill>
-                            <a:srgbClr val="FFFFFF"/>
-                          </a:solidFill>
-                          <a:latin typeface="Calibri"/>
-                        </a:defRPr>
-                      </a:pPr>
-                      <a:r>
-                        <a:t>MC ΔZ</a:t>
+                        <a:t>Ratio</a:t>
                       </a:r>
                     </a:p>
                   </a:txBody>
@@ -11259,7 +11234,7 @@
                         </a:defRPr>
                       </a:pPr>
                       <a:r>
-                        <a:t>113.35</a:t>
+                        <a:t>−2.5</a:t>
                       </a:r>
                     </a:p>
                   </a:txBody>
@@ -11283,7 +11258,7 @@
                         </a:defRPr>
                       </a:pPr>
                       <a:r>
-                        <a:t>110.89</a:t>
+                        <a:t>+3.0</a:t>
                       </a:r>
                     </a:p>
                   </a:txBody>
@@ -11307,7 +11282,7 @@
                         </a:defRPr>
                       </a:pPr>
                       <a:r>
-                        <a:t>116.48</a:t>
+                        <a:t>6.9%</a:t>
                       </a:r>
                     </a:p>
                   </a:txBody>
@@ -11331,7 +11306,7 @@
                         </a:defRPr>
                       </a:pPr>
                       <a:r>
-                        <a:t>119.46</a:t>
+                        <a:t>1.9%</a:t>
                       </a:r>
                     </a:p>
                   </a:txBody>
@@ -11355,13 +11330,39 @@
                         </a:defRPr>
                       </a:pPr>
                       <a:r>
-                        <a:t>−2.5</a:t>
+                        <a:t>3.6×</a:t>
                       </a:r>
                     </a:p>
                   </a:txBody>
                   <a:tcPr>
                     <a:solidFill>
                       <a:srgbClr val="FFFFFF"/>
+                    </a:solidFill>
+                  </a:tcPr>
+                </a:tc>
+              </a:tr>
+              <a:tr h="320039">
+                <a:tc>
+                  <a:txBody>
+                    <a:bodyPr/>
+                    <a:lstStyle/>
+                    <a:p>
+                      <a:pPr algn="l">
+                        <a:defRPr sz="1100">
+                          <a:solidFill>
+                            <a:srgbClr val="2D2D3D"/>
+                          </a:solidFill>
+                          <a:latin typeface="Calibri"/>
+                        </a:defRPr>
+                      </a:pPr>
+                      <a:r>
+                        <a:t>BB−</a:t>
+                      </a:r>
+                    </a:p>
+                  </a:txBody>
+                  <a:tcPr>
+                    <a:solidFill>
+                      <a:srgbClr val="E8EBF5"/>
                     </a:solidFill>
                   </a:tcPr>
                 </a:tc>
@@ -11379,13 +11380,109 @@
                         </a:defRPr>
                       </a:pPr>
                       <a:r>
-                        <a:t>+3.0</a:t>
-                      </a:r>
-                    </a:p>
-                  </a:txBody>
-                  <a:tcPr>
-                    <a:solidFill>
-                      <a:srgbClr val="FFFFFF"/>
+                        <a:t>−3.8</a:t>
+                      </a:r>
+                    </a:p>
+                  </a:txBody>
+                  <a:tcPr>
+                    <a:solidFill>
+                      <a:srgbClr val="E8EBF5"/>
+                    </a:solidFill>
+                  </a:tcPr>
+                </a:tc>
+                <a:tc>
+                  <a:txBody>
+                    <a:bodyPr/>
+                    <a:lstStyle/>
+                    <a:p>
+                      <a:pPr algn="r">
+                        <a:defRPr sz="1100">
+                          <a:solidFill>
+                            <a:srgbClr val="2D2D3D"/>
+                          </a:solidFill>
+                          <a:latin typeface="Calibri"/>
+                        </a:defRPr>
+                      </a:pPr>
+                      <a:r>
+                        <a:t>+1.1</a:t>
+                      </a:r>
+                    </a:p>
+                  </a:txBody>
+                  <a:tcPr>
+                    <a:solidFill>
+                      <a:srgbClr val="E8EBF5"/>
+                    </a:solidFill>
+                  </a:tcPr>
+                </a:tc>
+                <a:tc>
+                  <a:txBody>
+                    <a:bodyPr/>
+                    <a:lstStyle/>
+                    <a:p>
+                      <a:pPr algn="r">
+                        <a:defRPr sz="1100">
+                          <a:solidFill>
+                            <a:srgbClr val="2D2D3D"/>
+                          </a:solidFill>
+                          <a:latin typeface="Calibri"/>
+                        </a:defRPr>
+                      </a:pPr>
+                      <a:r>
+                        <a:t>15.5%</a:t>
+                      </a:r>
+                    </a:p>
+                  </a:txBody>
+                  <a:tcPr>
+                    <a:solidFill>
+                      <a:srgbClr val="E8EBF5"/>
+                    </a:solidFill>
+                  </a:tcPr>
+                </a:tc>
+                <a:tc>
+                  <a:txBody>
+                    <a:bodyPr/>
+                    <a:lstStyle/>
+                    <a:p>
+                      <a:pPr algn="r">
+                        <a:defRPr sz="1100">
+                          <a:solidFill>
+                            <a:srgbClr val="2D2D3D"/>
+                          </a:solidFill>
+                          <a:latin typeface="Calibri"/>
+                        </a:defRPr>
+                      </a:pPr>
+                      <a:r>
+                        <a:t>5.8%</a:t>
+                      </a:r>
+                    </a:p>
+                  </a:txBody>
+                  <a:tcPr>
+                    <a:solidFill>
+                      <a:srgbClr val="E8EBF5"/>
+                    </a:solidFill>
+                  </a:tcPr>
+                </a:tc>
+                <a:tc>
+                  <a:txBody>
+                    <a:bodyPr/>
+                    <a:lstStyle/>
+                    <a:p>
+                      <a:pPr algn="r">
+                        <a:defRPr sz="1100">
+                          <a:solidFill>
+                            <a:srgbClr val="2D2D3D"/>
+                          </a:solidFill>
+                          <a:latin typeface="Calibri"/>
+                        </a:defRPr>
+                      </a:pPr>
+                      <a:r>
+                        <a:t>2.7×</a:t>
+                      </a:r>
+                    </a:p>
+                  </a:txBody>
+                  <a:tcPr>
+                    <a:solidFill>
+                      <a:srgbClr val="E8EBF5"/>
                     </a:solidFill>
                   </a:tcPr>
                 </a:tc>
@@ -11405,13 +11502,13 @@
                         </a:defRPr>
                       </a:pPr>
                       <a:r>
-                        <a:t>BB−</a:t>
-                      </a:r>
-                    </a:p>
-                  </a:txBody>
-                  <a:tcPr>
-                    <a:solidFill>
-                      <a:srgbClr val="E8EBF5"/>
+                        <a:t>B</a:t>
+                      </a:r>
+                    </a:p>
+                  </a:txBody>
+                  <a:tcPr>
+                    <a:solidFill>
+                      <a:srgbClr val="FFFFFF"/>
                     </a:solidFill>
                   </a:tcPr>
                 </a:tc>
@@ -11429,13 +11526,13 @@
                         </a:defRPr>
                       </a:pPr>
                       <a:r>
-                        <a:t>107.56</a:t>
-                      </a:r>
-                    </a:p>
-                  </a:txBody>
-                  <a:tcPr>
-                    <a:solidFill>
-                      <a:srgbClr val="E8EBF5"/>
+                        <a:t>−5.3</a:t>
+                      </a:r>
+                    </a:p>
+                  </a:txBody>
+                  <a:tcPr>
+                    <a:solidFill>
+                      <a:srgbClr val="FFFFFF"/>
                     </a:solidFill>
                   </a:tcPr>
                 </a:tc>
@@ -11453,13 +11550,13 @@
                         </a:defRPr>
                       </a:pPr>
                       <a:r>
-                        <a:t>103.76</a:t>
-                      </a:r>
-                    </a:p>
-                  </a:txBody>
-                  <a:tcPr>
-                    <a:solidFill>
-                      <a:srgbClr val="E8EBF5"/>
+                        <a:t>−1.6</a:t>
+                      </a:r>
+                    </a:p>
+                  </a:txBody>
+                  <a:tcPr>
+                    <a:solidFill>
+                      <a:srgbClr val="FFFFFF"/>
                     </a:solidFill>
                   </a:tcPr>
                 </a:tc>
@@ -11477,13 +11574,13 @@
                         </a:defRPr>
                       </a:pPr>
                       <a:r>
-                        <a:t>112.12</a:t>
-                      </a:r>
-                    </a:p>
-                  </a:txBody>
-                  <a:tcPr>
-                    <a:solidFill>
-                      <a:srgbClr val="E8EBF5"/>
+                        <a:t>25.6%</a:t>
+                      </a:r>
+                    </a:p>
+                  </a:txBody>
+                  <a:tcPr>
+                    <a:solidFill>
+                      <a:srgbClr val="FFFFFF"/>
                     </a:solidFill>
                   </a:tcPr>
                 </a:tc>
@@ -11501,13 +11598,13 @@
                         </a:defRPr>
                       </a:pPr>
                       <a:r>
-                        <a:t>113.17</a:t>
-                      </a:r>
-                    </a:p>
-                  </a:txBody>
-                  <a:tcPr>
-                    <a:solidFill>
-                      <a:srgbClr val="E8EBF5"/>
+                        <a:t>13.2%</a:t>
+                      </a:r>
+                    </a:p>
+                  </a:txBody>
+                  <a:tcPr>
+                    <a:solidFill>
+                      <a:srgbClr val="FFFFFF"/>
                     </a:solidFill>
                   </a:tcPr>
                 </a:tc>
@@ -11525,7 +11622,33 @@
                         </a:defRPr>
                       </a:pPr>
                       <a:r>
-                        <a:t>−3.8</a:t>
+                        <a:t>1.9×</a:t>
+                      </a:r>
+                    </a:p>
+                  </a:txBody>
+                  <a:tcPr>
+                    <a:solidFill>
+                      <a:srgbClr val="FFFFFF"/>
+                    </a:solidFill>
+                  </a:tcPr>
+                </a:tc>
+              </a:tr>
+              <a:tr h="320039">
+                <a:tc>
+                  <a:txBody>
+                    <a:bodyPr/>
+                    <a:lstStyle/>
+                    <a:p>
+                      <a:pPr algn="l">
+                        <a:defRPr sz="1100">
+                          <a:solidFill>
+                            <a:srgbClr val="2D2D3D"/>
+                          </a:solidFill>
+                          <a:latin typeface="Calibri"/>
+                        </a:defRPr>
+                      </a:pPr>
+                      <a:r>
+                        <a:t>B−</a:t>
                       </a:r>
                     </a:p>
                   </a:txBody>
@@ -11549,7 +11672,7 @@
                         </a:defRPr>
                       </a:pPr>
                       <a:r>
-                        <a:t>+1.1</a:t>
+                        <a:t>−6.9</a:t>
                       </a:r>
                     </a:p>
                   </a:txBody>
@@ -11559,8 +11682,104 @@
                     </a:solidFill>
                   </a:tcPr>
                 </a:tc>
+                <a:tc>
+                  <a:txBody>
+                    <a:bodyPr/>
+                    <a:lstStyle/>
+                    <a:p>
+                      <a:pPr algn="r">
+                        <a:defRPr sz="1100">
+                          <a:solidFill>
+                            <a:srgbClr val="2D2D3D"/>
+                          </a:solidFill>
+                          <a:latin typeface="Calibri"/>
+                        </a:defRPr>
+                      </a:pPr>
+                      <a:r>
+                        <a:t>−4.9</a:t>
+                      </a:r>
+                    </a:p>
+                  </a:txBody>
+                  <a:tcPr>
+                    <a:solidFill>
+                      <a:srgbClr val="E8EBF5"/>
+                    </a:solidFill>
+                  </a:tcPr>
+                </a:tc>
+                <a:tc>
+                  <a:txBody>
+                    <a:bodyPr/>
+                    <a:lstStyle/>
+                    <a:p>
+                      <a:pPr algn="r">
+                        <a:defRPr sz="1100">
+                          <a:solidFill>
+                            <a:srgbClr val="2D2D3D"/>
+                          </a:solidFill>
+                          <a:latin typeface="Calibri"/>
+                        </a:defRPr>
+                      </a:pPr>
+                      <a:r>
+                        <a:t>36.5%</a:t>
+                      </a:r>
+                    </a:p>
+                  </a:txBody>
+                  <a:tcPr>
+                    <a:solidFill>
+                      <a:srgbClr val="E8EBF5"/>
+                    </a:solidFill>
+                  </a:tcPr>
+                </a:tc>
+                <a:tc>
+                  <a:txBody>
+                    <a:bodyPr/>
+                    <a:lstStyle/>
+                    <a:p>
+                      <a:pPr algn="r">
+                        <a:defRPr sz="1100">
+                          <a:solidFill>
+                            <a:srgbClr val="2D2D3D"/>
+                          </a:solidFill>
+                          <a:latin typeface="Calibri"/>
+                        </a:defRPr>
+                      </a:pPr>
+                      <a:r>
+                        <a:t>25.7%</a:t>
+                      </a:r>
+                    </a:p>
+                  </a:txBody>
+                  <a:tcPr>
+                    <a:solidFill>
+                      <a:srgbClr val="E8EBF5"/>
+                    </a:solidFill>
+                  </a:tcPr>
+                </a:tc>
+                <a:tc>
+                  <a:txBody>
+                    <a:bodyPr/>
+                    <a:lstStyle/>
+                    <a:p>
+                      <a:pPr algn="r">
+                        <a:defRPr sz="1100">
+                          <a:solidFill>
+                            <a:srgbClr val="2D2D3D"/>
+                          </a:solidFill>
+                          <a:latin typeface="Calibri"/>
+                        </a:defRPr>
+                      </a:pPr>
+                      <a:r>
+                        <a:t>1.4×</a:t>
+                      </a:r>
+                    </a:p>
+                  </a:txBody>
+                  <a:tcPr>
+                    <a:solidFill>
+                      <a:srgbClr val="E8EBF5"/>
+                    </a:solidFill>
+                  </a:tcPr>
+                </a:tc>
               </a:tr>
-              <a:tr h="320039">
+              <a:tr h="320044">
                 <a:tc>
                   <a:txBody>
                     <a:bodyPr/>
@@ -11575,7 +11794,7 @@
                         </a:defRPr>
                       </a:pPr>
                       <a:r>
-                        <a:t>B</a:t>
+                        <a:t>CCC</a:t>
                       </a:r>
                     </a:p>
                   </a:txBody>
@@ -11599,7 +11818,7 @@
                         </a:defRPr>
                       </a:pPr>
                       <a:r>
-                        <a:t>99.76</a:t>
+                        <a:t>−8.8</a:t>
                       </a:r>
                     </a:p>
                   </a:txBody>
@@ -11623,7 +11842,7 @@
                         </a:defRPr>
                       </a:pPr>
                       <a:r>
-                        <a:t>94.44</a:t>
+                        <a:t>−6.2</a:t>
                       </a:r>
                     </a:p>
                   </a:txBody>
@@ -11647,7 +11866,7 @@
                         </a:defRPr>
                       </a:pPr>
                       <a:r>
-                        <a:t>103.87</a:t>
+                        <a:t>52.0%</a:t>
                       </a:r>
                     </a:p>
                   </a:txBody>
@@ -11671,7 +11890,7 @@
                         </a:defRPr>
                       </a:pPr>
                       <a:r>
-                        <a:t>102.26</a:t>
+                        <a:t>42.3%</a:t>
                       </a:r>
                     </a:p>
                   </a:txBody>
@@ -11695,371 +11914,7 @@
                         </a:defRPr>
                       </a:pPr>
                       <a:r>
-                        <a:t>−5.3</a:t>
-                      </a:r>
-                    </a:p>
-                  </a:txBody>
-                  <a:tcPr>
-                    <a:solidFill>
-                      <a:srgbClr val="FFFFFF"/>
-                    </a:solidFill>
-                  </a:tcPr>
-                </a:tc>
-                <a:tc>
-                  <a:txBody>
-                    <a:bodyPr/>
-                    <a:lstStyle/>
-                    <a:p>
-                      <a:pPr algn="r">
-                        <a:defRPr sz="1100">
-                          <a:solidFill>
-                            <a:srgbClr val="2D2D3D"/>
-                          </a:solidFill>
-                          <a:latin typeface="Calibri"/>
-                        </a:defRPr>
-                      </a:pPr>
-                      <a:r>
-                        <a:t>−1.6</a:t>
-                      </a:r>
-                    </a:p>
-                  </a:txBody>
-                  <a:tcPr>
-                    <a:solidFill>
-                      <a:srgbClr val="FFFFFF"/>
-                    </a:solidFill>
-                  </a:tcPr>
-                </a:tc>
-              </a:tr>
-              <a:tr h="320039">
-                <a:tc>
-                  <a:txBody>
-                    <a:bodyPr/>
-                    <a:lstStyle/>
-                    <a:p>
-                      <a:pPr algn="l">
-                        <a:defRPr sz="1100">
-                          <a:solidFill>
-                            <a:srgbClr val="2D2D3D"/>
-                          </a:solidFill>
-                          <a:latin typeface="Calibri"/>
-                        </a:defRPr>
-                      </a:pPr>
-                      <a:r>
-                        <a:t>B−</a:t>
-                      </a:r>
-                    </a:p>
-                  </a:txBody>
-                  <a:tcPr>
-                    <a:solidFill>
-                      <a:srgbClr val="E8EBF5"/>
-                    </a:solidFill>
-                  </a:tcPr>
-                </a:tc>
-                <a:tc>
-                  <a:txBody>
-                    <a:bodyPr/>
-                    <a:lstStyle/>
-                    <a:p>
-                      <a:pPr algn="r">
-                        <a:defRPr sz="1100">
-                          <a:solidFill>
-                            <a:srgbClr val="2D2D3D"/>
-                          </a:solidFill>
-                          <a:latin typeface="Calibri"/>
-                        </a:defRPr>
-                      </a:pPr>
-                      <a:r>
-                        <a:t>90.33</a:t>
-                      </a:r>
-                    </a:p>
-                  </a:txBody>
-                  <a:tcPr>
-                    <a:solidFill>
-                      <a:srgbClr val="E8EBF5"/>
-                    </a:solidFill>
-                  </a:tcPr>
-                </a:tc>
-                <a:tc>
-                  <a:txBody>
-                    <a:bodyPr/>
-                    <a:lstStyle/>
-                    <a:p>
-                      <a:pPr algn="r">
-                        <a:defRPr sz="1100">
-                          <a:solidFill>
-                            <a:srgbClr val="2D2D3D"/>
-                          </a:solidFill>
-                          <a:latin typeface="Calibri"/>
-                        </a:defRPr>
-                      </a:pPr>
-                      <a:r>
-                        <a:t>83.45</a:t>
-                      </a:r>
-                    </a:p>
-                  </a:txBody>
-                  <a:tcPr>
-                    <a:solidFill>
-                      <a:srgbClr val="E8EBF5"/>
-                    </a:solidFill>
-                  </a:tcPr>
-                </a:tc>
-                <a:tc>
-                  <a:txBody>
-                    <a:bodyPr/>
-                    <a:lstStyle/>
-                    <a:p>
-                      <a:pPr algn="r">
-                        <a:defRPr sz="1100">
-                          <a:solidFill>
-                            <a:srgbClr val="2D2D3D"/>
-                          </a:solidFill>
-                          <a:latin typeface="Calibri"/>
-                        </a:defRPr>
-                      </a:pPr>
-                      <a:r>
-                        <a:t>87.28</a:t>
-                      </a:r>
-                    </a:p>
-                  </a:txBody>
-                  <a:tcPr>
-                    <a:solidFill>
-                      <a:srgbClr val="E8EBF5"/>
-                    </a:solidFill>
-                  </a:tcPr>
-                </a:tc>
-                <a:tc>
-                  <a:txBody>
-                    <a:bodyPr/>
-                    <a:lstStyle/>
-                    <a:p>
-                      <a:pPr algn="r">
-                        <a:defRPr sz="1100">
-                          <a:solidFill>
-                            <a:srgbClr val="2D2D3D"/>
-                          </a:solidFill>
-                          <a:latin typeface="Calibri"/>
-                        </a:defRPr>
-                      </a:pPr>
-                      <a:r>
-                        <a:t>82.39</a:t>
-                      </a:r>
-                    </a:p>
-                  </a:txBody>
-                  <a:tcPr>
-                    <a:solidFill>
-                      <a:srgbClr val="E8EBF5"/>
-                    </a:solidFill>
-                  </a:tcPr>
-                </a:tc>
-                <a:tc>
-                  <a:txBody>
-                    <a:bodyPr/>
-                    <a:lstStyle/>
-                    <a:p>
-                      <a:pPr algn="r">
-                        <a:defRPr sz="1100">
-                          <a:solidFill>
-                            <a:srgbClr val="2D2D3D"/>
-                          </a:solidFill>
-                          <a:latin typeface="Calibri"/>
-                        </a:defRPr>
-                      </a:pPr>
-                      <a:r>
-                        <a:t>−6.9</a:t>
-                      </a:r>
-                    </a:p>
-                  </a:txBody>
-                  <a:tcPr>
-                    <a:solidFill>
-                      <a:srgbClr val="E8EBF5"/>
-                    </a:solidFill>
-                  </a:tcPr>
-                </a:tc>
-                <a:tc>
-                  <a:txBody>
-                    <a:bodyPr/>
-                    <a:lstStyle/>
-                    <a:p>
-                      <a:pPr algn="r">
-                        <a:defRPr sz="1100">
-                          <a:solidFill>
-                            <a:srgbClr val="2D2D3D"/>
-                          </a:solidFill>
-                          <a:latin typeface="Calibri"/>
-                        </a:defRPr>
-                      </a:pPr>
-                      <a:r>
-                        <a:t>−4.9</a:t>
-                      </a:r>
-                    </a:p>
-                  </a:txBody>
-                  <a:tcPr>
-                    <a:solidFill>
-                      <a:srgbClr val="E8EBF5"/>
-                    </a:solidFill>
-                  </a:tcPr>
-                </a:tc>
-              </a:tr>
-              <a:tr h="320044">
-                <a:tc>
-                  <a:txBody>
-                    <a:bodyPr/>
-                    <a:lstStyle/>
-                    <a:p>
-                      <a:pPr algn="l">
-                        <a:defRPr sz="1100">
-                          <a:solidFill>
-                            <a:srgbClr val="2D2D3D"/>
-                          </a:solidFill>
-                          <a:latin typeface="Calibri"/>
-                        </a:defRPr>
-                      </a:pPr>
-                      <a:r>
-                        <a:t>CCC</a:t>
-                      </a:r>
-                    </a:p>
-                  </a:txBody>
-                  <a:tcPr>
-                    <a:solidFill>
-                      <a:srgbClr val="FFFFFF"/>
-                    </a:solidFill>
-                  </a:tcPr>
-                </a:tc>
-                <a:tc>
-                  <a:txBody>
-                    <a:bodyPr/>
-                    <a:lstStyle/>
-                    <a:p>
-                      <a:pPr algn="r">
-                        <a:defRPr sz="1100">
-                          <a:solidFill>
-                            <a:srgbClr val="2D2D3D"/>
-                          </a:solidFill>
-                          <a:latin typeface="Calibri"/>
-                        </a:defRPr>
-                      </a:pPr>
-                      <a:r>
-                        <a:t>76.13</a:t>
-                      </a:r>
-                    </a:p>
-                  </a:txBody>
-                  <a:tcPr>
-                    <a:solidFill>
-                      <a:srgbClr val="FFFFFF"/>
-                    </a:solidFill>
-                  </a:tcPr>
-                </a:tc>
-                <a:tc>
-                  <a:txBody>
-                    <a:bodyPr/>
-                    <a:lstStyle/>
-                    <a:p>
-                      <a:pPr algn="r">
-                        <a:defRPr sz="1100">
-                          <a:solidFill>
-                            <a:srgbClr val="2D2D3D"/>
-                          </a:solidFill>
-                          <a:latin typeface="Calibri"/>
-                        </a:defRPr>
-                      </a:pPr>
-                      <a:r>
-                        <a:t>67.34</a:t>
-                      </a:r>
-                    </a:p>
-                  </a:txBody>
-                  <a:tcPr>
-                    <a:solidFill>
-                      <a:srgbClr val="FFFFFF"/>
-                    </a:solidFill>
-                  </a:tcPr>
-                </a:tc>
-                <a:tc>
-                  <a:txBody>
-                    <a:bodyPr/>
-                    <a:lstStyle/>
-                    <a:p>
-                      <a:pPr algn="r">
-                        <a:defRPr sz="1100">
-                          <a:solidFill>
-                            <a:srgbClr val="2D2D3D"/>
-                          </a:solidFill>
-                          <a:latin typeface="Calibri"/>
-                        </a:defRPr>
-                      </a:pPr>
-                      <a:r>
-                        <a:t>63.60</a:t>
-                      </a:r>
-                    </a:p>
-                  </a:txBody>
-                  <a:tcPr>
-                    <a:solidFill>
-                      <a:srgbClr val="FFFFFF"/>
-                    </a:solidFill>
-                  </a:tcPr>
-                </a:tc>
-                <a:tc>
-                  <a:txBody>
-                    <a:bodyPr/>
-                    <a:lstStyle/>
-                    <a:p>
-                      <a:pPr algn="r">
-                        <a:defRPr sz="1100">
-                          <a:solidFill>
-                            <a:srgbClr val="2D2D3D"/>
-                          </a:solidFill>
-                          <a:latin typeface="Calibri"/>
-                        </a:defRPr>
-                      </a:pPr>
-                      <a:r>
-                        <a:t>57.43</a:t>
-                      </a:r>
-                    </a:p>
-                  </a:txBody>
-                  <a:tcPr>
-                    <a:solidFill>
-                      <a:srgbClr val="FFFFFF"/>
-                    </a:solidFill>
-                  </a:tcPr>
-                </a:tc>
-                <a:tc>
-                  <a:txBody>
-                    <a:bodyPr/>
-                    <a:lstStyle/>
-                    <a:p>
-                      <a:pPr algn="r">
-                        <a:defRPr sz="1100">
-                          <a:solidFill>
-                            <a:srgbClr val="2D2D3D"/>
-                          </a:solidFill>
-                          <a:latin typeface="Calibri"/>
-                        </a:defRPr>
-                      </a:pPr>
-                      <a:r>
-                        <a:t>−8.8</a:t>
-                      </a:r>
-                    </a:p>
-                  </a:txBody>
-                  <a:tcPr>
-                    <a:solidFill>
-                      <a:srgbClr val="FFFFFF"/>
-                    </a:solidFill>
-                  </a:tcPr>
-                </a:tc>
-                <a:tc>
-                  <a:txBody>
-                    <a:bodyPr/>
-                    <a:lstStyle/>
-                    <a:p>
-                      <a:pPr algn="r">
-                        <a:defRPr sz="1100">
-                          <a:solidFill>
-                            <a:srgbClr val="2D2D3D"/>
-                          </a:solidFill>
-                          <a:latin typeface="Calibri"/>
-                        </a:defRPr>
-                      </a:pPr>
-                      <a:r>
-                        <a:t>−6.2</a:t>
+                        <a:t>1.2×</a:t>
                       </a:r>
                     </a:p>
                   </a:txBody>
@@ -12105,7 +11960,7 @@
               </a:defRPr>
             </a:pPr>
             <a:r>
-              <a:t>Δ = PIK price minus Cash price (in points). HR = hazard-rate model. MC = Merton Monte Carlo.</a:t>
+              <a:t>ΔPrice = PIK minus Cash (points). HR 5Y PD = market-implied. MC DefRate = simulation default rate.</a:t>
             </a:r>
           </a:p>
         </p:txBody>
@@ -12136,7 +11991,7 @@
               <a:spcAft>
                 <a:spcPts val="800"/>
               </a:spcAft>
-              <a:defRPr sz="1400">
+              <a:defRPr sz="1300">
                 <a:solidFill>
                   <a:srgbClr val="2D2D3D"/>
                 </a:solidFill>
@@ -12144,7 +11999,7 @@
               </a:defRPr>
             </a:pPr>
             <a:r>
-              <a:t>The HR model always prices PIK below cash (negative Δ). It sees only the concentrated maturity exposure.</a:t>
+              <a:t>The HR model uses market-implied defaults (including risk premium) → PIK always costs. The MC model uses historical PDs for barriers → fewer defaults → PIK compounding survives</a:t>
             </a:r>
           </a:p>
           <a:p>
@@ -12152,7 +12007,7 @@
               <a:spcAft>
                 <a:spcPts val="800"/>
               </a:spcAft>
-              <a:defRPr sz="1400">
+              <a:defRPr sz="1300">
                 <a:solidFill>
                   <a:srgbClr val="2D2D3D"/>
                 </a:solidFill>
@@ -12160,7 +12015,7 @@
               </a:defRPr>
             </a:pPr>
             <a:r>
-              <a:t>The MC model prices PIK ABOVE cash for BB+/BB− (positive Δ). Rare defaults mean PIK compounding is a net benefit.</a:t>
+              <a:t>For BB+: the HR model sees 3.6× more defaults than the MC model. This gap drives the sign reversal in PIK pricing</a:t>
             </a:r>
           </a:p>
           <a:p>
@@ -12168,7 +12023,7 @@
               <a:spcAft>
                 <a:spcPts val="800"/>
               </a:spcAft>
-              <a:defRPr sz="1400">
+              <a:defRPr sz="1300">
                 <a:solidFill>
                   <a:srgbClr val="2D2D3D"/>
                 </a:solidFill>
@@ -12176,7 +12031,7 @@
               </a:defRPr>
             </a:pPr>
             <a:r>
-              <a:t>For stressed credits (B−, CCC), both models agree PIK is cheaper, but the gap narrows because MC includes the leverage spiral that the HR model misses.</a:t>
+              <a:t>For CCC: both models see similar default rates (ratio 1.2×). The PIK penalty is robust regardless of calibration</a:t>
             </a:r>
           </a:p>
           <a:p>
@@ -12184,7 +12039,7 @@
               <a:spcAft>
                 <a:spcPts val="800"/>
               </a:spcAft>
-              <a:defRPr sz="1400">
+              <a:defRPr sz="1300">
                 <a:solidFill>
                   <a:srgbClr val="2D2D3D"/>
                 </a:solidFill>
@@ -12192,7 +12047,7 @@
               </a:defRPr>
             </a:pPr>
             <a:r>
-              <a:t>The sign reversal for strong credits is the key insight: a flat hazard model cannot capture this dynamic.</a:t>
+              <a:t>The practical implication: for strong credits, the PIK premium/discount is small either way (±60bp). For weak credits, it's large (+100–260bp) and model choice barely matters</a:t>
             </a:r>
           </a:p>
         </p:txBody>
@@ -12205,8 +12060,8 @@
         </p:nvSpPr>
         <p:spPr>
           <a:xfrm>
-            <a:off x="1371600" y="5669280"/>
-            <a:ext cx="6400800" cy="548640"/>
+            <a:off x="914400" y="5669280"/>
+            <a:ext cx="7315200" cy="548640"/>
           </a:xfrm>
           <a:prstGeom prst="roundRect">
             <a:avLst/>
@@ -12245,7 +12100,7 @@
               </a:defRPr>
             </a:pPr>
             <a:r>
-              <a:t>The structural model captures two things the hazard model cannot: (1) the compounding benefit when defaults are rare, and (2) the feedback spiral when defaults are likely.</a:t>
+              <a:t>Model choice matters most where the answer matters least (strong credits). Where the premium is large and actionable (weak credits), both models agree.</a:t>
             </a:r>
           </a:p>
         </p:txBody>
@@ -12485,7 +12340,7 @@
               </a:defRPr>
             </a:pPr>
             <a:r>
-              <a:t>PIK BENEFITS INVESTOR</a:t>
+              <a:t>LOW IMPACT ZONE</a:t>
             </a:r>
           </a:p>
         </p:txBody>
@@ -12560,7 +12415,7 @@
               </a:defRPr>
             </a:pPr>
             <a:r>
-              <a:t>PIK Z-spread is BELOW cash</a:t>
+              <a:t>PIK premium is small (±60bp)</a:t>
             </a:r>
           </a:p>
           <a:p>
@@ -12576,7 +12431,7 @@
               </a:defRPr>
             </a:pPr>
             <a:r>
-              <a:t>Compounding benefit dominates</a:t>
+              <a:t>Sign is calibration-dependent</a:t>
             </a:r>
           </a:p>
           <a:p>
@@ -12608,7 +12463,7 @@
               </a:defRPr>
             </a:pPr>
             <a:r>
-              <a:t>Price PIK at or inside cash</a:t>
+              <a:t>PIK vs cash difference is minor</a:t>
             </a:r>
           </a:p>
         </p:txBody>
@@ -13064,7 +12919,7 @@
                         </a:defRPr>
                       </a:pPr>
                       <a:r>
-                        <a:t>PIK Benefits</a:t>
+                        <a:t>Low Impact</a:t>
                       </a:r>
                     </a:p>
                   </a:txBody>
@@ -13162,7 +13017,7 @@
                         </a:defRPr>
                       </a:pPr>
                       <a:r>
-                        <a:t>−60 to −20bp</a:t>
+                        <a:t>±60bp (model-dep.)</a:t>
                       </a:r>
                     </a:p>
                   </a:txBody>
@@ -13260,7 +13115,7 @@
                         </a:defRPr>
                       </a:pPr>
                       <a:r>
-                        <a:t>No — PIK trades inside</a:t>
+                        <a:t>Either model adequate</a:t>
                       </a:r>
                     </a:p>
                   </a:txBody>
@@ -13456,7 +13311,7 @@
                         </a:defRPr>
                       </a:pPr>
                       <a:r>
-                        <a:t>Maturity extension risk</a:t>
+                        <a:t>Calibration assumption</a:t>
                       </a:r>
                     </a:p>
                   </a:txBody>
@@ -13743,7 +13598,7 @@
               </a:defRPr>
             </a:pPr>
             <a:r>
-              <a:t>PIK premium depends entirely on credit quality</a:t>
+              <a:t>PIK premium is non-linear and credit-quality-dependent</a:t>
             </a:r>
           </a:p>
         </p:txBody>
@@ -13779,7 +13634,7 @@
               </a:defRPr>
             </a:pPr>
             <a:r>
-              <a:t>For strong credits (BB+/BB−), PIK can actually trade tighter than cash — compounding benefits outweigh rare defaults. For stressed credits (CCC), the premium exceeds +260bp.</a:t>
+              <a:t>For strong credits (BB+/BB−), the premium is small (±60bp) and its sign depends on calibration. For stressed credits (CCC), the premium exceeds +260bp and is robust across models.</a:t>
             </a:r>
           </a:p>
         </p:txBody>
@@ -13867,7 +13722,7 @@
               </a:defRPr>
             </a:pPr>
             <a:r>
-              <a:t>Simple hazard models get the sign wrong for strong credits</a:t>
+              <a:t>Model disagreement is largest where the stakes are smallest</a:t>
             </a:r>
           </a:p>
         </p:txBody>
@@ -13903,7 +13758,7 @@
               </a:defRPr>
             </a:pPr>
             <a:r>
-              <a:t>The flat-λ model always penalises PIK. The structural model shows PIK trades ABOVE cash for BB+. The crossover is near 300bp market spread.</a:t>
+              <a:t>For strong credits, models disagree on the sign but the magnitude is small. For weak credits, models agree: PIK premium is large and the feedback spiral dominates.</a:t>
             </a:r>
           </a:p>
         </p:txBody>
@@ -14115,7 +13970,7 @@
               </a:defRPr>
             </a:pPr>
             <a:r>
-              <a:t>Above ~500bp market spread, structural modelling is essential</a:t>
+              <a:t>Above ~400bp market spread, structural modelling is essential</a:t>
             </a:r>
           </a:p>
         </p:txBody>
@@ -14151,7 +14006,7 @@
               </a:defRPr>
             </a:pPr>
             <a:r>
-              <a:t>In the structural risk zone, the feedback loop dominates pricing. A spread bump approach will materially misprice PIK risk.</a:t>
+              <a:t>In the structural risk zone, the feedback loop dominates pricing regardless of calibration. A flat spread bump approach will materially misprice PIK risk.</a:t>
             </a:r>
           </a:p>
         </p:txBody>
@@ -14558,7 +14413,7 @@
               </a:defRPr>
             </a:pPr>
             <a:r>
-              <a:t>For strong credits (BB+): PIK can trade tighter</a:t>
+              <a:t>For strong credits (BB+): PIK premium is small (±60bp) and sign is model-dependent</a:t>
             </a:r>
           </a:p>
           <a:p>
@@ -14574,7 +14429,7 @@
               </a:defRPr>
             </a:pPr>
             <a:r>
-              <a:t>For stressed credits (CCC): PIK premium &gt; +260bp</a:t>
+              <a:t>For stressed credits (CCC): PIK premium &gt; +260bp, robust across models</a:t>
             </a:r>
           </a:p>
           <a:p>
@@ -14590,7 +14445,7 @@
               </a:defRPr>
             </a:pPr>
             <a:r>
-              <a:t>Below ~300bp market spread: PIK actually benefits the investor</a:t>
+              <a:t>The non-linearity means flat spread bumps are dangerous</a:t>
             </a:r>
           </a:p>
         </p:txBody>
@@ -14643,7 +14498,7 @@
               </a:defRPr>
             </a:pPr>
             <a:r>
-              <a:t>The answer depends on credit quality in a way that is impossible to guess without a model. The premium can even be negative.</a:t>
+              <a:t>The answer depends on credit quality in a way that is impossible to guess without a model. The premium is non-linear and, for strong credits, depends on calibration assumptions.</a:t>
             </a:r>
           </a:p>
         </p:txBody>
@@ -18118,7 +17973,7 @@
               </a:defRPr>
             </a:pPr>
             <a:r>
-              <a:t>What the simple model predicts — but is it right?</a:t>
+              <a:t>Risk-neutral pricing: hazard rates from market spreads</a:t>
             </a:r>
           </a:p>
         </p:txBody>
@@ -18954,7 +18809,7 @@
               </a:defRPr>
             </a:pPr>
             <a:r>
-              <a:t>Under fixed hazard rates, the model predicts PIK always trades below cash — concentrated maturity exposure penalises PIK at every credit level</a:t>
+              <a:t>Under risk-neutral hazard rates (calibrated from market spreads), PIK always prices below cash — concentrated maturity exposure penalises PIK at every credit level</a:t>
             </a:r>
           </a:p>
           <a:p>
@@ -18970,7 +18825,7 @@
               </a:defRPr>
             </a:pPr>
             <a:r>
-              <a:t>The predicted gap widens with credit risk: from −2.5 pts (BB+) to −8.8 pts (CCC)</a:t>
+              <a:t>The gap widens with credit risk: from −2.5 pts (BB+) to −8.8 pts (CCC)</a:t>
             </a:r>
           </a:p>
           <a:p>
@@ -18986,7 +18841,7 @@
               </a:defRPr>
             </a:pPr>
             <a:r>
-              <a:t>But this conclusion turns out to be WRONG for strong credits. A structural model (next section) shows PIK actually trades ABOVE cash for BB+ and BB− issuers</a:t>
+              <a:t>Note: market spreads embed a credit risk premium above expected losses. For BB+ the spread (85bp) implies ~7% 5Y default prob, versus the historical rate of ~1%</a:t>
             </a:r>
           </a:p>
         </p:txBody>
@@ -19039,7 +18894,7 @@
               </a:defRPr>
             </a:pPr>
             <a:r>
-              <a:t>This is the simple model’s answer — not the final answer. The structural model will reverse the sign for strong credits, where rare defaults make PIK compounding a net benefit.</a:t>
+              <a:t>Under risk-neutral pricing, PIK always costs the investor. The question is whether the structural model — which uses historical PDs — tells a different story.</a:t>
             </a:r>
           </a:p>
         </p:txBody>
@@ -19154,7 +19009,7 @@
               </a:defRPr>
             </a:pPr>
             <a:r>
-              <a:t>What the Simple Model Misses</a:t>
+              <a:t>The Calibration Gap</a:t>
             </a:r>
           </a:p>
         </p:txBody>
@@ -19190,7 +19045,7 @@
               </a:defRPr>
             </a:pPr>
             <a:r>
-              <a:t>Hazard-rate vs structural: the price gap</a:t>
+              <a:t>Why two models disagree on PIK for strong credits</a:t>
             </a:r>
           </a:p>
         </p:txBody>
@@ -19240,8 +19095,8 @@
           <p:nvPr/>
         </p:nvGraphicFramePr>
         <p:xfrm>
-          <a:off x="1371600" y="1280160"/>
-          <a:ext cx="5577840" cy="1920239"/>
+          <a:off x="731520" y="1188720"/>
+          <a:ext cx="6675120" cy="1920239"/>
         </p:xfrm>
         <a:graphic>
           <a:graphicData uri="http://schemas.openxmlformats.org/drawingml/2006/table">
@@ -19253,7 +19108,8 @@
                 <a:gridCol w="2286000"/>
                 <a:gridCol w="1097280"/>
                 <a:gridCol w="1097280"/>
-                <a:gridCol w="1097280"/>
+                <a:gridCol w="1280160"/>
+                <a:gridCol w="914400"/>
               </a:tblGrid>
               <a:tr h="320039">
                 <a:tc>
@@ -19262,7 +19118,7 @@
                     <a:lstStyle/>
                     <a:p>
                       <a:pPr algn="ctr">
-                        <a:defRPr sz="1300" b="1">
+                        <a:defRPr sz="1200" b="1">
                           <a:solidFill>
                             <a:srgbClr val="FFFFFF"/>
                           </a:solidFill>
@@ -19286,7 +19142,7 @@
                     <a:lstStyle/>
                     <a:p>
                       <a:pPr algn="ctr">
-                        <a:defRPr sz="1300" b="1">
+                        <a:defRPr sz="1200" b="1">
                           <a:solidFill>
                             <a:srgbClr val="FFFFFF"/>
                           </a:solidFill>
@@ -19294,7 +19150,7 @@
                         </a:defRPr>
                       </a:pPr>
                       <a:r>
-                        <a:t>HR ΔPrice</a:t>
+                        <a:t>Mkt Sprd</a:t>
                       </a:r>
                     </a:p>
                   </a:txBody>
@@ -19310,7 +19166,7 @@
                     <a:lstStyle/>
                     <a:p>
                       <a:pPr algn="ctr">
-                        <a:defRPr sz="1300" b="1">
+                        <a:defRPr sz="1200" b="1">
                           <a:solidFill>
                             <a:srgbClr val="FFFFFF"/>
                           </a:solidFill>
@@ -19318,7 +19174,7 @@
                         </a:defRPr>
                       </a:pPr>
                       <a:r>
-                        <a:t>MC ΔPrice</a:t>
+                        <a:t>HR 5Y PD</a:t>
                       </a:r>
                     </a:p>
                   </a:txBody>
@@ -19334,7 +19190,7 @@
                     <a:lstStyle/>
                     <a:p>
                       <a:pPr algn="ctr">
-                        <a:defRPr sz="1300" b="1">
+                        <a:defRPr sz="1200" b="1">
                           <a:solidFill>
                             <a:srgbClr val="FFFFFF"/>
                           </a:solidFill>
@@ -19342,7 +19198,31 @@
                         </a:defRPr>
                       </a:pPr>
                       <a:r>
-                        <a:t>Gap</a:t>
+                        <a:t>Hist 5Y PD</a:t>
+                      </a:r>
+                    </a:p>
+                  </a:txBody>
+                  <a:tcPr>
+                    <a:solidFill>
+                      <a:srgbClr val="2C3E6B"/>
+                    </a:solidFill>
+                  </a:tcPr>
+                </a:tc>
+                <a:tc>
+                  <a:txBody>
+                    <a:bodyPr/>
+                    <a:lstStyle/>
+                    <a:p>
+                      <a:pPr algn="ctr">
+                        <a:defRPr sz="1200" b="1">
+                          <a:solidFill>
+                            <a:srgbClr val="FFFFFF"/>
+                          </a:solidFill>
+                          <a:latin typeface="Calibri"/>
+                        </a:defRPr>
+                      </a:pPr>
+                      <a:r>
+                        <a:t>Ratio</a:t>
                       </a:r>
                     </a:p>
                   </a:txBody>
@@ -19360,7 +19240,7 @@
                     <a:lstStyle/>
                     <a:p>
                       <a:pPr algn="l">
-                        <a:defRPr sz="1300">
+                        <a:defRPr sz="1200">
                           <a:solidFill>
                             <a:srgbClr val="2D2D3D"/>
                           </a:solidFill>
@@ -19384,15 +19264,15 @@
                     <a:lstStyle/>
                     <a:p>
                       <a:pPr algn="r">
-                        <a:defRPr sz="1300">
-                          <a:solidFill>
-                            <a:srgbClr val="2D2D3D"/>
-                          </a:solidFill>
-                          <a:latin typeface="Calibri"/>
-                        </a:defRPr>
-                      </a:pPr>
-                      <a:r>
-                        <a:t>−2.46</a:t>
+                        <a:defRPr sz="1200">
+                          <a:solidFill>
+                            <a:srgbClr val="2D2D3D"/>
+                          </a:solidFill>
+                          <a:latin typeface="Calibri"/>
+                        </a:defRPr>
+                      </a:pPr>
+                      <a:r>
+                        <a:t>85bp</a:t>
                       </a:r>
                     </a:p>
                   </a:txBody>
@@ -19408,15 +19288,15 @@
                     <a:lstStyle/>
                     <a:p>
                       <a:pPr algn="r">
-                        <a:defRPr sz="1300">
-                          <a:solidFill>
-                            <a:srgbClr val="2D2D3D"/>
-                          </a:solidFill>
-                          <a:latin typeface="Calibri"/>
-                        </a:defRPr>
-                      </a:pPr>
-                      <a:r>
-                        <a:t>+2.98</a:t>
+                        <a:defRPr sz="1200">
+                          <a:solidFill>
+                            <a:srgbClr val="2D2D3D"/>
+                          </a:solidFill>
+                          <a:latin typeface="Calibri"/>
+                        </a:defRPr>
+                      </a:pPr>
+                      <a:r>
+                        <a:t>6.9%</a:t>
                       </a:r>
                     </a:p>
                   </a:txBody>
@@ -19432,15 +19312,39 @@
                     <a:lstStyle/>
                     <a:p>
                       <a:pPr algn="r">
-                        <a:defRPr sz="1300">
-                          <a:solidFill>
-                            <a:srgbClr val="2D2D3D"/>
-                          </a:solidFill>
-                          <a:latin typeface="Calibri"/>
-                        </a:defRPr>
-                      </a:pPr>
-                      <a:r>
-                        <a:t>5.4 pts</a:t>
+                        <a:defRPr sz="1200">
+                          <a:solidFill>
+                            <a:srgbClr val="2D2D3D"/>
+                          </a:solidFill>
+                          <a:latin typeface="Calibri"/>
+                        </a:defRPr>
+                      </a:pPr>
+                      <a:r>
+                        <a:t>1.0%</a:t>
+                      </a:r>
+                    </a:p>
+                  </a:txBody>
+                  <a:tcPr>
+                    <a:solidFill>
+                      <a:srgbClr val="FFFFFF"/>
+                    </a:solidFill>
+                  </a:tcPr>
+                </a:tc>
+                <a:tc>
+                  <a:txBody>
+                    <a:bodyPr/>
+                    <a:lstStyle/>
+                    <a:p>
+                      <a:pPr algn="r">
+                        <a:defRPr sz="1200">
+                          <a:solidFill>
+                            <a:srgbClr val="2D2D3D"/>
+                          </a:solidFill>
+                          <a:latin typeface="Calibri"/>
+                        </a:defRPr>
+                      </a:pPr>
+                      <a:r>
+                        <a:t>6.9×</a:t>
                       </a:r>
                     </a:p>
                   </a:txBody>
@@ -19458,7 +19362,7 @@
                     <a:lstStyle/>
                     <a:p>
                       <a:pPr algn="l">
-                        <a:defRPr sz="1300">
+                        <a:defRPr sz="1200">
                           <a:solidFill>
                             <a:srgbClr val="2D2D3D"/>
                           </a:solidFill>
@@ -19482,15 +19386,15 @@
                     <a:lstStyle/>
                     <a:p>
                       <a:pPr algn="r">
-                        <a:defRPr sz="1300">
-                          <a:solidFill>
-                            <a:srgbClr val="2D2D3D"/>
-                          </a:solidFill>
-                          <a:latin typeface="Calibri"/>
-                        </a:defRPr>
-                      </a:pPr>
-                      <a:r>
-                        <a:t>−3.80</a:t>
+                        <a:defRPr sz="1200">
+                          <a:solidFill>
+                            <a:srgbClr val="2D2D3D"/>
+                          </a:solidFill>
+                          <a:latin typeface="Calibri"/>
+                        </a:defRPr>
+                      </a:pPr>
+                      <a:r>
+                        <a:t>210bp</a:t>
                       </a:r>
                     </a:p>
                   </a:txBody>
@@ -19506,15 +19410,15 @@
                     <a:lstStyle/>
                     <a:p>
                       <a:pPr algn="r">
-                        <a:defRPr sz="1300">
-                          <a:solidFill>
-                            <a:srgbClr val="2D2D3D"/>
-                          </a:solidFill>
-                          <a:latin typeface="Calibri"/>
-                        </a:defRPr>
-                      </a:pPr>
-                      <a:r>
-                        <a:t>+1.05</a:t>
+                        <a:defRPr sz="1200">
+                          <a:solidFill>
+                            <a:srgbClr val="2D2D3D"/>
+                          </a:solidFill>
+                          <a:latin typeface="Calibri"/>
+                        </a:defRPr>
+                      </a:pPr>
+                      <a:r>
+                        <a:t>15.5%</a:t>
                       </a:r>
                     </a:p>
                   </a:txBody>
@@ -19530,15 +19434,39 @@
                     <a:lstStyle/>
                     <a:p>
                       <a:pPr algn="r">
-                        <a:defRPr sz="1300">
-                          <a:solidFill>
-                            <a:srgbClr val="2D2D3D"/>
-                          </a:solidFill>
-                          <a:latin typeface="Calibri"/>
-                        </a:defRPr>
-                      </a:pPr>
-                      <a:r>
-                        <a:t>4.9 pts</a:t>
+                        <a:defRPr sz="1200">
+                          <a:solidFill>
+                            <a:srgbClr val="2D2D3D"/>
+                          </a:solidFill>
+                          <a:latin typeface="Calibri"/>
+                        </a:defRPr>
+                      </a:pPr>
+                      <a:r>
+                        <a:t>4.9%</a:t>
+                      </a:r>
+                    </a:p>
+                  </a:txBody>
+                  <a:tcPr>
+                    <a:solidFill>
+                      <a:srgbClr val="E8EBF5"/>
+                    </a:solidFill>
+                  </a:tcPr>
+                </a:tc>
+                <a:tc>
+                  <a:txBody>
+                    <a:bodyPr/>
+                    <a:lstStyle/>
+                    <a:p>
+                      <a:pPr algn="r">
+                        <a:defRPr sz="1200">
+                          <a:solidFill>
+                            <a:srgbClr val="2D2D3D"/>
+                          </a:solidFill>
+                          <a:latin typeface="Calibri"/>
+                        </a:defRPr>
+                      </a:pPr>
+                      <a:r>
+                        <a:t>3.2×</a:t>
                       </a:r>
                     </a:p>
                   </a:txBody>
@@ -19556,7 +19484,7 @@
                     <a:lstStyle/>
                     <a:p>
                       <a:pPr algn="l">
-                        <a:defRPr sz="1300">
+                        <a:defRPr sz="1200">
                           <a:solidFill>
                             <a:srgbClr val="2D2D3D"/>
                           </a:solidFill>
@@ -19580,15 +19508,15 @@
                     <a:lstStyle/>
                     <a:p>
                       <a:pPr algn="r">
-                        <a:defRPr sz="1300">
-                          <a:solidFill>
-                            <a:srgbClr val="2D2D3D"/>
-                          </a:solidFill>
-                          <a:latin typeface="Calibri"/>
-                        </a:defRPr>
-                      </a:pPr>
-                      <a:r>
-                        <a:t>−5.32</a:t>
+                        <a:defRPr sz="1200">
+                          <a:solidFill>
+                            <a:srgbClr val="2D2D3D"/>
+                          </a:solidFill>
+                          <a:latin typeface="Calibri"/>
+                        </a:defRPr>
+                      </a:pPr>
+                      <a:r>
+                        <a:t>390bp</a:t>
                       </a:r>
                     </a:p>
                   </a:txBody>
@@ -19604,15 +19532,15 @@
                     <a:lstStyle/>
                     <a:p>
                       <a:pPr algn="r">
-                        <a:defRPr sz="1300">
-                          <a:solidFill>
-                            <a:srgbClr val="2D2D3D"/>
-                          </a:solidFill>
-                          <a:latin typeface="Calibri"/>
-                        </a:defRPr>
-                      </a:pPr>
-                      <a:r>
-                        <a:t>−1.61</a:t>
+                        <a:defRPr sz="1200">
+                          <a:solidFill>
+                            <a:srgbClr val="2D2D3D"/>
+                          </a:solidFill>
+                          <a:latin typeface="Calibri"/>
+                        </a:defRPr>
+                      </a:pPr>
+                      <a:r>
+                        <a:t>25.6%</a:t>
                       </a:r>
                     </a:p>
                   </a:txBody>
@@ -19628,15 +19556,39 @@
                     <a:lstStyle/>
                     <a:p>
                       <a:pPr algn="r">
-                        <a:defRPr sz="1300">
-                          <a:solidFill>
-                            <a:srgbClr val="2D2D3D"/>
-                          </a:solidFill>
-                          <a:latin typeface="Calibri"/>
-                        </a:defRPr>
-                      </a:pPr>
-                      <a:r>
-                        <a:t>3.7 pts</a:t>
+                        <a:defRPr sz="1200">
+                          <a:solidFill>
+                            <a:srgbClr val="2D2D3D"/>
+                          </a:solidFill>
+                          <a:latin typeface="Calibri"/>
+                        </a:defRPr>
+                      </a:pPr>
+                      <a:r>
+                        <a:t>11.8%</a:t>
+                      </a:r>
+                    </a:p>
+                  </a:txBody>
+                  <a:tcPr>
+                    <a:solidFill>
+                      <a:srgbClr val="FFFFFF"/>
+                    </a:solidFill>
+                  </a:tcPr>
+                </a:tc>
+                <a:tc>
+                  <a:txBody>
+                    <a:bodyPr/>
+                    <a:lstStyle/>
+                    <a:p>
+                      <a:pPr algn="r">
+                        <a:defRPr sz="1200">
+                          <a:solidFill>
+                            <a:srgbClr val="2D2D3D"/>
+                          </a:solidFill>
+                          <a:latin typeface="Calibri"/>
+                        </a:defRPr>
+                      </a:pPr>
+                      <a:r>
+                        <a:t>2.2×</a:t>
                       </a:r>
                     </a:p>
                   </a:txBody>
@@ -19654,7 +19606,7 @@
                     <a:lstStyle/>
                     <a:p>
                       <a:pPr algn="l">
-                        <a:defRPr sz="1300">
+                        <a:defRPr sz="1200">
                           <a:solidFill>
                             <a:srgbClr val="2D2D3D"/>
                           </a:solidFill>
@@ -19678,15 +19630,15 @@
                     <a:lstStyle/>
                     <a:p>
                       <a:pPr algn="r">
-                        <a:defRPr sz="1300">
-                          <a:solidFill>
-                            <a:srgbClr val="2D2D3D"/>
-                          </a:solidFill>
-                          <a:latin typeface="Calibri"/>
-                        </a:defRPr>
-                      </a:pPr>
-                      <a:r>
-                        <a:t>−6.88</a:t>
+                        <a:defRPr sz="1200">
+                          <a:solidFill>
+                            <a:srgbClr val="2D2D3D"/>
+                          </a:solidFill>
+                          <a:latin typeface="Calibri"/>
+                        </a:defRPr>
+                      </a:pPr>
+                      <a:r>
+                        <a:t>630bp</a:t>
                       </a:r>
                     </a:p>
                   </a:txBody>
@@ -19702,15 +19654,15 @@
                     <a:lstStyle/>
                     <a:p>
                       <a:pPr algn="r">
-                        <a:defRPr sz="1300">
-                          <a:solidFill>
-                            <a:srgbClr val="2D2D3D"/>
-                          </a:solidFill>
-                          <a:latin typeface="Calibri"/>
-                        </a:defRPr>
-                      </a:pPr>
-                      <a:r>
-                        <a:t>−4.89</a:t>
+                        <a:defRPr sz="1200">
+                          <a:solidFill>
+                            <a:srgbClr val="2D2D3D"/>
+                          </a:solidFill>
+                          <a:latin typeface="Calibri"/>
+                        </a:defRPr>
+                      </a:pPr>
+                      <a:r>
+                        <a:t>36.5%</a:t>
                       </a:r>
                     </a:p>
                   </a:txBody>
@@ -19726,15 +19678,39 @@
                     <a:lstStyle/>
                     <a:p>
                       <a:pPr algn="r">
-                        <a:defRPr sz="1300">
-                          <a:solidFill>
-                            <a:srgbClr val="2D2D3D"/>
-                          </a:solidFill>
-                          <a:latin typeface="Calibri"/>
-                        </a:defRPr>
-                      </a:pPr>
-                      <a:r>
-                        <a:t>2.0 pts</a:t>
+                        <a:defRPr sz="1200">
+                          <a:solidFill>
+                            <a:srgbClr val="2D2D3D"/>
+                          </a:solidFill>
+                          <a:latin typeface="Calibri"/>
+                        </a:defRPr>
+                      </a:pPr>
+                      <a:r>
+                        <a:t>24.0%</a:t>
+                      </a:r>
+                    </a:p>
+                  </a:txBody>
+                  <a:tcPr>
+                    <a:solidFill>
+                      <a:srgbClr val="E8EBF5"/>
+                    </a:solidFill>
+                  </a:tcPr>
+                </a:tc>
+                <a:tc>
+                  <a:txBody>
+                    <a:bodyPr/>
+                    <a:lstStyle/>
+                    <a:p>
+                      <a:pPr algn="r">
+                        <a:defRPr sz="1200">
+                          <a:solidFill>
+                            <a:srgbClr val="2D2D3D"/>
+                          </a:solidFill>
+                          <a:latin typeface="Calibri"/>
+                        </a:defRPr>
+                      </a:pPr>
+                      <a:r>
+                        <a:t>1.5×</a:t>
                       </a:r>
                     </a:p>
                   </a:txBody>
@@ -19752,7 +19728,7 @@
                     <a:lstStyle/>
                     <a:p>
                       <a:pPr algn="l">
-                        <a:defRPr sz="1300">
+                        <a:defRPr sz="1200">
                           <a:solidFill>
                             <a:srgbClr val="2D2D3D"/>
                           </a:solidFill>
@@ -19776,15 +19752,15 @@
                     <a:lstStyle/>
                     <a:p>
                       <a:pPr algn="r">
-                        <a:defRPr sz="1300">
-                          <a:solidFill>
-                            <a:srgbClr val="2D2D3D"/>
-                          </a:solidFill>
-                          <a:latin typeface="Calibri"/>
-                        </a:defRPr>
-                      </a:pPr>
-                      <a:r>
-                        <a:t>−8.79</a:t>
+                        <a:defRPr sz="1200">
+                          <a:solidFill>
+                            <a:srgbClr val="2D2D3D"/>
+                          </a:solidFill>
+                          <a:latin typeface="Calibri"/>
+                        </a:defRPr>
+                      </a:pPr>
+                      <a:r>
+                        <a:t>1050bp</a:t>
                       </a:r>
                     </a:p>
                   </a:txBody>
@@ -19800,15 +19776,15 @@
                     <a:lstStyle/>
                     <a:p>
                       <a:pPr algn="r">
-                        <a:defRPr sz="1300">
-                          <a:solidFill>
-                            <a:srgbClr val="2D2D3D"/>
-                          </a:solidFill>
-                          <a:latin typeface="Calibri"/>
-                        </a:defRPr>
-                      </a:pPr>
-                      <a:r>
-                        <a:t>−6.17</a:t>
+                        <a:defRPr sz="1200">
+                          <a:solidFill>
+                            <a:srgbClr val="2D2D3D"/>
+                          </a:solidFill>
+                          <a:latin typeface="Calibri"/>
+                        </a:defRPr>
+                      </a:pPr>
+                      <a:r>
+                        <a:t>52.0%</a:t>
                       </a:r>
                     </a:p>
                   </a:txBody>
@@ -19824,15 +19800,39 @@
                     <a:lstStyle/>
                     <a:p>
                       <a:pPr algn="r">
-                        <a:defRPr sz="1300">
-                          <a:solidFill>
-                            <a:srgbClr val="2D2D3D"/>
-                          </a:solidFill>
-                          <a:latin typeface="Calibri"/>
-                        </a:defRPr>
-                      </a:pPr>
-                      <a:r>
-                        <a:t>2.6 pts</a:t>
+                        <a:defRPr sz="1200">
+                          <a:solidFill>
+                            <a:srgbClr val="2D2D3D"/>
+                          </a:solidFill>
+                          <a:latin typeface="Calibri"/>
+                        </a:defRPr>
+                      </a:pPr>
+                      <a:r>
+                        <a:t>39.3%</a:t>
+                      </a:r>
+                    </a:p>
+                  </a:txBody>
+                  <a:tcPr>
+                    <a:solidFill>
+                      <a:srgbClr val="FFFFFF"/>
+                    </a:solidFill>
+                  </a:tcPr>
+                </a:tc>
+                <a:tc>
+                  <a:txBody>
+                    <a:bodyPr/>
+                    <a:lstStyle/>
+                    <a:p>
+                      <a:pPr algn="r">
+                        <a:defRPr sz="1200">
+                          <a:solidFill>
+                            <a:srgbClr val="2D2D3D"/>
+                          </a:solidFill>
+                          <a:latin typeface="Calibri"/>
+                        </a:defRPr>
+                      </a:pPr>
+                      <a:r>
+                        <a:t>1.3×</a:t>
                       </a:r>
                     </a:p>
                   </a:txBody>
@@ -19878,11 +19878,11 @@
               </a:defRPr>
             </a:pPr>
             <a:r>
-              <a:t>HR = hazard rate model (fixed λ).  MC = Merton Monte Carlo (structural model with feedback).</a:t>
+              <a:t>HR 5Y PD = implied from market spread.  Hist 5Y PD = from historical annual default rate.</a:t>
             </a:r>
             <a:br/>
             <a:r>
-              <a:t>ΔPrice = PIK price minus Cash price.</a:t>
+              <a:t>Ratio = how much the market ‘overstates’ default risk vs historical experience.</a:t>
             </a:r>
           </a:p>
         </p:txBody>
@@ -19895,7 +19895,7 @@
         </p:nvSpPr>
         <p:spPr>
           <a:xfrm>
-            <a:off x="457200" y="3931920"/>
+            <a:off x="457200" y="4023360"/>
             <a:ext cx="8229600" cy="1371600"/>
           </a:xfrm>
           <a:prstGeom prst="rect">
@@ -19921,7 +19921,7 @@
               </a:defRPr>
             </a:pPr>
             <a:r>
-              <a:t>For BB+: the HR model says PIK trades 2.5 pts cheaper. The MC model says PIK trades 3 pts ABOVE cash. Sign reversal!</a:t>
+              <a:t>Market spreads embed a risk premium — compensation for bearing credit risk beyond expected losses. For BB+, the spread implies 7×the historical default rate</a:t>
             </a:r>
           </a:p>
           <a:p>
@@ -19937,7 +19937,7 @@
               </a:defRPr>
             </a:pPr>
             <a:r>
-              <a:t>For strong credits, defaults are rare enough that PIK compounding is a net benefit — a fact that the simple model entirely misses</a:t>
+              <a:t>The HR model uses market-implied hazard → PIK always costs. The MC model uses historical PDs for barriers → few defaults → PIK compounding survives → PIK appears to benefit investors</a:t>
             </a:r>
           </a:p>
           <a:p>
@@ -19953,7 +19953,7 @@
               </a:defRPr>
             </a:pPr>
             <a:r>
-              <a:t>For weak credits, both models agree PIK is cheaper, but the MC model captures the structural feedback that amplifies the penalty</a:t>
+              <a:t>The gap shrinks for weaker credits (1.3× for CCC) — the risk premium is a smaller fraction of the total spread</a:t>
             </a:r>
           </a:p>
         </p:txBody>
@@ -19966,14 +19966,14 @@
         </p:nvSpPr>
         <p:spPr>
           <a:xfrm>
-            <a:off x="1371600" y="5669280"/>
-            <a:ext cx="6400800" cy="548640"/>
+            <a:off x="914400" y="5669280"/>
+            <a:ext cx="7315200" cy="548640"/>
           </a:xfrm>
           <a:prstGeom prst="roundRect">
             <a:avLst/>
           </a:prstGeom>
           <a:solidFill>
-            <a:srgbClr val="E04F4F"/>
+            <a:srgbClr val="E88D3F"/>
           </a:solidFill>
           <a:ln>
             <a:noFill/>
@@ -19998,7 +19998,7 @@
           <a:lstStyle/>
           <a:p>
             <a:pPr algn="ctr">
-              <a:defRPr sz="1300" b="1">
+              <a:defRPr sz="1200" b="1">
                 <a:solidFill>
                   <a:srgbClr val="FFFFFF"/>
                 </a:solidFill>
@@ -20006,7 +20006,7 @@
               </a:defRPr>
             </a:pPr>
             <a:r>
-              <a:t>A flat hazard-rate model gets the SIGN wrong for investment-grade PIK, and understates the dynamics for stressed credits.</a:t>
+              <a:t>Whether PIK benefits investors for strong credits depends on which default measure you use. Both models agree the effect is small (±60bp) for strong credits and large (100–260bp) for weak ones.</a:t>
             </a:r>
           </a:p>
         </p:txBody>

--- a/finstack-py/examples/scripts/valuations/instruments/pik_coupon_pricing.pptx
+++ b/finstack-py/examples/scripts/valuations/instruments/pik_coupon_pricing.pptx
@@ -11088,7 +11088,7 @@
                         </a:defRPr>
                       </a:pPr>
                       <a:r>
-                        <a:t>HR ΔPrice</a:t>
+                        <a:t>HR ΔZ (bp)</a:t>
                       </a:r>
                     </a:p>
                   </a:txBody>
@@ -11112,7 +11112,7 @@
                         </a:defRPr>
                       </a:pPr>
                       <a:r>
-                        <a:t>MC ΔPrice</a:t>
+                        <a:t>MC ΔZ (bp)</a:t>
                       </a:r>
                     </a:p>
                   </a:txBody>
@@ -11234,7 +11234,7 @@
                         </a:defRPr>
                       </a:pPr>
                       <a:r>
-                        <a:t>−2.5</a:t>
+                        <a:t>+40</a:t>
                       </a:r>
                     </a:p>
                   </a:txBody>
@@ -11258,7 +11258,7 @@
                         </a:defRPr>
                       </a:pPr>
                       <a:r>
-                        <a:t>+3.0</a:t>
+                        <a:t>−59</a:t>
                       </a:r>
                     </a:p>
                   </a:txBody>
@@ -11380,7 +11380,7 @@
                         </a:defRPr>
                       </a:pPr>
                       <a:r>
-                        <a:t>−3.8</a:t>
+                        <a:t>+60</a:t>
                       </a:r>
                     </a:p>
                   </a:txBody>
@@ -11404,7 +11404,7 @@
                         </a:defRPr>
                       </a:pPr>
                       <a:r>
-                        <a:t>+1.1</a:t>
+                        <a:t>−22</a:t>
                       </a:r>
                     </a:p>
                   </a:txBody>
@@ -11452,7 +11452,7 @@
                         </a:defRPr>
                       </a:pPr>
                       <a:r>
-                        <a:t>5.8%</a:t>
+                        <a:t>9.1%</a:t>
                       </a:r>
                     </a:p>
                   </a:txBody>
@@ -11476,7 +11476,7 @@
                         </a:defRPr>
                       </a:pPr>
                       <a:r>
-                        <a:t>2.7×</a:t>
+                        <a:t>1.7×</a:t>
                       </a:r>
                     </a:p>
                   </a:txBody>
@@ -11526,7 +11526,7 @@
                         </a:defRPr>
                       </a:pPr>
                       <a:r>
-                        <a:t>−5.3</a:t>
+                        <a:t>+91</a:t>
                       </a:r>
                     </a:p>
                   </a:txBody>
@@ -11550,7 +11550,7 @@
                         </a:defRPr>
                       </a:pPr>
                       <a:r>
-                        <a:t>−1.6</a:t>
+                        <a:t>+37</a:t>
                       </a:r>
                     </a:p>
                   </a:txBody>
@@ -11598,7 +11598,7 @@
                         </a:defRPr>
                       </a:pPr>
                       <a:r>
-                        <a:t>13.2%</a:t>
+                        <a:t>20.8%</a:t>
                       </a:r>
                     </a:p>
                   </a:txBody>
@@ -11622,7 +11622,7 @@
                         </a:defRPr>
                       </a:pPr>
                       <a:r>
-                        <a:t>1.9×</a:t>
+                        <a:t>1.2×</a:t>
                       </a:r>
                     </a:p>
                   </a:txBody>
@@ -11672,7 +11672,7 @@
                         </a:defRPr>
                       </a:pPr>
                       <a:r>
-                        <a:t>−6.9</a:t>
+                        <a:t>+137</a:t>
                       </a:r>
                     </a:p>
                   </a:txBody>
@@ -11696,7 +11696,7 @@
                         </a:defRPr>
                       </a:pPr>
                       <a:r>
-                        <a:t>−4.9</a:t>
+                        <a:t>+141</a:t>
                       </a:r>
                     </a:p>
                   </a:txBody>
@@ -11744,7 +11744,7 @@
                         </a:defRPr>
                       </a:pPr>
                       <a:r>
-                        <a:t>25.7%</a:t>
+                        <a:t>41.1%</a:t>
                       </a:r>
                     </a:p>
                   </a:txBody>
@@ -11768,7 +11768,7 @@
                         </a:defRPr>
                       </a:pPr>
                       <a:r>
-                        <a:t>1.4×</a:t>
+                        <a:t>0.9×</a:t>
                       </a:r>
                     </a:p>
                   </a:txBody>
@@ -11818,7 +11818,7 @@
                         </a:defRPr>
                       </a:pPr>
                       <a:r>
-                        <a:t>−8.8</a:t>
+                        <a:t>+224</a:t>
                       </a:r>
                     </a:p>
                   </a:txBody>
@@ -11842,7 +11842,7 @@
                         </a:defRPr>
                       </a:pPr>
                       <a:r>
-                        <a:t>−6.2</a:t>
+                        <a:t>+262</a:t>
                       </a:r>
                     </a:p>
                   </a:txBody>
@@ -11890,7 +11890,7 @@
                         </a:defRPr>
                       </a:pPr>
                       <a:r>
-                        <a:t>42.3%</a:t>
+                        <a:t>65.0%</a:t>
                       </a:r>
                     </a:p>
                   </a:txBody>
@@ -11914,7 +11914,7 @@
                         </a:defRPr>
                       </a:pPr>
                       <a:r>
-                        <a:t>1.2×</a:t>
+                        <a:t>0.8×</a:t>
                       </a:r>
                     </a:p>
                   </a:txBody>
@@ -11960,7 +11960,7 @@
               </a:defRPr>
             </a:pPr>
             <a:r>
-              <a:t>ΔPrice = PIK minus Cash (points). HR 5Y PD = market-implied. MC DefRate = simulation default rate.</a:t>
+              <a:t>ΔZ = PIK Z-spread minus Cash Z-spread (bp). HR 5Y PD = market-implied. MC DefRate = simulation default rate.</a:t>
             </a:r>
           </a:p>
         </p:txBody>
@@ -11999,7 +11999,7 @@
               </a:defRPr>
             </a:pPr>
             <a:r>
-              <a:t>The HR model uses market-implied defaults (including risk premium) → PIK always costs. The MC model uses historical PDs for barriers → fewer defaults → PIK compounding survives</a:t>
+              <a:t>For BB+: HR says PIK costs +40bp; MC says PIK saves −59bp. The sign reversal is driven by the 3.6× gap in default assumptions — fewer MC defaults means PIK compounding survives on ~98% of paths</a:t>
             </a:r>
           </a:p>
           <a:p>
@@ -12015,7 +12015,7 @@
               </a:defRPr>
             </a:pPr>
             <a:r>
-              <a:t>For BB+: the HR model sees 3.6× more defaults than the MC model. This gap drives the sign reversal in PIK pricing</a:t>
+              <a:t>For B−/CCC: both models agree PIK costs +137–262bp. MC even exceeds HR for CCC (+262 vs +224bp) because the feedback loop stacks on top of barrier crossings</a:t>
             </a:r>
           </a:p>
           <a:p>
@@ -12031,23 +12031,7 @@
               </a:defRPr>
             </a:pPr>
             <a:r>
-              <a:t>For CCC: both models see similar default rates (ratio 1.2×). The PIK penalty is robust regardless of calibration</a:t>
-            </a:r>
-          </a:p>
-          <a:p>
-            <a:pPr>
-              <a:spcAft>
-                <a:spcPts val="800"/>
-              </a:spcAft>
-              <a:defRPr sz="1300">
-                <a:solidFill>
-                  <a:srgbClr val="2D2D3D"/>
-                </a:solidFill>
-                <a:latin typeface="Calibri"/>
-              </a:defRPr>
-            </a:pPr>
-            <a:r>
-              <a:t>The practical implication: for strong credits, the PIK premium/discount is small either way (±60bp). For weak credits, it's large (+100–260bp) and model choice barely matters</a:t>
+              <a:t>Both models agree where it matters most: PIK penalty is large for B and below (+37 to +262bp), and small/model-dependent for BB+ and BB− (±60bp)</a:t>
             </a:r>
           </a:p>
         </p:txBody>
@@ -18150,7 +18134,7 @@
                         </a:defRPr>
                       </a:pPr>
                       <a:r>
-                        <a:t>Δ Price</a:t>
+                        <a:t>ΔZ (bp)</a:t>
                       </a:r>
                     </a:p>
                   </a:txBody>
@@ -18248,7 +18232,7 @@
                         </a:defRPr>
                       </a:pPr>
                       <a:r>
-                        <a:t>110.89</a:t>
+                        <a:t>111.46</a:t>
                       </a:r>
                     </a:p>
                   </a:txBody>
@@ -18272,7 +18256,7 @@
                         </a:defRPr>
                       </a:pPr>
                       <a:r>
-                        <a:t>−2.46</a:t>
+                        <a:t>+40</a:t>
                       </a:r>
                     </a:p>
                   </a:txBody>
@@ -18370,7 +18354,7 @@
                         </a:defRPr>
                       </a:pPr>
                       <a:r>
-                        <a:t>103.76</a:t>
+                        <a:t>104.88</a:t>
                       </a:r>
                     </a:p>
                   </a:txBody>
@@ -18394,7 +18378,7 @@
                         </a:defRPr>
                       </a:pPr>
                       <a:r>
-                        <a:t>−3.80</a:t>
+                        <a:t>+60</a:t>
                       </a:r>
                     </a:p>
                   </a:txBody>
@@ -18492,7 +18476,7 @@
                         </a:defRPr>
                       </a:pPr>
                       <a:r>
-                        <a:t>94.44</a:t>
+                        <a:t>96.05</a:t>
                       </a:r>
                     </a:p>
                   </a:txBody>
@@ -18516,7 +18500,7 @@
                         </a:defRPr>
                       </a:pPr>
                       <a:r>
-                        <a:t>−5.32</a:t>
+                        <a:t>+91</a:t>
                       </a:r>
                     </a:p>
                   </a:txBody>
@@ -18614,7 +18598,7 @@
                         </a:defRPr>
                       </a:pPr>
                       <a:r>
-                        <a:t>83.45</a:t>
+                        <a:t>85.40</a:t>
                       </a:r>
                     </a:p>
                   </a:txBody>
@@ -18638,7 +18622,7 @@
                         </a:defRPr>
                       </a:pPr>
                       <a:r>
-                        <a:t>−6.88</a:t>
+                        <a:t>+137</a:t>
                       </a:r>
                     </a:p>
                   </a:txBody>
@@ -18736,7 +18720,7 @@
                         </a:defRPr>
                       </a:pPr>
                       <a:r>
-                        <a:t>67.34</a:t>
+                        <a:t>69.59</a:t>
                       </a:r>
                     </a:p>
                   </a:txBody>
@@ -18760,7 +18744,7 @@
                         </a:defRPr>
                       </a:pPr>
                       <a:r>
-                        <a:t>−8.79</a:t>
+                        <a:t>+224</a:t>
                       </a:r>
                     </a:p>
                   </a:txBody>
@@ -18825,7 +18809,7 @@
               </a:defRPr>
             </a:pPr>
             <a:r>
-              <a:t>The gap widens with credit risk: from −2.5 pts (BB+) to −8.8 pts (CCC)</a:t>
+              <a:t>ΔZ = cash-equivalent Z-spread difference: PIK trades +40bp wider (BB+) to +224bp wider (CCC) than a cash-pay bond</a:t>
             </a:r>
           </a:p>
           <a:p>

--- a/finstack-py/examples/scripts/valuations/instruments/pik_coupon_pricing.pptx
+++ b/finstack-py/examples/scripts/valuations/instruments/pik_coupon_pricing.pptx
@@ -3658,7 +3658,7 @@
               </a:defRPr>
             </a:pPr>
             <a:r>
-              <a:t>For strong credits (BB+): PIK premium is small (±60bp) and sign is model-dependent</a:t>
+              <a:t>For strong credits (BB+, 2.0× coverage): PIK premium is small (±60bp) and sign is model-dependent</a:t>
             </a:r>
           </a:p>
           <a:p>
@@ -3674,7 +3674,7 @@
               </a:defRPr>
             </a:pPr>
             <a:r>
-              <a:t>For stressed credits (CCC): PIK premium &gt; +260bp, robust across models</a:t>
+              <a:t>For stressed credits (CCC, 1.15× coverage): PIK premium &gt; +260bp, robust across models</a:t>
             </a:r>
           </a:p>
           <a:p>
@@ -3945,7 +3945,7 @@
         </p:nvGraphicFramePr>
         <p:xfrm>
           <a:off x="457200" y="1005840"/>
-          <a:ext cx="5029200" cy="1920239"/>
+          <a:ext cx="4937760" cy="1920239"/>
         </p:xfrm>
         <a:graphic>
           <a:graphicData uri="http://schemas.openxmlformats.org/drawingml/2006/table">
@@ -3954,11 +3954,12 @@
                 <a:tableStyleId>{5C22544A-7EE6-4342-B048-85BDC9FD1C3A}</a:tableStyleId>
               </a:tblPr>
               <a:tblGrid>
-                <a:gridCol w="1645920"/>
+                <a:gridCol w="1371600"/>
+                <a:gridCol w="457200"/>
                 <a:gridCol w="640080"/>
-                <a:gridCol w="914400"/>
-                <a:gridCol w="914400"/>
-                <a:gridCol w="914400"/>
+                <a:gridCol w="822960"/>
+                <a:gridCol w="822960"/>
+                <a:gridCol w="822960"/>
               </a:tblGrid>
               <a:tr h="320039">
                 <a:tc>
@@ -3999,7 +4000,7 @@
                         </a:defRPr>
                       </a:pPr>
                       <a:r>
-                        <a:t>λ (bp)</a:t>
+                        <a:t>LTV</a:t>
                       </a:r>
                     </a:p>
                   </a:txBody>
@@ -4023,7 +4024,7 @@
                         </a:defRPr>
                       </a:pPr>
                       <a:r>
-                        <a:t>Cash Price</a:t>
+                        <a:t>λ (bp)</a:t>
                       </a:r>
                     </a:p>
                   </a:txBody>
@@ -4047,7 +4048,7 @@
                         </a:defRPr>
                       </a:pPr>
                       <a:r>
-                        <a:t>PIK Price</a:t>
+                        <a:t>Cash Price</a:t>
                       </a:r>
                     </a:p>
                   </a:txBody>
@@ -4071,6 +4072,30 @@
                         </a:defRPr>
                       </a:pPr>
                       <a:r>
+                        <a:t>PIK Price</a:t>
+                      </a:r>
+                    </a:p>
+                  </a:txBody>
+                  <a:tcPr>
+                    <a:solidFill>
+                      <a:srgbClr val="2C3E6B"/>
+                    </a:solidFill>
+                  </a:tcPr>
+                </a:tc>
+                <a:tc>
+                  <a:txBody>
+                    <a:bodyPr/>
+                    <a:lstStyle/>
+                    <a:p>
+                      <a:pPr algn="ctr">
+                        <a:defRPr sz="1100" b="1">
+                          <a:solidFill>
+                            <a:srgbClr val="FFFFFF"/>
+                          </a:solidFill>
+                          <a:latin typeface="Calibri"/>
+                        </a:defRPr>
+                      </a:pPr>
+                      <a:r>
                         <a:t>ΔZ (bp)</a:t>
                       </a:r>
                     </a:p>
@@ -4121,7 +4146,7 @@
                         </a:defRPr>
                       </a:pPr>
                       <a:r>
-                        <a:t>143</a:t>
+                        <a:t>50%</a:t>
                       </a:r>
                     </a:p>
                   </a:txBody>
@@ -4145,7 +4170,7 @@
                         </a:defRPr>
                       </a:pPr>
                       <a:r>
-                        <a:t>113.35</a:t>
+                        <a:t>143</a:t>
                       </a:r>
                     </a:p>
                   </a:txBody>
@@ -4169,7 +4194,7 @@
                         </a:defRPr>
                       </a:pPr>
                       <a:r>
-                        <a:t>111.46</a:t>
+                        <a:t>113.35</a:t>
                       </a:r>
                     </a:p>
                   </a:txBody>
@@ -4193,6 +4218,30 @@
                         </a:defRPr>
                       </a:pPr>
                       <a:r>
+                        <a:t>111.46</a:t>
+                      </a:r>
+                    </a:p>
+                  </a:txBody>
+                  <a:tcPr>
+                    <a:solidFill>
+                      <a:srgbClr val="FFFFFF"/>
+                    </a:solidFill>
+                  </a:tcPr>
+                </a:tc>
+                <a:tc>
+                  <a:txBody>
+                    <a:bodyPr/>
+                    <a:lstStyle/>
+                    <a:p>
+                      <a:pPr algn="r">
+                        <a:defRPr sz="1100">
+                          <a:solidFill>
+                            <a:srgbClr val="2D2D3D"/>
+                          </a:solidFill>
+                          <a:latin typeface="Calibri"/>
+                        </a:defRPr>
+                      </a:pPr>
+                      <a:r>
                         <a:t>+40</a:t>
                       </a:r>
                     </a:p>
@@ -4243,7 +4292,7 @@
                         </a:defRPr>
                       </a:pPr>
                       <a:r>
-                        <a:t>334</a:t>
+                        <a:t>61%</a:t>
                       </a:r>
                     </a:p>
                   </a:txBody>
@@ -4267,7 +4316,7 @@
                         </a:defRPr>
                       </a:pPr>
                       <a:r>
-                        <a:t>107.56</a:t>
+                        <a:t>334</a:t>
                       </a:r>
                     </a:p>
                   </a:txBody>
@@ -4291,7 +4340,7 @@
                         </a:defRPr>
                       </a:pPr>
                       <a:r>
-                        <a:t>104.88</a:t>
+                        <a:t>107.56</a:t>
                       </a:r>
                     </a:p>
                   </a:txBody>
@@ -4315,6 +4364,30 @@
                         </a:defRPr>
                       </a:pPr>
                       <a:r>
+                        <a:t>104.88</a:t>
+                      </a:r>
+                    </a:p>
+                  </a:txBody>
+                  <a:tcPr>
+                    <a:solidFill>
+                      <a:srgbClr val="E8EBF5"/>
+                    </a:solidFill>
+                  </a:tcPr>
+                </a:tc>
+                <a:tc>
+                  <a:txBody>
+                    <a:bodyPr/>
+                    <a:lstStyle/>
+                    <a:p>
+                      <a:pPr algn="r">
+                        <a:defRPr sz="1100">
+                          <a:solidFill>
+                            <a:srgbClr val="2D2D3D"/>
+                          </a:solidFill>
+                          <a:latin typeface="Calibri"/>
+                        </a:defRPr>
+                      </a:pPr>
+                      <a:r>
                         <a:t>+60</a:t>
                       </a:r>
                     </a:p>
@@ -4365,7 +4438,7 @@
                         </a:defRPr>
                       </a:pPr>
                       <a:r>
-                        <a:t>591</a:t>
+                        <a:t>71%</a:t>
                       </a:r>
                     </a:p>
                   </a:txBody>
@@ -4389,7 +4462,7 @@
                         </a:defRPr>
                       </a:pPr>
                       <a:r>
-                        <a:t>99.76</a:t>
+                        <a:t>591</a:t>
                       </a:r>
                     </a:p>
                   </a:txBody>
@@ -4413,7 +4486,7 @@
                         </a:defRPr>
                       </a:pPr>
                       <a:r>
-                        <a:t>96.05</a:t>
+                        <a:t>99.76</a:t>
                       </a:r>
                     </a:p>
                   </a:txBody>
@@ -4437,6 +4510,30 @@
                         </a:defRPr>
                       </a:pPr>
                       <a:r>
+                        <a:t>96.05</a:t>
+                      </a:r>
+                    </a:p>
+                  </a:txBody>
+                  <a:tcPr>
+                    <a:solidFill>
+                      <a:srgbClr val="FFFFFF"/>
+                    </a:solidFill>
+                  </a:tcPr>
+                </a:tc>
+                <a:tc>
+                  <a:txBody>
+                    <a:bodyPr/>
+                    <a:lstStyle/>
+                    <a:p>
+                      <a:pPr algn="r">
+                        <a:defRPr sz="1100">
+                          <a:solidFill>
+                            <a:srgbClr val="2D2D3D"/>
+                          </a:solidFill>
+                          <a:latin typeface="Calibri"/>
+                        </a:defRPr>
+                      </a:pPr>
+                      <a:r>
                         <a:t>+91</a:t>
                       </a:r>
                     </a:p>
@@ -4487,7 +4584,7 @@
                         </a:defRPr>
                       </a:pPr>
                       <a:r>
-                        <a:t>911</a:t>
+                        <a:t>80%</a:t>
                       </a:r>
                     </a:p>
                   </a:txBody>
@@ -4511,7 +4608,7 @@
                         </a:defRPr>
                       </a:pPr>
                       <a:r>
-                        <a:t>90.33</a:t>
+                        <a:t>911</a:t>
                       </a:r>
                     </a:p>
                   </a:txBody>
@@ -4535,7 +4632,7 @@
                         </a:defRPr>
                       </a:pPr>
                       <a:r>
-                        <a:t>85.40</a:t>
+                        <a:t>90.33</a:t>
                       </a:r>
                     </a:p>
                   </a:txBody>
@@ -4559,6 +4656,30 @@
                         </a:defRPr>
                       </a:pPr>
                       <a:r>
+                        <a:t>85.40</a:t>
+                      </a:r>
+                    </a:p>
+                  </a:txBody>
+                  <a:tcPr>
+                    <a:solidFill>
+                      <a:srgbClr val="E8EBF5"/>
+                    </a:solidFill>
+                  </a:tcPr>
+                </a:tc>
+                <a:tc>
+                  <a:txBody>
+                    <a:bodyPr/>
+                    <a:lstStyle/>
+                    <a:p>
+                      <a:pPr algn="r">
+                        <a:defRPr sz="1100">
+                          <a:solidFill>
+                            <a:srgbClr val="2D2D3D"/>
+                          </a:solidFill>
+                          <a:latin typeface="Calibri"/>
+                        </a:defRPr>
+                      </a:pPr>
+                      <a:r>
                         <a:t>+137</a:t>
                       </a:r>
                     </a:p>
@@ -4586,6 +4707,30 @@
                       </a:pPr>
                       <a:r>
                         <a:t>CCC (Deeply Stressed)</a:t>
+                      </a:r>
+                    </a:p>
+                  </a:txBody>
+                  <a:tcPr>
+                    <a:solidFill>
+                      <a:srgbClr val="FFFFFF"/>
+                    </a:solidFill>
+                  </a:tcPr>
+                </a:tc>
+                <a:tc>
+                  <a:txBody>
+                    <a:bodyPr/>
+                    <a:lstStyle/>
+                    <a:p>
+                      <a:pPr algn="r">
+                        <a:defRPr sz="1100">
+                          <a:solidFill>
+                            <a:srgbClr val="2D2D3D"/>
+                          </a:solidFill>
+                          <a:latin typeface="Calibri"/>
+                        </a:defRPr>
+                      </a:pPr>
+                      <a:r>
+                        <a:t>87%</a:t>
                       </a:r>
                     </a:p>
                   </a:txBody>
@@ -4751,10 +4896,11 @@
                 <a:tableStyleId>{5C22544A-7EE6-4342-B048-85BDC9FD1C3A}</a:tableStyleId>
               </a:tblPr>
               <a:tblGrid>
-                <a:gridCol w="640080"/>
-                <a:gridCol w="822960"/>
-                <a:gridCol w="822960"/>
-                <a:gridCol w="640080"/>
+                <a:gridCol w="457200"/>
+                <a:gridCol w="457200"/>
+                <a:gridCol w="731520"/>
+                <a:gridCol w="731520"/>
+                <a:gridCol w="548640"/>
               </a:tblGrid>
               <a:tr h="320040">
                 <a:tc>
@@ -4795,7 +4941,7 @@
                         </a:defRPr>
                       </a:pPr>
                       <a:r>
-                        <a:t>HR 5Y PD</a:t>
+                        <a:t>LTV</a:t>
                       </a:r>
                     </a:p>
                   </a:txBody>
@@ -4819,7 +4965,7 @@
                         </a:defRPr>
                       </a:pPr>
                       <a:r>
-                        <a:t>Hist 5Y PD</a:t>
+                        <a:t>HR 5Y PD</a:t>
                       </a:r>
                     </a:p>
                   </a:txBody>
@@ -4843,6 +4989,30 @@
                         </a:defRPr>
                       </a:pPr>
                       <a:r>
+                        <a:t>Hist 5Y PD</a:t>
+                      </a:r>
+                    </a:p>
+                  </a:txBody>
+                  <a:tcPr>
+                    <a:solidFill>
+                      <a:srgbClr val="2C3E6B"/>
+                    </a:solidFill>
+                  </a:tcPr>
+                </a:tc>
+                <a:tc>
+                  <a:txBody>
+                    <a:bodyPr/>
+                    <a:lstStyle/>
+                    <a:p>
+                      <a:pPr algn="ctr">
+                        <a:defRPr sz="1000" b="1">
+                          <a:solidFill>
+                            <a:srgbClr val="FFFFFF"/>
+                          </a:solidFill>
+                          <a:latin typeface="Calibri"/>
+                        </a:defRPr>
+                      </a:pPr>
+                      <a:r>
                         <a:t>Ratio</a:t>
                       </a:r>
                     </a:p>
@@ -4893,7 +5063,7 @@
                         </a:defRPr>
                       </a:pPr>
                       <a:r>
-                        <a:t>6.9%</a:t>
+                        <a:t>50%</a:t>
                       </a:r>
                     </a:p>
                   </a:txBody>
@@ -4917,7 +5087,7 @@
                         </a:defRPr>
                       </a:pPr>
                       <a:r>
-                        <a:t>1.0%</a:t>
+                        <a:t>6.9%</a:t>
                       </a:r>
                     </a:p>
                   </a:txBody>
@@ -4941,6 +5111,30 @@
                         </a:defRPr>
                       </a:pPr>
                       <a:r>
+                        <a:t>1.0%</a:t>
+                      </a:r>
+                    </a:p>
+                  </a:txBody>
+                  <a:tcPr>
+                    <a:solidFill>
+                      <a:srgbClr val="FFFFFF"/>
+                    </a:solidFill>
+                  </a:tcPr>
+                </a:tc>
+                <a:tc>
+                  <a:txBody>
+                    <a:bodyPr/>
+                    <a:lstStyle/>
+                    <a:p>
+                      <a:pPr algn="r">
+                        <a:defRPr sz="1000">
+                          <a:solidFill>
+                            <a:srgbClr val="2D2D3D"/>
+                          </a:solidFill>
+                          <a:latin typeface="Calibri"/>
+                        </a:defRPr>
+                      </a:pPr>
+                      <a:r>
                         <a:t>6.9×</a:t>
                       </a:r>
                     </a:p>
@@ -4991,7 +5185,7 @@
                         </a:defRPr>
                       </a:pPr>
                       <a:r>
-                        <a:t>25.6%</a:t>
+                        <a:t>71%</a:t>
                       </a:r>
                     </a:p>
                   </a:txBody>
@@ -5015,7 +5209,7 @@
                         </a:defRPr>
                       </a:pPr>
                       <a:r>
-                        <a:t>11.8%</a:t>
+                        <a:t>25.6%</a:t>
                       </a:r>
                     </a:p>
                   </a:txBody>
@@ -5039,6 +5233,30 @@
                         </a:defRPr>
                       </a:pPr>
                       <a:r>
+                        <a:t>11.8%</a:t>
+                      </a:r>
+                    </a:p>
+                  </a:txBody>
+                  <a:tcPr>
+                    <a:solidFill>
+                      <a:srgbClr val="E8EBF5"/>
+                    </a:solidFill>
+                  </a:tcPr>
+                </a:tc>
+                <a:tc>
+                  <a:txBody>
+                    <a:bodyPr/>
+                    <a:lstStyle/>
+                    <a:p>
+                      <a:pPr algn="r">
+                        <a:defRPr sz="1000">
+                          <a:solidFill>
+                            <a:srgbClr val="2D2D3D"/>
+                          </a:solidFill>
+                          <a:latin typeface="Calibri"/>
+                        </a:defRPr>
+                      </a:pPr>
+                      <a:r>
                         <a:t>2.2×</a:t>
                       </a:r>
                     </a:p>
@@ -5066,6 +5284,30 @@
                       </a:pPr>
                       <a:r>
                         <a:t>CCC</a:t>
+                      </a:r>
+                    </a:p>
+                  </a:txBody>
+                  <a:tcPr>
+                    <a:solidFill>
+                      <a:srgbClr val="FFFFFF"/>
+                    </a:solidFill>
+                  </a:tcPr>
+                </a:tc>
+                <a:tc>
+                  <a:txBody>
+                    <a:bodyPr/>
+                    <a:lstStyle/>
+                    <a:p>
+                      <a:pPr algn="r">
+                        <a:defRPr sz="1000">
+                          <a:solidFill>
+                            <a:srgbClr val="2D2D3D"/>
+                          </a:solidFill>
+                          <a:latin typeface="Calibri"/>
+                        </a:defRPr>
+                      </a:pPr>
+                      <a:r>
+                        <a:t>87%</a:t>
                       </a:r>
                     </a:p>
                   </a:txBody>
@@ -5160,7 +5402,43 @@
         </p:nvSpPr>
         <p:spPr>
           <a:xfrm>
-            <a:off x="457200" y="3474720"/>
+            <a:off x="457200" y="3246120"/>
+            <a:ext cx="5029200" cy="228600"/>
+          </a:xfrm>
+          <a:prstGeom prst="rect">
+            <a:avLst/>
+          </a:prstGeom>
+          <a:noFill/>
+        </p:spPr>
+        <p:txBody>
+          <a:bodyPr wrap="square">
+            <a:spAutoFit/>
+          </a:bodyPr>
+          <a:lstStyle/>
+          <a:p>
+            <a:pPr algn="l">
+              <a:defRPr sz="900" b="0">
+                <a:solidFill>
+                  <a:srgbClr val="555570"/>
+                </a:solidFill>
+                <a:latin typeface="Calibri"/>
+              </a:defRPr>
+            </a:pPr>
+            <a:r>
+              <a:t>LTV = Debt / Enterprise Value at origination</a:t>
+            </a:r>
+          </a:p>
+        </p:txBody>
+      </p:sp>
+      <p:sp>
+        <p:nvSpPr>
+          <p:cNvPr id="10" name="TextBox 9"/>
+          <p:cNvSpPr txBox="1"/>
+          <p:nvPr/>
+        </p:nvSpPr>
+        <p:spPr>
+          <a:xfrm>
+            <a:off x="457200" y="3566160"/>
             <a:ext cx="8229600" cy="1371600"/>
           </a:xfrm>
           <a:prstGeom prst="rect">
@@ -5186,7 +5464,7 @@
               </a:defRPr>
             </a:pPr>
             <a:r>
-              <a:t>Under risk-neutral hazard rates, PIK always trades wider: +40bp (BB+) to +224bp (CCC). The concentrated maturity exposure penalises PIK at every credit level</a:t>
+              <a:t>Under risk-neutral hazard rates, PIK always trades wider: +40bp at 50% LTV (BB+) to +224bp at 87% LTV (CCC). Concentrated maturity exposure penalises PIK at every level</a:t>
             </a:r>
           </a:p>
           <a:p>
@@ -5202,20 +5480,20 @@
               </a:defRPr>
             </a:pPr>
             <a:r>
-              <a:t>But market spreads embed a risk premium above expected losses. For BB+ the spread implies 7× the historical default rate — the PIK penalty may be overstated for strong credits</a:t>
-            </a:r>
-          </a:p>
-        </p:txBody>
-      </p:sp>
-      <p:sp>
-        <p:nvSpPr>
-          <p:cNvPr id="10" name="Rounded Rectangle 9"/>
+              <a:t>But market spreads embed a risk premium above expected losses. At 50% LTV the spread implies 7× the historical default rate — the PIK penalty may be overstated for low-LTV credits</a:t>
+            </a:r>
+          </a:p>
+        </p:txBody>
+      </p:sp>
+      <p:sp>
+        <p:nvSpPr>
+          <p:cNvPr id="11" name="Rounded Rectangle 10"/>
           <p:cNvSpPr/>
           <p:nvPr/>
         </p:nvSpPr>
         <p:spPr>
           <a:xfrm>
-            <a:off x="914400" y="5029200"/>
+            <a:off x="914400" y="5120640"/>
             <a:ext cx="7315200" cy="594360"/>
           </a:xfrm>
           <a:prstGeom prst="roundRect">
@@ -6009,7 +6287,7 @@
         </p:nvGraphicFramePr>
         <p:xfrm>
           <a:off x="457200" y="2788920"/>
-          <a:ext cx="7223760" cy="1920239"/>
+          <a:ext cx="6858000" cy="1920239"/>
         </p:xfrm>
         <a:graphic>
           <a:graphicData uri="http://schemas.openxmlformats.org/drawingml/2006/table">
@@ -6018,12 +6296,13 @@
                 <a:tableStyleId>{5C22544A-7EE6-4342-B048-85BDC9FD1C3A}</a:tableStyleId>
               </a:tblPr>
               <a:tblGrid>
-                <a:gridCol w="2011680"/>
+                <a:gridCol w="1645920"/>
+                <a:gridCol w="457200"/>
+                <a:gridCol w="914400"/>
+                <a:gridCol w="914400"/>
+                <a:gridCol w="914400"/>
                 <a:gridCol w="1005840"/>
                 <a:gridCol w="1005840"/>
-                <a:gridCol w="1005840"/>
-                <a:gridCol w="1097280"/>
-                <a:gridCol w="1097280"/>
               </a:tblGrid>
               <a:tr h="320039">
                 <a:tc>
@@ -6064,7 +6343,7 @@
                         </a:defRPr>
                       </a:pPr>
                       <a:r>
-                        <a:t>Cash</a:t>
+                        <a:t>LTV</a:t>
                       </a:r>
                     </a:p>
                   </a:txBody>
@@ -6088,7 +6367,7 @@
                         </a:defRPr>
                       </a:pPr>
                       <a:r>
-                        <a:t>PIK</a:t>
+                        <a:t>Cash</a:t>
                       </a:r>
                     </a:p>
                   </a:txBody>
@@ -6112,7 +6391,7 @@
                         </a:defRPr>
                       </a:pPr>
                       <a:r>
-                        <a:t>Toggle</a:t>
+                        <a:t>PIK</a:t>
                       </a:r>
                     </a:p>
                   </a:txBody>
@@ -6136,7 +6415,7 @@
                         </a:defRPr>
                       </a:pPr>
                       <a:r>
-                        <a:t>PIK−Cash</a:t>
+                        <a:t>Toggle</a:t>
                       </a:r>
                     </a:p>
                   </a:txBody>
@@ -6160,6 +6439,30 @@
                         </a:defRPr>
                       </a:pPr>
                       <a:r>
+                        <a:t>PIK−Cash</a:t>
+                      </a:r>
+                    </a:p>
+                  </a:txBody>
+                  <a:tcPr>
+                    <a:solidFill>
+                      <a:srgbClr val="2C3E6B"/>
+                    </a:solidFill>
+                  </a:tcPr>
+                </a:tc>
+                <a:tc>
+                  <a:txBody>
+                    <a:bodyPr/>
+                    <a:lstStyle/>
+                    <a:p>
+                      <a:pPr algn="ctr">
+                        <a:defRPr sz="1100" b="1">
+                          <a:solidFill>
+                            <a:srgbClr val="FFFFFF"/>
+                          </a:solidFill>
+                          <a:latin typeface="Calibri"/>
+                        </a:defRPr>
+                      </a:pPr>
+                      <a:r>
                         <a:t>Tog−Cash</a:t>
                       </a:r>
                     </a:p>
@@ -6210,7 +6513,7 @@
                         </a:defRPr>
                       </a:pPr>
                       <a:r>
-                        <a:t>20bp</a:t>
+                        <a:t>50%</a:t>
                       </a:r>
                     </a:p>
                   </a:txBody>
@@ -6234,7 +6537,7 @@
                         </a:defRPr>
                       </a:pPr>
                       <a:r>
-                        <a:t>−39bp</a:t>
+                        <a:t>20bp</a:t>
                       </a:r>
                     </a:p>
                   </a:txBody>
@@ -6258,7 +6561,7 @@
                         </a:defRPr>
                       </a:pPr>
                       <a:r>
-                        <a:t>22bp</a:t>
+                        <a:t>−39bp</a:t>
                       </a:r>
                     </a:p>
                   </a:txBody>
@@ -6282,7 +6585,7 @@
                         </a:defRPr>
                       </a:pPr>
                       <a:r>
-                        <a:t>−59</a:t>
+                        <a:t>22bp</a:t>
                       </a:r>
                     </a:p>
                   </a:txBody>
@@ -6306,6 +6609,30 @@
                         </a:defRPr>
                       </a:pPr>
                       <a:r>
+                        <a:t>−59</a:t>
+                      </a:r>
+                    </a:p>
+                  </a:txBody>
+                  <a:tcPr>
+                    <a:solidFill>
+                      <a:srgbClr val="FFFFFF"/>
+                    </a:solidFill>
+                  </a:tcPr>
+                </a:tc>
+                <a:tc>
+                  <a:txBody>
+                    <a:bodyPr/>
+                    <a:lstStyle/>
+                    <a:p>
+                      <a:pPr algn="r">
+                        <a:defRPr sz="1100">
+                          <a:solidFill>
+                            <a:srgbClr val="2D2D3D"/>
+                          </a:solidFill>
+                          <a:latin typeface="Calibri"/>
+                        </a:defRPr>
+                      </a:pPr>
+                      <a:r>
                         <a:t>+1</a:t>
                       </a:r>
                     </a:p>
@@ -6356,7 +6683,7 @@
                         </a:defRPr>
                       </a:pPr>
                       <a:r>
-                        <a:t>110bp</a:t>
+                        <a:t>61%</a:t>
                       </a:r>
                     </a:p>
                   </a:txBody>
@@ -6380,7 +6707,7 @@
                         </a:defRPr>
                       </a:pPr>
                       <a:r>
-                        <a:t>88bp</a:t>
+                        <a:t>110bp</a:t>
                       </a:r>
                     </a:p>
                   </a:txBody>
@@ -6404,7 +6731,7 @@
                         </a:defRPr>
                       </a:pPr>
                       <a:r>
-                        <a:t>130bp</a:t>
+                        <a:t>88bp</a:t>
                       </a:r>
                     </a:p>
                   </a:txBody>
@@ -6428,7 +6755,7 @@
                         </a:defRPr>
                       </a:pPr>
                       <a:r>
-                        <a:t>−22</a:t>
+                        <a:t>130bp</a:t>
                       </a:r>
                     </a:p>
                   </a:txBody>
@@ -6452,6 +6779,30 @@
                         </a:defRPr>
                       </a:pPr>
                       <a:r>
+                        <a:t>−22</a:t>
+                      </a:r>
+                    </a:p>
+                  </a:txBody>
+                  <a:tcPr>
+                    <a:solidFill>
+                      <a:srgbClr val="E8EBF5"/>
+                    </a:solidFill>
+                  </a:tcPr>
+                </a:tc>
+                <a:tc>
+                  <a:txBody>
+                    <a:bodyPr/>
+                    <a:lstStyle/>
+                    <a:p>
+                      <a:pPr algn="r">
+                        <a:defRPr sz="1100">
+                          <a:solidFill>
+                            <a:srgbClr val="2D2D3D"/>
+                          </a:solidFill>
+                          <a:latin typeface="Calibri"/>
+                        </a:defRPr>
+                      </a:pPr>
+                      <a:r>
                         <a:t>+20</a:t>
                       </a:r>
                     </a:p>
@@ -6502,7 +6853,7 @@
                         </a:defRPr>
                       </a:pPr>
                       <a:r>
-                        <a:t>292bp</a:t>
+                        <a:t>71%</a:t>
                       </a:r>
                     </a:p>
                   </a:txBody>
@@ -6526,7 +6877,7 @@
                         </a:defRPr>
                       </a:pPr>
                       <a:r>
-                        <a:t>329bp</a:t>
+                        <a:t>292bp</a:t>
                       </a:r>
                     </a:p>
                   </a:txBody>
@@ -6550,7 +6901,7 @@
                         </a:defRPr>
                       </a:pPr>
                       <a:r>
-                        <a:t>346bp</a:t>
+                        <a:t>329bp</a:t>
                       </a:r>
                     </a:p>
                   </a:txBody>
@@ -6574,7 +6925,7 @@
                         </a:defRPr>
                       </a:pPr>
                       <a:r>
-                        <a:t>+37</a:t>
+                        <a:t>346bp</a:t>
                       </a:r>
                     </a:p>
                   </a:txBody>
@@ -6598,6 +6949,30 @@
                         </a:defRPr>
                       </a:pPr>
                       <a:r>
+                        <a:t>+37</a:t>
+                      </a:r>
+                    </a:p>
+                  </a:txBody>
+                  <a:tcPr>
+                    <a:solidFill>
+                      <a:srgbClr val="FFFFFF"/>
+                    </a:solidFill>
+                  </a:tcPr>
+                </a:tc>
+                <a:tc>
+                  <a:txBody>
+                    <a:bodyPr/>
+                    <a:lstStyle/>
+                    <a:p>
+                      <a:pPr algn="r">
+                        <a:defRPr sz="1100">
+                          <a:solidFill>
+                            <a:srgbClr val="2D2D3D"/>
+                          </a:solidFill>
+                          <a:latin typeface="Calibri"/>
+                        </a:defRPr>
+                      </a:pPr>
+                      <a:r>
                         <a:t>+54</a:t>
                       </a:r>
                     </a:p>
@@ -6648,7 +7023,7 @@
                         </a:defRPr>
                       </a:pPr>
                       <a:r>
-                        <a:t>710bp</a:t>
+                        <a:t>80%</a:t>
                       </a:r>
                     </a:p>
                   </a:txBody>
@@ -6672,7 +7047,7 @@
                         </a:defRPr>
                       </a:pPr>
                       <a:r>
-                        <a:t>851bp</a:t>
+                        <a:t>710bp</a:t>
                       </a:r>
                     </a:p>
                   </a:txBody>
@@ -6696,7 +7071,7 @@
                         </a:defRPr>
                       </a:pPr>
                       <a:r>
-                        <a:t>862bp</a:t>
+                        <a:t>851bp</a:t>
                       </a:r>
                     </a:p>
                   </a:txBody>
@@ -6720,7 +7095,7 @@
                         </a:defRPr>
                       </a:pPr>
                       <a:r>
-                        <a:t>+141</a:t>
+                        <a:t>862bp</a:t>
                       </a:r>
                     </a:p>
                   </a:txBody>
@@ -6744,6 +7119,30 @@
                         </a:defRPr>
                       </a:pPr>
                       <a:r>
+                        <a:t>+141</a:t>
+                      </a:r>
+                    </a:p>
+                  </a:txBody>
+                  <a:tcPr>
+                    <a:solidFill>
+                      <a:srgbClr val="E8EBF5"/>
+                    </a:solidFill>
+                  </a:tcPr>
+                </a:tc>
+                <a:tc>
+                  <a:txBody>
+                    <a:bodyPr/>
+                    <a:lstStyle/>
+                    <a:p>
+                      <a:pPr algn="r">
+                        <a:defRPr sz="1100">
+                          <a:solidFill>
+                            <a:srgbClr val="2D2D3D"/>
+                          </a:solidFill>
+                          <a:latin typeface="Calibri"/>
+                        </a:defRPr>
+                      </a:pPr>
+                      <a:r>
                         <a:t>+151</a:t>
                       </a:r>
                     </a:p>
@@ -6771,6 +7170,30 @@
                       </a:pPr>
                       <a:r>
                         <a:t>CCC (Deeply Stressed)</a:t>
+                      </a:r>
+                    </a:p>
+                  </a:txBody>
+                  <a:tcPr>
+                    <a:solidFill>
+                      <a:srgbClr val="FFFFFF"/>
+                    </a:solidFill>
+                  </a:tcPr>
+                </a:tc>
+                <a:tc>
+                  <a:txBody>
+                    <a:bodyPr/>
+                    <a:lstStyle/>
+                    <a:p>
+                      <a:pPr algn="r">
+                        <a:defRPr sz="1100">
+                          <a:solidFill>
+                            <a:srgbClr val="2D2D3D"/>
+                          </a:solidFill>
+                          <a:latin typeface="Calibri"/>
+                        </a:defRPr>
+                      </a:pPr>
+                      <a:r>
+                        <a:t>87%</a:t>
                       </a:r>
                     </a:p>
                   </a:txBody>
@@ -6939,7 +7362,7 @@
               </a:defRPr>
             </a:pPr>
             <a:r>
-              <a:t>BB+/BB−: MC shows PIK tighter (−59/−22bp) — under historical PDs, PIK compounding survives on ~98% of paths</a:t>
+              <a:t>At 50–61% LTV: MC shows PIK tighter (−59/−22bp) — under historical PDs, PIK compounding survives on ~98% of paths</a:t>
             </a:r>
           </a:p>
           <a:p>
@@ -6955,7 +7378,7 @@
               </a:defRPr>
             </a:pPr>
             <a:r>
-              <a:t>B− to CCC: PIK premium +141 to +262bp — the feedback loop dominates and both models agree</a:t>
+              <a:t>At 80–87% LTV: PIK premium +141 to +262bp — the feedback loop dominates and both models agree</a:t>
             </a:r>
           </a:p>
         </p:txBody>
@@ -9193,7 +9616,7 @@
               </a:defRPr>
             </a:pPr>
             <a:r>
-              <a:t>Mkt spread &lt; 300bp</a:t>
+              <a:t>LTV &lt; 65%  |  Mkt spread &lt; 300bp</a:t>
             </a:r>
             <a:br/>
             <a:r>
@@ -9286,7 +9709,7 @@
               </a:defRPr>
             </a:pPr>
             <a:r>
-              <a:t>300–500bp market spread</a:t>
+              <a:t>LTV 65–75%  |  300–500bp spread</a:t>
             </a:r>
             <a:br/>
             <a:r>
@@ -9379,7 +9802,7 @@
               </a:defRPr>
             </a:pPr>
             <a:r>
-              <a:t>Mkt spread &gt; 500bp</a:t>
+              <a:t>LTV &gt; 75%  |  Mkt spread &gt; 500bp</a:t>
             </a:r>
             <a:br/>
             <a:r>
@@ -9450,7 +9873,7 @@
                         </a:defRPr>
                       </a:pPr>
                       <a:r>
-                        <a:t>BB+</a:t>
+                        <a:t>BB+ (50%)</a:t>
                       </a:r>
                     </a:p>
                   </a:txBody>
@@ -9474,7 +9897,7 @@
                         </a:defRPr>
                       </a:pPr>
                       <a:r>
-                        <a:t>BB−</a:t>
+                        <a:t>BB− (61%)</a:t>
                       </a:r>
                     </a:p>
                   </a:txBody>
@@ -9498,7 +9921,7 @@
                         </a:defRPr>
                       </a:pPr>
                       <a:r>
-                        <a:t>B</a:t>
+                        <a:t>B (71%)</a:t>
                       </a:r>
                     </a:p>
                   </a:txBody>
@@ -9522,7 +9945,7 @@
                         </a:defRPr>
                       </a:pPr>
                       <a:r>
-                        <a:t>B−</a:t>
+                        <a:t>B− (80%)</a:t>
                       </a:r>
                     </a:p>
                   </a:txBody>
@@ -9546,7 +9969,7 @@
                         </a:defRPr>
                       </a:pPr>
                       <a:r>
-                        <a:t>CCC</a:t>
+                        <a:t>CCC (87%)</a:t>
                       </a:r>
                     </a:p>
                   </a:txBody>
@@ -10202,7 +10625,7 @@
               </a:defRPr>
             </a:pPr>
             <a:r>
-              <a:t>For strong credits (BB+/BB−), the premium is small (±60bp) and model-dependent. For stressed credits (CCC), it exceeds +260bp and is robust across models.</a:t>
+              <a:t>For strong credits (BB+/BB−, 2.0× coverage), the premium is small (±60bp) and model-dependent. For stressed credits (CCC, 1.15× coverage), it exceeds +260bp and is robust across models.</a:t>
             </a:r>
           </a:p>
         </p:txBody>
@@ -10414,7 +10837,7 @@
               </a:defRPr>
             </a:pPr>
             <a:r>
-              <a:t>Above ~400bp market spread, structural modelling is essential</a:t>
+              <a:t>Above ~75% LTV (~400bp spread), structural modelling is essential</a:t>
             </a:r>
           </a:p>
         </p:txBody>
@@ -10557,17 +10980,6 @@
                         <a:t>Low Impact</a:t>
                       </a:r>
                     </a:p>
-                  </a:txBody>
-                  <a:tcPr>
-                    <a:solidFill>
-                      <a:srgbClr val="4EC9B0"/>
-                    </a:solidFill>
-                  </a:tcPr>
-                </a:tc>
-                <a:tc>
-                  <a:txBody>
-                    <a:bodyPr/>
-                    <a:lstStyle/>
                     <a:p>
                       <a:pPr algn="ctr">
                         <a:defRPr sz="1000" b="1">
@@ -10578,7 +10990,7 @@
                         </a:defRPr>
                       </a:pPr>
                       <a:r>
-                        <a:t>Crossover</a:t>
+                        <a:t>(LTV &lt; 65%)</a:t>
                       </a:r>
                     </a:p>
                   </a:txBody>
@@ -10602,7 +11014,57 @@
                         </a:defRPr>
                       </a:pPr>
                       <a:r>
+                        <a:t>Crossover</a:t>
+                      </a:r>
+                    </a:p>
+                    <a:p>
+                      <a:pPr algn="ctr">
+                        <a:defRPr sz="1000" b="1">
+                          <a:solidFill>
+                            <a:srgbClr val="FFFFFF"/>
+                          </a:solidFill>
+                          <a:latin typeface="Calibri"/>
+                        </a:defRPr>
+                      </a:pPr>
+                      <a:r>
+                        <a:t>(LTV 65–75%)</a:t>
+                      </a:r>
+                    </a:p>
+                  </a:txBody>
+                  <a:tcPr>
+                    <a:solidFill>
+                      <a:srgbClr val="4EC9B0"/>
+                    </a:solidFill>
+                  </a:tcPr>
+                </a:tc>
+                <a:tc>
+                  <a:txBody>
+                    <a:bodyPr/>
+                    <a:lstStyle/>
+                    <a:p>
+                      <a:pPr algn="ctr">
+                        <a:defRPr sz="1000" b="1">
+                          <a:solidFill>
+                            <a:srgbClr val="FFFFFF"/>
+                          </a:solidFill>
+                          <a:latin typeface="Calibri"/>
+                        </a:defRPr>
+                      </a:pPr>
+                      <a:r>
                         <a:t>Structural Risk</a:t>
+                      </a:r>
+                    </a:p>
+                    <a:p>
+                      <a:pPr algn="ctr">
+                        <a:defRPr sz="1000" b="1">
+                          <a:solidFill>
+                            <a:srgbClr val="FFFFFF"/>
+                          </a:solidFill>
+                          <a:latin typeface="Calibri"/>
+                        </a:defRPr>
+                      </a:pPr>
+                      <a:r>
+                        <a:t>(LTV &gt; 75%)</a:t>
                       </a:r>
                     </a:p>
                   </a:txBody>
